--- a/docs/XChannel-presentasi.pptx
+++ b/docs/XChannel-presentasi.pptx
@@ -121,25 +121,25 @@
   <p:extLst>
     <p:ext uri="{521415D9-36F7-43E2-AB2F-B90AF26B5E84}">
       <p14:sectionLst xmlns:p14="http://schemas.microsoft.com/office/powerpoint/2010/main">
-        <p14:section name="Pembuka" id="{04491aff-65cb-3ea9-379b-28816d49ddca}">
+        <p14:section name="Pembuka" id="{2fa26690-a188-be79-f6b1-7822a511513b}">
           <p14:sldIdLst>
             <p14:sldId id="256"/>
           </p14:sldIdLst>
         </p14:section>
-        <p14:section name="Produk" id="{4b2a8978-8d27-c562-472c-c87eed5e2322}">
+        <p14:section name="Produk" id="{610426f5-7b70-f439-3c8f-8dfb334ca038}">
           <p14:sldIdLst>
             <p14:sldId id="257"/>
             <p14:sldId id="258"/>
           </p14:sldIdLst>
         </p14:section>
-        <p14:section name="Desain sistem" id="{62e9231b-75c5-2327-e003-5b36229823b4}">
+        <p14:section name="Desain sistem" id="{a1b2097d-8f9f-2ac6-b353-c572482364f9}">
           <p14:sldIdLst>
             <p14:sldId id="259"/>
             <p14:sldId id="260"/>
             <p14:sldId id="261"/>
           </p14:sldIdLst>
         </p14:section>
-        <p14:section name="Aturan jadwal" id="{955f904c-a13b-1c68-fed3-5c369251867c}">
+        <p14:section name="Aturan jadwal" id="{be2839a7-4d50-6374-528b-9ef86510ebaa}">
           <p14:sldIdLst>
             <p14:sldId id="262"/>
             <p14:sldId id="263"/>
@@ -147,14 +147,14 @@
             <p14:sldId id="265"/>
           </p14:sldIdLst>
         </p14:section>
-        <p14:section name="Kode" id="{9724f9a9-f1de-3f1e-7059-e6ae318e3f82}">
+        <p14:section name="Kode" id="{ac7536fd-1922-568d-f62f-d5e65f9ef8a1}">
           <p14:sldIdLst>
             <p14:sldId id="266"/>
             <p14:sldId id="267"/>
             <p14:sldId id="268"/>
           </p14:sldIdLst>
         </p14:section>
-        <p14:section name="Penutup" id="{8759af48-4c0c-c5e3-4664-d4ed230840c5}">
+        <p14:section name="Penutup" id="{68f7b583-699f-604e-716f-92b72393e892}">
           <p14:sldIdLst>
             <p14:sldId id="269"/>
             <p14:sldId id="270"/>

--- a/docs/XChannel-presentasi.pptx
+++ b/docs/XChannel-presentasi.pptx
@@ -121,40 +121,40 @@
   <p:extLst>
     <p:ext uri="{521415D9-36F7-43E2-AB2F-B90AF26B5E84}">
       <p14:sectionLst xmlns:p14="http://schemas.microsoft.com/office/powerpoint/2010/main">
-        <p14:section name="Pembuka" id="{8c7d620b-3c98-3ebc-4e80-e901440b17d3}">
+        <p14:section name="Pembuka" id="{6cafd7c0-2ae9-c666-3e63-7ac703ff02eb}">
           <p14:sldIdLst>
             <p14:sldId id="256"/>
           </p14:sldIdLst>
         </p14:section>
-        <p14:section name="Produk" id="{c71dea55-0465-1244-4d83-2b392abbd67d}">
+        <p14:section name="Produk" id="{1ff58dc5-413c-bcf6-ea6d-b9cd3a5715a1}">
           <p14:sldIdLst>
             <p14:sldId id="257"/>
             <p14:sldId id="258"/>
           </p14:sldIdLst>
         </p14:section>
-        <p14:section name="Desain sistem" id="{37e2efcd-2f94-dd68-214f-1ffc8409985f}">
+        <p14:section name="Desain sistem" id="{71e5f6f1-df7e-4e66-337a-7ce6b7d9f201}">
           <p14:sldIdLst>
             <p14:sldId id="259"/>
             <p14:sldId id="260"/>
             <p14:sldId id="261"/>
+            <p14:sldId id="262"/>
           </p14:sldIdLst>
         </p14:section>
-        <p14:section name="Aturan jadwal" id="{ef3b8411-622f-1b34-081b-770c8a72ecf9}">
+        <p14:section name="Aturan jadwal" id="{bab7dc17-79fd-9c47-153f-1e7cc8369ef3}">
           <p14:sldIdLst>
-            <p14:sldId id="262"/>
             <p14:sldId id="263"/>
             <p14:sldId id="264"/>
             <p14:sldId id="265"/>
           </p14:sldIdLst>
         </p14:section>
-        <p14:section name="Kode" id="{6d57b58c-e59c-a051-524d-dcb861f6b0aa}">
+        <p14:section name="Kode" id="{e222315c-0483-3914-ed18-24b8d6bfd231}">
           <p14:sldIdLst>
             <p14:sldId id="266"/>
             <p14:sldId id="267"/>
             <p14:sldId id="268"/>
           </p14:sldIdLst>
         </p14:section>
-        <p14:section name="Penutup" id="{98b2369f-a9c8-74c2-d7f1-bf82e866ba2a}">
+        <p14:section name="Penutup" id="{c4f380d6-e3b0-5679-668e-c46f138db6ba}">
           <p14:sldIdLst>
             <p14:sldId id="269"/>
             <p14:sldId id="270"/>
@@ -652,7 +652,7 @@
           <a:p>
             <a:r>
               <a:rPr lang="en-US" dirty="0"/>
-              <a:t>Untuk setiap keputusan, sebutkan juga harganya. Pewawancara biasanya paling tertarik pada kolom terakhir.</a:t>
+              <a:t>Dashboard punya pemilih hari dan jam. Pilih Jumat 21:00: Banten sedang memutar musik otomatis.</a:t>
             </a:r>
             <a:endParaRPr lang="en-US" dirty="0"/>
           </a:p>
@@ -740,7 +740,7 @@
           <a:p>
             <a:r>
               <a:rPr lang="en-US" dirty="0"/>
-              <a:t>Kolom alternatif menunjukkan bahwa pilihannya disengaja. Siapkan satu contoh untuk tiap baris.</a:t>
+              <a:t>Untuk tiap baris, siapkan satu contoh dari proyek ini.</a:t>
             </a:r>
             <a:endParaRPr lang="en-US" dirty="0"/>
           </a:p>
@@ -1532,7 +1532,7 @@
           <a:p>
             <a:r>
               <a:rPr lang="en-US" dirty="0"/>
-              <a:t>Ini poin desain paling kuat. Struktur kolomnya sama persis; yang berbeda hanya stasiunnya. Itu data, bukan skema.</a:t>
+              <a:t>Tunjukkan alur dari kiri ke kanan: master data, lalu dokumen, lalu catatan.</a:t>
             </a:r>
             <a:endParaRPr lang="en-US" dirty="0"/>
           </a:p>
@@ -1620,7 +1620,7 @@
           <a:p>
             <a:r>
               <a:rPr lang="en-US" dirty="0"/>
-              <a:t>Semua contoh di kiri benar-benar ada di data produksi. Kolom TIME tidak dipakai karena 24:00 tidak valid di sana.</a:t>
+              <a:t>Ini poin desain paling kuat. Struktur kolomnya sama persis; yang berbeda hanya stasiunnya. Itu data, bukan skema.</a:t>
             </a:r>
             <a:endParaRPr lang="en-US" dirty="0"/>
           </a:p>
@@ -1708,7 +1708,7 @@
           <a:p>
             <a:r>
               <a:rPr lang="en-US" dirty="0"/>
-              <a:t>Demokan langsung: Jakarta, Senin sampai Rabu 09:00-11:00. Ditolak dengan nama program yang menghalangi, dan tidak ada hari yang tersimpan.</a:t>
+              <a:t>Semua contoh di kiri benar-benar ada di data produksi. Kolom TIME tidak dipakai karena 24:00 tidak valid di sana.</a:t>
             </a:r>
             <a:endParaRPr lang="en-US" dirty="0"/>
           </a:p>
@@ -1796,7 +1796,7 @@
           <a:p>
             <a:r>
               <a:rPr lang="en-US" dirty="0"/>
-              <a:t>Dashboard punya pemilih hari dan jam. Pilih Jumat 21:00: Banten sedang memutar musik otomatis.</a:t>
+              <a:t>Demokan langsung: Jakarta, Senin sampai Rabu 09:00-11:00. Ditolak dengan nama program yang menghalangi, dan tidak ada hari yang tersimpan.</a:t>
             </a:r>
             <a:endParaRPr lang="en-US" dirty="0"/>
           </a:p>
@@ -2749,932 +2749,767 @@
                   <a:schemeClr val="bg1"/>
                 </a:solidFill>
               </a:rPr>
-              <a:t>Trade-off yang saya pilih</a:t>
+              <a:t>Mengudara, berikutnya, dan jam kosong</a:t>
             </a:r>
             <a:endParaRPr lang="en-US" sz="3200" dirty="0"/>
           </a:p>
         </p:txBody>
       </p:sp>
-      <p:graphicFrame>
-        <p:nvGraphicFramePr>
-          <p:cNvPr id="11" name="Table 0"/>
-          <p:cNvGraphicFramePr>
-            <a:graphicFrameLocks noGrp="1"/>
-          </p:cNvGraphicFramePr>
-          <p:nvPr>
-            <p:extLst>
-              <p:ext uri="{D42A27DB-BD31-4B8C-83A1-F6EECF244321}">
-                <p14:modId xmlns:p14="http://schemas.microsoft.com/office/powerpoint/2010/main" val="1579011935"/>
-              </p:ext>
-            </p:extLst>
-          </p:nvPr>
-        </p:nvGraphicFramePr>
-        <p:xfrm>
-          <a:off x="548640" y="1463040"/>
-          <a:ext cx="11064240" cy="914400"/>
-        </p:xfrm>
-        <a:graphic>
-          <a:graphicData uri="http://schemas.openxmlformats.org/drawingml/2006/table">
-            <a:tbl>
-              <a:tblPr/>
-              <a:tblGrid>
-                <a:gridCol w="3291840"/>
-                <a:gridCol w="3931920"/>
-                <a:gridCol w="3840480"/>
-              </a:tblGrid>
-              <a:tr h="0">
-                <a:tc>
-                  <a:txBody>
-                    <a:bodyPr/>
-                    <a:lstStyle/>
-                    <a:p>
-                      <a:pPr indent="0" marL="0">
-                        <a:buNone/>
-                      </a:pPr>
-                      <a:r>
-                        <a:rPr lang="en-US" sz="1500" b="1" dirty="0">
-                          <a:solidFill>
-                            <a:srgbClr val="E0313E"/>
-                          </a:solidFill>
-                        </a:rPr>
-                        <a:t>Keputusan</a:t>
-                      </a:r>
-                      <a:endParaRPr lang="en-US" sz="1500" dirty="0"/>
-                    </a:p>
-                  </a:txBody>
-                  <a:tcPr marL="164592" marR="164592" marT="182880" marB="182880" anchor="t">
-                    <a:lnL w="9525" cap="flat" cmpd="sng" algn="ctr">
-                      <a:solidFill>
-                        <a:srgbClr val="3A3D46"/>
-                      </a:solidFill>
-                      <a:prstDash val="solid"/>
-                      <a:round/>
-                      <a:headEnd type="none" w="med" len="med"/>
-                      <a:tailEnd type="none" w="med" len="med"/>
-                    </a:lnL>
-                    <a:lnR w="9525" cap="flat" cmpd="sng" algn="ctr">
-                      <a:solidFill>
-                        <a:srgbClr val="3A3D46"/>
-                      </a:solidFill>
-                      <a:prstDash val="solid"/>
-                      <a:round/>
-                      <a:headEnd type="none" w="med" len="med"/>
-                      <a:tailEnd type="none" w="med" len="med"/>
-                    </a:lnR>
-                    <a:lnT w="9525" cap="flat" cmpd="sng" algn="ctr">
-                      <a:solidFill>
-                        <a:srgbClr val="3A3D46"/>
-                      </a:solidFill>
-                      <a:prstDash val="solid"/>
-                      <a:round/>
-                      <a:headEnd type="none" w="med" len="med"/>
-                      <a:tailEnd type="none" w="med" len="med"/>
-                    </a:lnT>
-                    <a:lnB w="9525" cap="flat" cmpd="sng" algn="ctr">
-                      <a:solidFill>
-                        <a:srgbClr val="3A3D46"/>
-                      </a:solidFill>
-                      <a:prstDash val="solid"/>
-                      <a:round/>
-                      <a:headEnd type="none" w="med" len="med"/>
-                      <a:tailEnd type="none" w="med" len="med"/>
-                    </a:lnB>
-                    <a:solidFill>
-                      <a:srgbClr val="25272E"/>
-                    </a:solidFill>
-                  </a:tcPr>
-                </a:tc>
-                <a:tc>
-                  <a:txBody>
-                    <a:bodyPr/>
-                    <a:lstStyle/>
-                    <a:p>
-                      <a:pPr indent="0" marL="0">
-                        <a:buNone/>
-                      </a:pPr>
-                      <a:r>
-                        <a:rPr lang="en-US" sz="1500" b="1" dirty="0">
-                          <a:solidFill>
-                            <a:srgbClr val="E0313E"/>
-                          </a:solidFill>
-                        </a:rPr>
-                        <a:t>Kenapa</a:t>
-                      </a:r>
-                      <a:endParaRPr lang="en-US" sz="1500" dirty="0"/>
-                    </a:p>
-                  </a:txBody>
-                  <a:tcPr marL="164592" marR="164592" marT="182880" marB="182880" anchor="t">
-                    <a:lnL w="9525" cap="flat" cmpd="sng" algn="ctr">
-                      <a:solidFill>
-                        <a:srgbClr val="3A3D46"/>
-                      </a:solidFill>
-                      <a:prstDash val="solid"/>
-                      <a:round/>
-                      <a:headEnd type="none" w="med" len="med"/>
-                      <a:tailEnd type="none" w="med" len="med"/>
-                    </a:lnL>
-                    <a:lnR w="9525" cap="flat" cmpd="sng" algn="ctr">
-                      <a:solidFill>
-                        <a:srgbClr val="3A3D46"/>
-                      </a:solidFill>
-                      <a:prstDash val="solid"/>
-                      <a:round/>
-                      <a:headEnd type="none" w="med" len="med"/>
-                      <a:tailEnd type="none" w="med" len="med"/>
-                    </a:lnR>
-                    <a:lnT w="9525" cap="flat" cmpd="sng" algn="ctr">
-                      <a:solidFill>
-                        <a:srgbClr val="3A3D46"/>
-                      </a:solidFill>
-                      <a:prstDash val="solid"/>
-                      <a:round/>
-                      <a:headEnd type="none" w="med" len="med"/>
-                      <a:tailEnd type="none" w="med" len="med"/>
-                    </a:lnT>
-                    <a:lnB w="9525" cap="flat" cmpd="sng" algn="ctr">
-                      <a:solidFill>
-                        <a:srgbClr val="3A3D46"/>
-                      </a:solidFill>
-                      <a:prstDash val="solid"/>
-                      <a:round/>
-                      <a:headEnd type="none" w="med" len="med"/>
-                      <a:tailEnd type="none" w="med" len="med"/>
-                    </a:lnB>
-                    <a:solidFill>
-                      <a:srgbClr val="25272E"/>
-                    </a:solidFill>
-                  </a:tcPr>
-                </a:tc>
-                <a:tc>
-                  <a:txBody>
-                    <a:bodyPr/>
-                    <a:lstStyle/>
-                    <a:p>
-                      <a:pPr indent="0" marL="0">
-                        <a:buNone/>
-                      </a:pPr>
-                      <a:r>
-                        <a:rPr lang="en-US" sz="1500" b="1" dirty="0">
-                          <a:solidFill>
-                            <a:srgbClr val="E0313E"/>
-                          </a:solidFill>
-                        </a:rPr>
-                        <a:t>Harganya</a:t>
-                      </a:r>
-                      <a:endParaRPr lang="en-US" sz="1500" dirty="0"/>
-                    </a:p>
-                  </a:txBody>
-                  <a:tcPr marL="164592" marR="164592" marT="182880" marB="182880" anchor="t">
-                    <a:lnL w="9525" cap="flat" cmpd="sng" algn="ctr">
-                      <a:solidFill>
-                        <a:srgbClr val="3A3D46"/>
-                      </a:solidFill>
-                      <a:prstDash val="solid"/>
-                      <a:round/>
-                      <a:headEnd type="none" w="med" len="med"/>
-                      <a:tailEnd type="none" w="med" len="med"/>
-                    </a:lnL>
-                    <a:lnR w="9525" cap="flat" cmpd="sng" algn="ctr">
-                      <a:solidFill>
-                        <a:srgbClr val="3A3D46"/>
-                      </a:solidFill>
-                      <a:prstDash val="solid"/>
-                      <a:round/>
-                      <a:headEnd type="none" w="med" len="med"/>
-                      <a:tailEnd type="none" w="med" len="med"/>
-                    </a:lnR>
-                    <a:lnT w="9525" cap="flat" cmpd="sng" algn="ctr">
-                      <a:solidFill>
-                        <a:srgbClr val="3A3D46"/>
-                      </a:solidFill>
-                      <a:prstDash val="solid"/>
-                      <a:round/>
-                      <a:headEnd type="none" w="med" len="med"/>
-                      <a:tailEnd type="none" w="med" len="med"/>
-                    </a:lnT>
-                    <a:lnB w="9525" cap="flat" cmpd="sng" algn="ctr">
-                      <a:solidFill>
-                        <a:srgbClr val="3A3D46"/>
-                      </a:solidFill>
-                      <a:prstDash val="solid"/>
-                      <a:round/>
-                      <a:headEnd type="none" w="med" len="med"/>
-                      <a:tailEnd type="none" w="med" len="med"/>
-                    </a:lnB>
-                    <a:solidFill>
-                      <a:srgbClr val="25272E"/>
-                    </a:solidFill>
-                  </a:tcPr>
-                </a:tc>
-              </a:tr>
-              <a:tr h="0">
-                <a:tc>
-                  <a:txBody>
-                    <a:bodyPr/>
-                    <a:lstStyle/>
-                    <a:p>
-                      <a:pPr indent="0" marL="0">
-                        <a:buNone/>
-                      </a:pPr>
-                      <a:r>
-                        <a:rPr lang="en-US" sz="1700" b="1" dirty="0">
-                          <a:solidFill>
-                            <a:srgbClr val="FFFFFF"/>
-                          </a:solidFill>
-                        </a:rPr>
-                        <a:t>Menit sejak tengah malam, bukan kolom TIME</a:t>
-                      </a:r>
-                      <a:endParaRPr lang="en-US" sz="1700" dirty="0"/>
-                    </a:p>
-                  </a:txBody>
-                  <a:tcPr marL="164592" marR="164592" marT="182880" marB="182880" anchor="t">
-                    <a:lnL w="9525" cap="flat" cmpd="sng" algn="ctr">
-                      <a:solidFill>
-                        <a:srgbClr val="3A3D46"/>
-                      </a:solidFill>
-                      <a:prstDash val="solid"/>
-                      <a:round/>
-                      <a:headEnd type="none" w="med" len="med"/>
-                      <a:tailEnd type="none" w="med" len="med"/>
-                    </a:lnL>
-                    <a:lnR w="9525" cap="flat" cmpd="sng" algn="ctr">
-                      <a:solidFill>
-                        <a:srgbClr val="3A3D46"/>
-                      </a:solidFill>
-                      <a:prstDash val="solid"/>
-                      <a:round/>
-                      <a:headEnd type="none" w="med" len="med"/>
-                      <a:tailEnd type="none" w="med" len="med"/>
-                    </a:lnR>
-                    <a:lnT w="9525" cap="flat" cmpd="sng" algn="ctr">
-                      <a:solidFill>
-                        <a:srgbClr val="3A3D46"/>
-                      </a:solidFill>
-                      <a:prstDash val="solid"/>
-                      <a:round/>
-                      <a:headEnd type="none" w="med" len="med"/>
-                      <a:tailEnd type="none" w="med" len="med"/>
-                    </a:lnT>
-                    <a:lnB w="9525" cap="flat" cmpd="sng" algn="ctr">
-                      <a:solidFill>
-                        <a:srgbClr val="3A3D46"/>
-                      </a:solidFill>
-                      <a:prstDash val="solid"/>
-                      <a:round/>
-                      <a:headEnd type="none" w="med" len="med"/>
-                      <a:tailEnd type="none" w="med" len="med"/>
-                    </a:lnB>
-                  </a:tcPr>
-                </a:tc>
-                <a:tc>
-                  <a:txBody>
-                    <a:bodyPr/>
-                    <a:lstStyle/>
-                    <a:p>
-                      <a:pPr indent="0" marL="0">
-                        <a:buNone/>
-                      </a:pPr>
-                      <a:r>
-                        <a:rPr lang="en-US" sz="1700" dirty="0">
-                          <a:solidFill>
-                            <a:srgbClr val="AEB2BC"/>
-                          </a:solidFill>
-                        </a:rPr>
-                        <a:t>24:00 valid; cek bentrok jadi perbandingan integer</a:t>
-                      </a:r>
-                      <a:endParaRPr lang="en-US" sz="1700" dirty="0"/>
-                    </a:p>
-                  </a:txBody>
-                  <a:tcPr marL="164592" marR="164592" marT="182880" marB="182880" anchor="t">
-                    <a:lnL w="9525" cap="flat" cmpd="sng" algn="ctr">
-                      <a:solidFill>
-                        <a:srgbClr val="3A3D46"/>
-                      </a:solidFill>
-                      <a:prstDash val="solid"/>
-                      <a:round/>
-                      <a:headEnd type="none" w="med" len="med"/>
-                      <a:tailEnd type="none" w="med" len="med"/>
-                    </a:lnL>
-                    <a:lnR w="9525" cap="flat" cmpd="sng" algn="ctr">
-                      <a:solidFill>
-                        <a:srgbClr val="3A3D46"/>
-                      </a:solidFill>
-                      <a:prstDash val="solid"/>
-                      <a:round/>
-                      <a:headEnd type="none" w="med" len="med"/>
-                      <a:tailEnd type="none" w="med" len="med"/>
-                    </a:lnR>
-                    <a:lnT w="9525" cap="flat" cmpd="sng" algn="ctr">
-                      <a:solidFill>
-                        <a:srgbClr val="3A3D46"/>
-                      </a:solidFill>
-                      <a:prstDash val="solid"/>
-                      <a:round/>
-                      <a:headEnd type="none" w="med" len="med"/>
-                      <a:tailEnd type="none" w="med" len="med"/>
-                    </a:lnT>
-                    <a:lnB w="9525" cap="flat" cmpd="sng" algn="ctr">
-                      <a:solidFill>
-                        <a:srgbClr val="3A3D46"/>
-                      </a:solidFill>
-                      <a:prstDash val="solid"/>
-                      <a:round/>
-                      <a:headEnd type="none" w="med" len="med"/>
-                      <a:tailEnd type="none" w="med" len="med"/>
-                    </a:lnB>
-                  </a:tcPr>
-                </a:tc>
-                <a:tc>
-                  <a:txBody>
-                    <a:bodyPr/>
-                    <a:lstStyle/>
-                    <a:p>
-                      <a:pPr indent="0" marL="0">
-                        <a:buNone/>
-                      </a:pPr>
-                      <a:r>
-                        <a:rPr lang="en-US" sz="1700" dirty="0">
-                          <a:solidFill>
-                            <a:srgbClr val="AEB2BC"/>
-                          </a:solidFill>
-                        </a:rPr>
-                        <a:t>Setiap tampilan harus mengonversi (Clock::format)</a:t>
-                      </a:r>
-                      <a:endParaRPr lang="en-US" sz="1700" dirty="0"/>
-                    </a:p>
-                  </a:txBody>
-                  <a:tcPr marL="164592" marR="164592" marT="182880" marB="182880" anchor="t">
-                    <a:lnL w="9525" cap="flat" cmpd="sng" algn="ctr">
-                      <a:solidFill>
-                        <a:srgbClr val="3A3D46"/>
-                      </a:solidFill>
-                      <a:prstDash val="solid"/>
-                      <a:round/>
-                      <a:headEnd type="none" w="med" len="med"/>
-                      <a:tailEnd type="none" w="med" len="med"/>
-                    </a:lnL>
-                    <a:lnR w="9525" cap="flat" cmpd="sng" algn="ctr">
-                      <a:solidFill>
-                        <a:srgbClr val="3A3D46"/>
-                      </a:solidFill>
-                      <a:prstDash val="solid"/>
-                      <a:round/>
-                      <a:headEnd type="none" w="med" len="med"/>
-                      <a:tailEnd type="none" w="med" len="med"/>
-                    </a:lnR>
-                    <a:lnT w="9525" cap="flat" cmpd="sng" algn="ctr">
-                      <a:solidFill>
-                        <a:srgbClr val="3A3D46"/>
-                      </a:solidFill>
-                      <a:prstDash val="solid"/>
-                      <a:round/>
-                      <a:headEnd type="none" w="med" len="med"/>
-                      <a:tailEnd type="none" w="med" len="med"/>
-                    </a:lnT>
-                    <a:lnB w="9525" cap="flat" cmpd="sng" algn="ctr">
-                      <a:solidFill>
-                        <a:srgbClr val="3A3D46"/>
-                      </a:solidFill>
-                      <a:prstDash val="solid"/>
-                      <a:round/>
-                      <a:headEnd type="none" w="med" len="med"/>
-                      <a:tailEnd type="none" w="med" len="med"/>
-                    </a:lnB>
-                  </a:tcPr>
-                </a:tc>
-              </a:tr>
-              <a:tr h="0">
-                <a:tc>
-                  <a:txBody>
-                    <a:bodyPr/>
-                    <a:lstStyle/>
-                    <a:p>
-                      <a:pPr indent="0" marL="0">
-                        <a:buNone/>
-                      </a:pPr>
-                      <a:r>
-                        <a:rPr lang="en-US" sz="1700" b="1" dirty="0">
-                          <a:solidFill>
-                            <a:srgbClr val="FFFFFF"/>
-                          </a:solidFill>
-                        </a:rPr>
-                        <a:t>Program lewat tengah malam dipecah</a:t>
-                      </a:r>
-                      <a:endParaRPr lang="en-US" sz="1700" dirty="0"/>
-                    </a:p>
-                  </a:txBody>
-                  <a:tcPr marL="164592" marR="164592" marT="182880" marB="182880" anchor="t">
-                    <a:lnL w="9525" cap="flat" cmpd="sng" algn="ctr">
-                      <a:solidFill>
-                        <a:srgbClr val="3A3D46"/>
-                      </a:solidFill>
-                      <a:prstDash val="solid"/>
-                      <a:round/>
-                      <a:headEnd type="none" w="med" len="med"/>
-                      <a:tailEnd type="none" w="med" len="med"/>
-                    </a:lnL>
-                    <a:lnR w="9525" cap="flat" cmpd="sng" algn="ctr">
-                      <a:solidFill>
-                        <a:srgbClr val="3A3D46"/>
-                      </a:solidFill>
-                      <a:prstDash val="solid"/>
-                      <a:round/>
-                      <a:headEnd type="none" w="med" len="med"/>
-                      <a:tailEnd type="none" w="med" len="med"/>
-                    </a:lnR>
-                    <a:lnT w="9525" cap="flat" cmpd="sng" algn="ctr">
-                      <a:solidFill>
-                        <a:srgbClr val="3A3D46"/>
-                      </a:solidFill>
-                      <a:prstDash val="solid"/>
-                      <a:round/>
-                      <a:headEnd type="none" w="med" len="med"/>
-                      <a:tailEnd type="none" w="med" len="med"/>
-                    </a:lnT>
-                    <a:lnB w="9525" cap="flat" cmpd="sng" algn="ctr">
-                      <a:solidFill>
-                        <a:srgbClr val="3A3D46"/>
-                      </a:solidFill>
-                      <a:prstDash val="solid"/>
-                      <a:round/>
-                      <a:headEnd type="none" w="med" len="med"/>
-                      <a:tailEnd type="none" w="med" len="med"/>
-                    </a:lnB>
-                  </a:tcPr>
-                </a:tc>
-                <a:tc>
-                  <a:txBody>
-                    <a:bodyPr/>
-                    <a:lstStyle/>
-                    <a:p>
-                      <a:pPr indent="0" marL="0">
-                        <a:buNone/>
-                      </a:pPr>
-                      <a:r>
-                        <a:rPr lang="en-US" sz="1700" dirty="0">
-                          <a:solidFill>
-                            <a:srgbClr val="AEB2BC"/>
-                          </a:solidFill>
-                        </a:rPr>
-                        <a:t>Satu slot = satu hari, semua query tetap sederhana</a:t>
-                      </a:r>
-                      <a:endParaRPr lang="en-US" sz="1700" dirty="0"/>
-                    </a:p>
-                  </a:txBody>
-                  <a:tcPr marL="164592" marR="164592" marT="182880" marB="182880" anchor="t">
-                    <a:lnL w="9525" cap="flat" cmpd="sng" algn="ctr">
-                      <a:solidFill>
-                        <a:srgbClr val="3A3D46"/>
-                      </a:solidFill>
-                      <a:prstDash val="solid"/>
-                      <a:round/>
-                      <a:headEnd type="none" w="med" len="med"/>
-                      <a:tailEnd type="none" w="med" len="med"/>
-                    </a:lnL>
-                    <a:lnR w="9525" cap="flat" cmpd="sng" algn="ctr">
-                      <a:solidFill>
-                        <a:srgbClr val="3A3D46"/>
-                      </a:solidFill>
-                      <a:prstDash val="solid"/>
-                      <a:round/>
-                      <a:headEnd type="none" w="med" len="med"/>
-                      <a:tailEnd type="none" w="med" len="med"/>
-                    </a:lnR>
-                    <a:lnT w="9525" cap="flat" cmpd="sng" algn="ctr">
-                      <a:solidFill>
-                        <a:srgbClr val="3A3D46"/>
-                      </a:solidFill>
-                      <a:prstDash val="solid"/>
-                      <a:round/>
-                      <a:headEnd type="none" w="med" len="med"/>
-                      <a:tailEnd type="none" w="med" len="med"/>
-                    </a:lnT>
-                    <a:lnB w="9525" cap="flat" cmpd="sng" algn="ctr">
-                      <a:solidFill>
-                        <a:srgbClr val="3A3D46"/>
-                      </a:solidFill>
-                      <a:prstDash val="solid"/>
-                      <a:round/>
-                      <a:headEnd type="none" w="med" len="med"/>
-                      <a:tailEnd type="none" w="med" len="med"/>
-                    </a:lnB>
-                  </a:tcPr>
-                </a:tc>
-                <a:tc>
-                  <a:txBody>
-                    <a:bodyPr/>
-                    <a:lstStyle/>
-                    <a:p>
-                      <a:pPr indent="0" marL="0">
-                        <a:buNone/>
-                      </a:pPr>
-                      <a:r>
-                        <a:rPr lang="en-US" sz="1700" dirty="0">
-                          <a:solidFill>
-                            <a:srgbClr val="AEB2BC"/>
-                          </a:solidFill>
-                        </a:rPr>
-                        <a:t>Begadang Jumat jadi dua baris</a:t>
-                      </a:r>
-                      <a:endParaRPr lang="en-US" sz="1700" dirty="0"/>
-                    </a:p>
-                  </a:txBody>
-                  <a:tcPr marL="164592" marR="164592" marT="182880" marB="182880" anchor="t">
-                    <a:lnL w="9525" cap="flat" cmpd="sng" algn="ctr">
-                      <a:solidFill>
-                        <a:srgbClr val="3A3D46"/>
-                      </a:solidFill>
-                      <a:prstDash val="solid"/>
-                      <a:round/>
-                      <a:headEnd type="none" w="med" len="med"/>
-                      <a:tailEnd type="none" w="med" len="med"/>
-                    </a:lnL>
-                    <a:lnR w="9525" cap="flat" cmpd="sng" algn="ctr">
-                      <a:solidFill>
-                        <a:srgbClr val="3A3D46"/>
-                      </a:solidFill>
-                      <a:prstDash val="solid"/>
-                      <a:round/>
-                      <a:headEnd type="none" w="med" len="med"/>
-                      <a:tailEnd type="none" w="med" len="med"/>
-                    </a:lnR>
-                    <a:lnT w="9525" cap="flat" cmpd="sng" algn="ctr">
-                      <a:solidFill>
-                        <a:srgbClr val="3A3D46"/>
-                      </a:solidFill>
-                      <a:prstDash val="solid"/>
-                      <a:round/>
-                      <a:headEnd type="none" w="med" len="med"/>
-                      <a:tailEnd type="none" w="med" len="med"/>
-                    </a:lnT>
-                    <a:lnB w="9525" cap="flat" cmpd="sng" algn="ctr">
-                      <a:solidFill>
-                        <a:srgbClr val="3A3D46"/>
-                      </a:solidFill>
-                      <a:prstDash val="solid"/>
-                      <a:round/>
-                      <a:headEnd type="none" w="med" len="med"/>
-                      <a:tailEnd type="none" w="med" len="med"/>
-                    </a:lnB>
-                  </a:tcPr>
-                </a:tc>
-              </a:tr>
-              <a:tr h="0">
-                <a:tc>
-                  <a:txBody>
-                    <a:bodyPr/>
-                    <a:lstStyle/>
-                    <a:p>
-                      <a:pPr indent="0" marL="0">
-                        <a:buNone/>
-                      </a:pPr>
-                      <a:r>
-                        <a:rPr lang="en-US" sz="1700" b="1" dirty="0">
-                          <a:solidFill>
-                            <a:srgbClr val="FFFFFF"/>
-                          </a:solidFill>
-                        </a:rPr>
-                        <a:t>Co-host dihitung satu slot penuh</a:t>
-                      </a:r>
-                      <a:endParaRPr lang="en-US" sz="1700" dirty="0"/>
-                    </a:p>
-                  </a:txBody>
-                  <a:tcPr marL="164592" marR="164592" marT="182880" marB="182880" anchor="t">
-                    <a:lnL w="9525" cap="flat" cmpd="sng" algn="ctr">
-                      <a:solidFill>
-                        <a:srgbClr val="3A3D46"/>
-                      </a:solidFill>
-                      <a:prstDash val="solid"/>
-                      <a:round/>
-                      <a:headEnd type="none" w="med" len="med"/>
-                      <a:tailEnd type="none" w="med" len="med"/>
-                    </a:lnL>
-                    <a:lnR w="9525" cap="flat" cmpd="sng" algn="ctr">
-                      <a:solidFill>
-                        <a:srgbClr val="3A3D46"/>
-                      </a:solidFill>
-                      <a:prstDash val="solid"/>
-                      <a:round/>
-                      <a:headEnd type="none" w="med" len="med"/>
-                      <a:tailEnd type="none" w="med" len="med"/>
-                    </a:lnR>
-                    <a:lnT w="9525" cap="flat" cmpd="sng" algn="ctr">
-                      <a:solidFill>
-                        <a:srgbClr val="3A3D46"/>
-                      </a:solidFill>
-                      <a:prstDash val="solid"/>
-                      <a:round/>
-                      <a:headEnd type="none" w="med" len="med"/>
-                      <a:tailEnd type="none" w="med" len="med"/>
-                    </a:lnT>
-                    <a:lnB w="9525" cap="flat" cmpd="sng" algn="ctr">
-                      <a:solidFill>
-                        <a:srgbClr val="3A3D46"/>
-                      </a:solidFill>
-                      <a:prstDash val="solid"/>
-                      <a:round/>
-                      <a:headEnd type="none" w="med" len="med"/>
-                      <a:tailEnd type="none" w="med" len="med"/>
-                    </a:lnB>
-                  </a:tcPr>
-                </a:tc>
-                <a:tc>
-                  <a:txBody>
-                    <a:bodyPr/>
-                    <a:lstStyle/>
-                    <a:p>
-                      <a:pPr indent="0" marL="0">
-                        <a:buNone/>
-                      </a:pPr>
-                      <a:r>
-                        <a:rPr lang="en-US" sz="1700" dirty="0">
-                          <a:solidFill>
-                            <a:srgbClr val="AEB2BC"/>
-                          </a:solidFill>
-                        </a:rPr>
-                        <a:t>Keduanya bekerja selama slot itu</a:t>
-                      </a:r>
-                      <a:endParaRPr lang="en-US" sz="1700" dirty="0"/>
-                    </a:p>
-                  </a:txBody>
-                  <a:tcPr marL="164592" marR="164592" marT="182880" marB="182880" anchor="t">
-                    <a:lnL w="9525" cap="flat" cmpd="sng" algn="ctr">
-                      <a:solidFill>
-                        <a:srgbClr val="3A3D46"/>
-                      </a:solidFill>
-                      <a:prstDash val="solid"/>
-                      <a:round/>
-                      <a:headEnd type="none" w="med" len="med"/>
-                      <a:tailEnd type="none" w="med" len="med"/>
-                    </a:lnL>
-                    <a:lnR w="9525" cap="flat" cmpd="sng" algn="ctr">
-                      <a:solidFill>
-                        <a:srgbClr val="3A3D46"/>
-                      </a:solidFill>
-                      <a:prstDash val="solid"/>
-                      <a:round/>
-                      <a:headEnd type="none" w="med" len="med"/>
-                      <a:tailEnd type="none" w="med" len="med"/>
-                    </a:lnR>
-                    <a:lnT w="9525" cap="flat" cmpd="sng" algn="ctr">
-                      <a:solidFill>
-                        <a:srgbClr val="3A3D46"/>
-                      </a:solidFill>
-                      <a:prstDash val="solid"/>
-                      <a:round/>
-                      <a:headEnd type="none" w="med" len="med"/>
-                      <a:tailEnd type="none" w="med" len="med"/>
-                    </a:lnT>
-                    <a:lnB w="9525" cap="flat" cmpd="sng" algn="ctr">
-                      <a:solidFill>
-                        <a:srgbClr val="3A3D46"/>
-                      </a:solidFill>
-                      <a:prstDash val="solid"/>
-                      <a:round/>
-                      <a:headEnd type="none" w="med" len="med"/>
-                      <a:tailEnd type="none" w="med" len="med"/>
-                    </a:lnB>
-                  </a:tcPr>
-                </a:tc>
-                <a:tc>
-                  <a:txBody>
-                    <a:bodyPr/>
-                    <a:lstStyle/>
-                    <a:p>
-                      <a:pPr indent="0" marL="0">
-                        <a:buNone/>
-                      </a:pPr>
-                      <a:r>
-                        <a:rPr lang="en-US" sz="1700" dirty="0">
-                          <a:solidFill>
-                            <a:srgbClr val="AEB2BC"/>
-                          </a:solidFill>
-                        </a:rPr>
-                        <a:t>Total per penyiar lebih besar dari total per stasiun</a:t>
-                      </a:r>
-                      <a:endParaRPr lang="en-US" sz="1700" dirty="0"/>
-                    </a:p>
-                  </a:txBody>
-                  <a:tcPr marL="164592" marR="164592" marT="182880" marB="182880" anchor="t">
-                    <a:lnL w="9525" cap="flat" cmpd="sng" algn="ctr">
-                      <a:solidFill>
-                        <a:srgbClr val="3A3D46"/>
-                      </a:solidFill>
-                      <a:prstDash val="solid"/>
-                      <a:round/>
-                      <a:headEnd type="none" w="med" len="med"/>
-                      <a:tailEnd type="none" w="med" len="med"/>
-                    </a:lnL>
-                    <a:lnR w="9525" cap="flat" cmpd="sng" algn="ctr">
-                      <a:solidFill>
-                        <a:srgbClr val="3A3D46"/>
-                      </a:solidFill>
-                      <a:prstDash val="solid"/>
-                      <a:round/>
-                      <a:headEnd type="none" w="med" len="med"/>
-                      <a:tailEnd type="none" w="med" len="med"/>
-                    </a:lnR>
-                    <a:lnT w="9525" cap="flat" cmpd="sng" algn="ctr">
-                      <a:solidFill>
-                        <a:srgbClr val="3A3D46"/>
-                      </a:solidFill>
-                      <a:prstDash val="solid"/>
-                      <a:round/>
-                      <a:headEnd type="none" w="med" len="med"/>
-                      <a:tailEnd type="none" w="med" len="med"/>
-                    </a:lnT>
-                    <a:lnB w="9525" cap="flat" cmpd="sng" algn="ctr">
-                      <a:solidFill>
-                        <a:srgbClr val="3A3D46"/>
-                      </a:solidFill>
-                      <a:prstDash val="solid"/>
-                      <a:round/>
-                      <a:headEnd type="none" w="med" len="med"/>
-                      <a:tailEnd type="none" w="med" len="med"/>
-                    </a:lnB>
-                  </a:tcPr>
-                </a:tc>
-              </a:tr>
-              <a:tr h="0">
-                <a:tc>
-                  <a:txBody>
-                    <a:bodyPr/>
-                    <a:lstStyle/>
-                    <a:p>
-                      <a:pPr indent="0" marL="0">
-                        <a:buNone/>
-                      </a:pPr>
-                      <a:r>
-                        <a:rPr lang="en-US" sz="1700" b="1" dirty="0">
-                          <a:solidFill>
-                            <a:srgbClr val="FFFFFF"/>
-                          </a:solidFill>
-                        </a:rPr>
-                        <a:t>Nonaktifkan, bukan hapus</a:t>
-                      </a:r>
-                      <a:endParaRPr lang="en-US" sz="1700" dirty="0"/>
-                    </a:p>
-                  </a:txBody>
-                  <a:tcPr marL="164592" marR="164592" marT="182880" marB="182880" anchor="t">
-                    <a:lnL w="9525" cap="flat" cmpd="sng" algn="ctr">
-                      <a:solidFill>
-                        <a:srgbClr val="3A3D46"/>
-                      </a:solidFill>
-                      <a:prstDash val="solid"/>
-                      <a:round/>
-                      <a:headEnd type="none" w="med" len="med"/>
-                      <a:tailEnd type="none" w="med" len="med"/>
-                    </a:lnL>
-                    <a:lnR w="9525" cap="flat" cmpd="sng" algn="ctr">
-                      <a:solidFill>
-                        <a:srgbClr val="3A3D46"/>
-                      </a:solidFill>
-                      <a:prstDash val="solid"/>
-                      <a:round/>
-                      <a:headEnd type="none" w="med" len="med"/>
-                      <a:tailEnd type="none" w="med" len="med"/>
-                    </a:lnR>
-                    <a:lnT w="9525" cap="flat" cmpd="sng" algn="ctr">
-                      <a:solidFill>
-                        <a:srgbClr val="3A3D46"/>
-                      </a:solidFill>
-                      <a:prstDash val="solid"/>
-                      <a:round/>
-                      <a:headEnd type="none" w="med" len="med"/>
-                      <a:tailEnd type="none" w="med" len="med"/>
-                    </a:lnT>
-                    <a:lnB w="9525" cap="flat" cmpd="sng" algn="ctr">
-                      <a:solidFill>
-                        <a:srgbClr val="3A3D46"/>
-                      </a:solidFill>
-                      <a:prstDash val="solid"/>
-                      <a:round/>
-                      <a:headEnd type="none" w="med" len="med"/>
-                      <a:tailEnd type="none" w="med" len="med"/>
-                    </a:lnB>
-                  </a:tcPr>
-                </a:tc>
-                <a:tc>
-                  <a:txBody>
-                    <a:bodyPr/>
-                    <a:lstStyle/>
-                    <a:p>
-                      <a:pPr indent="0" marL="0">
-                        <a:buNone/>
-                      </a:pPr>
-                      <a:r>
-                        <a:rPr lang="en-US" sz="1700" dirty="0">
-                          <a:solidFill>
-                            <a:srgbClr val="AEB2BC"/>
-                          </a:solidFill>
-                        </a:rPr>
-                        <a:t>Riwayat jadwal tetap utuh</a:t>
-                      </a:r>
-                      <a:endParaRPr lang="en-US" sz="1700" dirty="0"/>
-                    </a:p>
-                  </a:txBody>
-                  <a:tcPr marL="164592" marR="164592" marT="182880" marB="182880" anchor="t">
-                    <a:lnL w="9525" cap="flat" cmpd="sng" algn="ctr">
-                      <a:solidFill>
-                        <a:srgbClr val="3A3D46"/>
-                      </a:solidFill>
-                      <a:prstDash val="solid"/>
-                      <a:round/>
-                      <a:headEnd type="none" w="med" len="med"/>
-                      <a:tailEnd type="none" w="med" len="med"/>
-                    </a:lnL>
-                    <a:lnR w="9525" cap="flat" cmpd="sng" algn="ctr">
-                      <a:solidFill>
-                        <a:srgbClr val="3A3D46"/>
-                      </a:solidFill>
-                      <a:prstDash val="solid"/>
-                      <a:round/>
-                      <a:headEnd type="none" w="med" len="med"/>
-                      <a:tailEnd type="none" w="med" len="med"/>
-                    </a:lnR>
-                    <a:lnT w="9525" cap="flat" cmpd="sng" algn="ctr">
-                      <a:solidFill>
-                        <a:srgbClr val="3A3D46"/>
-                      </a:solidFill>
-                      <a:prstDash val="solid"/>
-                      <a:round/>
-                      <a:headEnd type="none" w="med" len="med"/>
-                      <a:tailEnd type="none" w="med" len="med"/>
-                    </a:lnT>
-                    <a:lnB w="9525" cap="flat" cmpd="sng" algn="ctr">
-                      <a:solidFill>
-                        <a:srgbClr val="3A3D46"/>
-                      </a:solidFill>
-                      <a:prstDash val="solid"/>
-                      <a:round/>
-                      <a:headEnd type="none" w="med" len="med"/>
-                      <a:tailEnd type="none" w="med" len="med"/>
-                    </a:lnB>
-                  </a:tcPr>
-                </a:tc>
-                <a:tc>
-                  <a:txBody>
-                    <a:bodyPr/>
-                    <a:lstStyle/>
-                    <a:p>
-                      <a:pPr indent="0" marL="0">
-                        <a:buNone/>
-                      </a:pPr>
-                      <a:r>
-                        <a:rPr lang="en-US" sz="1700" dirty="0">
-                          <a:solidFill>
-                            <a:srgbClr val="AEB2BC"/>
-                          </a:solidFill>
-                        </a:rPr>
-                        <a:t>Daftar perlu filter aktif</a:t>
-                      </a:r>
-                      <a:endParaRPr lang="en-US" sz="1700" dirty="0"/>
-                    </a:p>
-                  </a:txBody>
-                  <a:tcPr marL="164592" marR="164592" marT="182880" marB="182880" anchor="t">
-                    <a:lnL w="9525" cap="flat" cmpd="sng" algn="ctr">
-                      <a:solidFill>
-                        <a:srgbClr val="3A3D46"/>
-                      </a:solidFill>
-                      <a:prstDash val="solid"/>
-                      <a:round/>
-                      <a:headEnd type="none" w="med" len="med"/>
-                      <a:tailEnd type="none" w="med" len="med"/>
-                    </a:lnL>
-                    <a:lnR w="9525" cap="flat" cmpd="sng" algn="ctr">
-                      <a:solidFill>
-                        <a:srgbClr val="3A3D46"/>
-                      </a:solidFill>
-                      <a:prstDash val="solid"/>
-                      <a:round/>
-                      <a:headEnd type="none" w="med" len="med"/>
-                      <a:tailEnd type="none" w="med" len="med"/>
-                    </a:lnR>
-                    <a:lnT w="9525" cap="flat" cmpd="sng" algn="ctr">
-                      <a:solidFill>
-                        <a:srgbClr val="3A3D46"/>
-                      </a:solidFill>
-                      <a:prstDash val="solid"/>
-                      <a:round/>
-                      <a:headEnd type="none" w="med" len="med"/>
-                      <a:tailEnd type="none" w="med" len="med"/>
-                    </a:lnT>
-                    <a:lnB w="9525" cap="flat" cmpd="sng" algn="ctr">
-                      <a:solidFill>
-                        <a:srgbClr val="3A3D46"/>
-                      </a:solidFill>
-                      <a:prstDash val="solid"/>
-                      <a:round/>
-                      <a:headEnd type="none" w="med" len="med"/>
-                      <a:tailEnd type="none" w="med" len="med"/>
-                    </a:lnB>
-                  </a:tcPr>
-                </a:tc>
-              </a:tr>
-            </a:tbl>
-          </a:graphicData>
-        </a:graphic>
-      </p:graphicFrame>
+      <p:sp>
+        <p:nvSpPr>
+          <p:cNvPr id="4" name="Text 1"/>
+          <p:cNvSpPr txBox="1"/>
+          <p:nvPr/>
+        </p:nvSpPr>
+        <p:spPr>
+          <a:xfrm>
+            <a:off x="548640" y="1691640"/>
+            <a:ext cx="731520" cy="228600"/>
+          </a:xfrm>
+          <a:prstGeom prst="rect">
+            <a:avLst/>
+          </a:prstGeom>
+          <a:noFill/>
+          <a:ln/>
+        </p:spPr>
+        <p:txBody>
+          <a:bodyPr wrap="square" lIns="0" tIns="0" rIns="0" bIns="0" rtlCol="0" anchor="ctr"/>
+          <a:lstStyle/>
+          <a:p>
+            <a:pPr algn="l" indent="0" marL="0">
+              <a:buNone/>
+            </a:pPr>
+            <a:r>
+              <a:rPr lang="en-US" sz="1000" dirty="0">
+                <a:solidFill>
+                  <a:schemeClr val="accent5"/>
+                </a:solidFill>
+              </a:rPr>
+              <a:t>00:00</a:t>
+            </a:r>
+            <a:endParaRPr lang="en-US" sz="1000" dirty="0"/>
+          </a:p>
+        </p:txBody>
+      </p:sp>
+      <p:sp>
+        <p:nvSpPr>
+          <p:cNvPr id="5" name="Text 2"/>
+          <p:cNvSpPr txBox="1"/>
+          <p:nvPr/>
+        </p:nvSpPr>
+        <p:spPr>
+          <a:xfrm>
+            <a:off x="2948940" y="1691640"/>
+            <a:ext cx="731520" cy="228600"/>
+          </a:xfrm>
+          <a:prstGeom prst="rect">
+            <a:avLst/>
+          </a:prstGeom>
+          <a:noFill/>
+          <a:ln/>
+        </p:spPr>
+        <p:txBody>
+          <a:bodyPr wrap="square" lIns="0" tIns="0" rIns="0" bIns="0" rtlCol="0" anchor="ctr"/>
+          <a:lstStyle/>
+          <a:p>
+            <a:pPr algn="ctr" indent="0" marL="0">
+              <a:buNone/>
+            </a:pPr>
+            <a:r>
+              <a:rPr lang="en-US" sz="1000" dirty="0">
+                <a:solidFill>
+                  <a:schemeClr val="accent5"/>
+                </a:solidFill>
+              </a:rPr>
+              <a:t>06:00</a:t>
+            </a:r>
+            <a:endParaRPr lang="en-US" sz="1000" dirty="0"/>
+          </a:p>
+        </p:txBody>
+      </p:sp>
+      <p:sp>
+        <p:nvSpPr>
+          <p:cNvPr id="6" name="Text 3"/>
+          <p:cNvSpPr txBox="1"/>
+          <p:nvPr/>
+        </p:nvSpPr>
+        <p:spPr>
+          <a:xfrm>
+            <a:off x="5715000" y="1691640"/>
+            <a:ext cx="731520" cy="228600"/>
+          </a:xfrm>
+          <a:prstGeom prst="rect">
+            <a:avLst/>
+          </a:prstGeom>
+          <a:noFill/>
+          <a:ln/>
+        </p:spPr>
+        <p:txBody>
+          <a:bodyPr wrap="square" lIns="0" tIns="0" rIns="0" bIns="0" rtlCol="0" anchor="ctr"/>
+          <a:lstStyle/>
+          <a:p>
+            <a:pPr algn="ctr" indent="0" marL="0">
+              <a:buNone/>
+            </a:pPr>
+            <a:r>
+              <a:rPr lang="en-US" sz="1000" dirty="0">
+                <a:solidFill>
+                  <a:schemeClr val="accent5"/>
+                </a:solidFill>
+              </a:rPr>
+              <a:t>12:00</a:t>
+            </a:r>
+            <a:endParaRPr lang="en-US" sz="1000" dirty="0"/>
+          </a:p>
+        </p:txBody>
+      </p:sp>
+      <p:sp>
+        <p:nvSpPr>
+          <p:cNvPr id="7" name="Text 4"/>
+          <p:cNvSpPr txBox="1"/>
+          <p:nvPr/>
+        </p:nvSpPr>
+        <p:spPr>
+          <a:xfrm>
+            <a:off x="8481060" y="1691640"/>
+            <a:ext cx="731520" cy="228600"/>
+          </a:xfrm>
+          <a:prstGeom prst="rect">
+            <a:avLst/>
+          </a:prstGeom>
+          <a:noFill/>
+          <a:ln/>
+        </p:spPr>
+        <p:txBody>
+          <a:bodyPr wrap="square" lIns="0" tIns="0" rIns="0" bIns="0" rtlCol="0" anchor="ctr"/>
+          <a:lstStyle/>
+          <a:p>
+            <a:pPr algn="ctr" indent="0" marL="0">
+              <a:buNone/>
+            </a:pPr>
+            <a:r>
+              <a:rPr lang="en-US" sz="1000" dirty="0">
+                <a:solidFill>
+                  <a:schemeClr val="accent5"/>
+                </a:solidFill>
+              </a:rPr>
+              <a:t>18:00</a:t>
+            </a:r>
+            <a:endParaRPr lang="en-US" sz="1000" dirty="0"/>
+          </a:p>
+        </p:txBody>
+      </p:sp>
+      <p:sp>
+        <p:nvSpPr>
+          <p:cNvPr id="8" name="Text 5"/>
+          <p:cNvSpPr txBox="1"/>
+          <p:nvPr/>
+        </p:nvSpPr>
+        <p:spPr>
+          <a:xfrm>
+            <a:off x="10881360" y="1691640"/>
+            <a:ext cx="731520" cy="228600"/>
+          </a:xfrm>
+          <a:prstGeom prst="rect">
+            <a:avLst/>
+          </a:prstGeom>
+          <a:noFill/>
+          <a:ln/>
+        </p:spPr>
+        <p:txBody>
+          <a:bodyPr wrap="square" lIns="0" tIns="0" rIns="0" bIns="0" rtlCol="0" anchor="ctr"/>
+          <a:lstStyle/>
+          <a:p>
+            <a:pPr algn="r" indent="0" marL="0">
+              <a:buNone/>
+            </a:pPr>
+            <a:r>
+              <a:rPr lang="en-US" sz="1000" dirty="0">
+                <a:solidFill>
+                  <a:schemeClr val="accent5"/>
+                </a:solidFill>
+              </a:rPr>
+              <a:t>24:00</a:t>
+            </a:r>
+            <a:endParaRPr lang="en-US" sz="1000" dirty="0"/>
+          </a:p>
+        </p:txBody>
+      </p:sp>
+      <p:sp>
+        <p:nvSpPr>
+          <p:cNvPr id="9" name="Shape 6"/>
+          <p:cNvSpPr/>
+          <p:nvPr/>
+        </p:nvSpPr>
+        <p:spPr>
+          <a:xfrm>
+            <a:off x="548640" y="2011680"/>
+            <a:ext cx="11064240" cy="594360"/>
+          </a:xfrm>
+          <a:prstGeom prst="roundRect">
+            <a:avLst>
+              <a:gd name="adj" fmla="val 9231"/>
+            </a:avLst>
+          </a:prstGeom>
+          <a:solidFill>
+            <a:schemeClr val="accent4"/>
+          </a:solidFill>
+          <a:ln w="12700">
+            <a:solidFill>
+              <a:schemeClr val="accent4"/>
+            </a:solidFill>
+            <a:prstDash val="solid"/>
+          </a:ln>
+        </p:spPr>
+      </p:sp>
+      <p:sp>
+        <p:nvSpPr>
+          <p:cNvPr id="10" name="Shape 7"/>
+          <p:cNvSpPr/>
+          <p:nvPr/>
+        </p:nvSpPr>
+        <p:spPr>
+          <a:xfrm>
+            <a:off x="3332988" y="2057400"/>
+            <a:ext cx="1807464" cy="502920"/>
+          </a:xfrm>
+          <a:prstGeom prst="roundRect">
+            <a:avLst>
+              <a:gd name="adj" fmla="val 9091"/>
+            </a:avLst>
+          </a:prstGeom>
+          <a:solidFill>
+            <a:schemeClr val="bg1"/>
+          </a:solidFill>
+          <a:ln w="12700">
+            <a:solidFill>
+              <a:schemeClr val="bg1"/>
+            </a:solidFill>
+            <a:prstDash val="solid"/>
+          </a:ln>
+        </p:spPr>
+      </p:sp>
+      <p:sp>
+        <p:nvSpPr>
+          <p:cNvPr id="11" name="Text 8"/>
+          <p:cNvSpPr txBox="1"/>
+          <p:nvPr/>
+        </p:nvSpPr>
+        <p:spPr>
+          <a:xfrm>
+            <a:off x="3369564" y="2011680"/>
+            <a:ext cx="1752600" cy="594360"/>
+          </a:xfrm>
+          <a:prstGeom prst="rect">
+            <a:avLst/>
+          </a:prstGeom>
+          <a:noFill/>
+          <a:ln/>
+        </p:spPr>
+        <p:txBody>
+          <a:bodyPr wrap="square" lIns="0" tIns="0" rIns="0" bIns="0" rtlCol="0" anchor="ctr"/>
+          <a:lstStyle/>
+          <a:p>
+            <a:pPr indent="0" marL="0">
+              <a:buNone/>
+            </a:pPr>
+            <a:r>
+              <a:rPr lang="en-US" sz="1000" dirty="0">
+                <a:solidFill>
+                  <a:schemeClr val="tx1"/>
+                </a:solidFill>
+              </a:rPr>
+              <a:t>Pagi Banten</a:t>
+            </a:r>
+            <a:endParaRPr lang="en-US" sz="1000" dirty="0"/>
+          </a:p>
+        </p:txBody>
+      </p:sp>
+      <p:sp>
+        <p:nvSpPr>
+          <p:cNvPr id="12" name="Shape 9"/>
+          <p:cNvSpPr/>
+          <p:nvPr/>
+        </p:nvSpPr>
+        <p:spPr>
+          <a:xfrm>
+            <a:off x="7943088" y="2057400"/>
+            <a:ext cx="1346454" cy="502920"/>
+          </a:xfrm>
+          <a:prstGeom prst="roundRect">
+            <a:avLst>
+              <a:gd name="adj" fmla="val 9091"/>
+            </a:avLst>
+          </a:prstGeom>
+          <a:solidFill>
+            <a:schemeClr val="bg1"/>
+          </a:solidFill>
+          <a:ln w="12700">
+            <a:solidFill>
+              <a:schemeClr val="bg1"/>
+            </a:solidFill>
+            <a:prstDash val="solid"/>
+          </a:ln>
+        </p:spPr>
+      </p:sp>
+      <p:sp>
+        <p:nvSpPr>
+          <p:cNvPr id="13" name="Text 10"/>
+          <p:cNvSpPr txBox="1"/>
+          <p:nvPr/>
+        </p:nvSpPr>
+        <p:spPr>
+          <a:xfrm>
+            <a:off x="7979664" y="2011680"/>
+            <a:ext cx="1291590" cy="594360"/>
+          </a:xfrm>
+          <a:prstGeom prst="rect">
+            <a:avLst/>
+          </a:prstGeom>
+          <a:noFill/>
+          <a:ln/>
+        </p:spPr>
+        <p:txBody>
+          <a:bodyPr wrap="square" lIns="0" tIns="0" rIns="0" bIns="0" rtlCol="0" anchor="ctr"/>
+          <a:lstStyle/>
+          <a:p>
+            <a:pPr indent="0" marL="0">
+              <a:buNone/>
+            </a:pPr>
+            <a:r>
+              <a:rPr lang="en-US" sz="1000" dirty="0">
+                <a:solidFill>
+                  <a:schemeClr val="tx1"/>
+                </a:solidFill>
+              </a:rPr>
+              <a:t>Jalan Pulang</a:t>
+            </a:r>
+            <a:endParaRPr lang="en-US" sz="1000" dirty="0"/>
+          </a:p>
+        </p:txBody>
+      </p:sp>
+      <p:sp>
+        <p:nvSpPr>
+          <p:cNvPr id="14" name="Shape 11"/>
+          <p:cNvSpPr/>
+          <p:nvPr/>
+        </p:nvSpPr>
+        <p:spPr>
+          <a:xfrm>
+            <a:off x="4467225" y="1901952"/>
+            <a:ext cx="914" cy="813816"/>
+          </a:xfrm>
+          <a:prstGeom prst="line">
+            <a:avLst/>
+          </a:prstGeom>
+          <a:noFill/>
+          <a:ln w="31750">
+            <a:solidFill>
+              <a:schemeClr val="accent1"/>
+            </a:solidFill>
+            <a:prstDash val="solid"/>
+          </a:ln>
+        </p:spPr>
+      </p:sp>
+      <p:sp>
+        <p:nvSpPr>
+          <p:cNvPr id="15" name="Text 12"/>
+          <p:cNvSpPr txBox="1"/>
+          <p:nvPr/>
+        </p:nvSpPr>
+        <p:spPr>
+          <a:xfrm>
+            <a:off x="548640" y="2743200"/>
+            <a:ext cx="11064240" cy="320040"/>
+          </a:xfrm>
+          <a:prstGeom prst="rect">
+            <a:avLst/>
+          </a:prstGeom>
+          <a:noFill/>
+          <a:ln/>
+        </p:spPr>
+        <p:txBody>
+          <a:bodyPr wrap="square" lIns="0" tIns="0" rIns="0" bIns="0" rtlCol="0" anchor="ctr"/>
+          <a:lstStyle/>
+          <a:p>
+            <a:pPr indent="0" marL="0">
+              <a:buNone/>
+            </a:pPr>
+            <a:r>
+              <a:rPr lang="en-US" sz="1300" dirty="0">
+                <a:solidFill>
+                  <a:schemeClr val="bg2"/>
+                </a:solidFill>
+              </a:rPr>
+              <a:t>XChannel Banten, Senin 08:30. Garis merah = sekarang; abu-abu = musik otomatis.</a:t>
+            </a:r>
+            <a:endParaRPr lang="en-US" sz="1300" dirty="0"/>
+          </a:p>
+        </p:txBody>
+      </p:sp>
+      <p:sp>
+        <p:nvSpPr>
+          <p:cNvPr id="16" name="Shape 13"/>
+          <p:cNvSpPr/>
+          <p:nvPr/>
+        </p:nvSpPr>
+        <p:spPr>
+          <a:xfrm>
+            <a:off x="548640" y="3657600"/>
+            <a:ext cx="640080" cy="640080"/>
+          </a:xfrm>
+          <a:prstGeom prst="ellipse">
+            <a:avLst/>
+          </a:prstGeom>
+          <a:solidFill>
+            <a:schemeClr val="accent1"/>
+          </a:solidFill>
+          <a:ln w="12700">
+            <a:solidFill>
+              <a:schemeClr val="accent1"/>
+            </a:solidFill>
+            <a:prstDash val="solid"/>
+          </a:ln>
+        </p:spPr>
+      </p:sp>
+      <p:pic>
+        <p:nvPicPr>
+          <p:cNvPr id="17" name="Image 0" descr="preencoded.png">    </p:cNvPr>
+          <p:cNvPicPr>
+            <a:picLocks noChangeAspect="1"/>
+          </p:cNvPicPr>
+          <p:nvPr/>
+        </p:nvPicPr>
+        <p:blipFill>
+          <a:blip r:embed="rId1"/>
+          <a:stretch>
+            <a:fillRect/>
+          </a:stretch>
+        </p:blipFill>
+        <p:spPr>
+          <a:xfrm>
+            <a:off x="702259" y="3811219"/>
+            <a:ext cx="332842" cy="332842"/>
+          </a:xfrm>
+          <a:prstGeom prst="rect">
+            <a:avLst/>
+          </a:prstGeom>
+        </p:spPr>
+      </p:pic>
+      <p:sp>
+        <p:nvSpPr>
+          <p:cNvPr id="18" name="Text 14"/>
+          <p:cNvSpPr txBox="1"/>
+          <p:nvPr/>
+        </p:nvSpPr>
+        <p:spPr>
+          <a:xfrm>
+            <a:off x="548640" y="4526280"/>
+            <a:ext cx="3474720" cy="411480"/>
+          </a:xfrm>
+          <a:prstGeom prst="rect">
+            <a:avLst/>
+          </a:prstGeom>
+          <a:noFill/>
+          <a:ln/>
+        </p:spPr>
+        <p:txBody>
+          <a:bodyPr wrap="square" lIns="0" tIns="0" rIns="0" bIns="0" rtlCol="0" anchor="ctr"/>
+          <a:lstStyle/>
+          <a:p>
+            <a:pPr indent="0" marL="0">
+              <a:buNone/>
+            </a:pPr>
+            <a:r>
+              <a:rPr lang="en-US" sz="1800" b="1" dirty="0">
+                <a:solidFill>
+                  <a:schemeClr val="bg1"/>
+                </a:solidFill>
+              </a:rPr>
+              <a:t>Mengudara</a:t>
+            </a:r>
+            <a:endParaRPr lang="en-US" sz="1800" dirty="0"/>
+          </a:p>
+        </p:txBody>
+      </p:sp>
+      <p:sp>
+        <p:nvSpPr>
+          <p:cNvPr id="19" name="Text 15"/>
+          <p:cNvSpPr txBox="1"/>
+          <p:nvPr/>
+        </p:nvSpPr>
+        <p:spPr>
+          <a:xfrm>
+            <a:off x="548640" y="4983480"/>
+            <a:ext cx="3474720" cy="1097280"/>
+          </a:xfrm>
+          <a:prstGeom prst="rect">
+            <a:avLst/>
+          </a:prstGeom>
+          <a:noFill/>
+          <a:ln/>
+        </p:spPr>
+        <p:txBody>
+          <a:bodyPr wrap="square" lIns="0" tIns="0" rIns="0" bIns="0" rtlCol="0" anchor="t"/>
+          <a:lstStyle/>
+          <a:p>
+            <a:pPr indent="0" marL="0">
+              <a:buNone/>
+            </a:pPr>
+            <a:r>
+              <a:rPr lang="en-US" sz="1500" dirty="0">
+                <a:solidFill>
+                  <a:schemeClr val="bg2"/>
+                </a:solidFill>
+              </a:rPr>
+              <a:t>Slot hari ini dengan mulai &lt;= sekarang &lt; selesai. Satu query ber-index.</a:t>
+            </a:r>
+            <a:endParaRPr lang="en-US" sz="1500" dirty="0"/>
+          </a:p>
+        </p:txBody>
+      </p:sp>
+      <p:sp>
+        <p:nvSpPr>
+          <p:cNvPr id="20" name="Shape 16"/>
+          <p:cNvSpPr/>
+          <p:nvPr/>
+        </p:nvSpPr>
+        <p:spPr>
+          <a:xfrm>
+            <a:off x="4297680" y="3657600"/>
+            <a:ext cx="640080" cy="640080"/>
+          </a:xfrm>
+          <a:prstGeom prst="ellipse">
+            <a:avLst/>
+          </a:prstGeom>
+          <a:solidFill>
+            <a:schemeClr val="accent1"/>
+          </a:solidFill>
+          <a:ln w="12700">
+            <a:solidFill>
+              <a:schemeClr val="accent1"/>
+            </a:solidFill>
+            <a:prstDash val="solid"/>
+          </a:ln>
+        </p:spPr>
+      </p:sp>
+      <p:pic>
+        <p:nvPicPr>
+          <p:cNvPr id="21" name="Image 1" descr="preencoded.png">    </p:cNvPr>
+          <p:cNvPicPr>
+            <a:picLocks noChangeAspect="1"/>
+          </p:cNvPicPr>
+          <p:nvPr/>
+        </p:nvPicPr>
+        <p:blipFill>
+          <a:blip r:embed="rId2"/>
+          <a:stretch>
+            <a:fillRect/>
+          </a:stretch>
+        </p:blipFill>
+        <p:spPr>
+          <a:xfrm>
+            <a:off x="4451299" y="3811219"/>
+            <a:ext cx="332842" cy="332842"/>
+          </a:xfrm>
+          <a:prstGeom prst="rect">
+            <a:avLst/>
+          </a:prstGeom>
+        </p:spPr>
+      </p:pic>
+      <p:sp>
+        <p:nvSpPr>
+          <p:cNvPr id="22" name="Text 17"/>
+          <p:cNvSpPr txBox="1"/>
+          <p:nvPr/>
+        </p:nvSpPr>
+        <p:spPr>
+          <a:xfrm>
+            <a:off x="4297680" y="4526280"/>
+            <a:ext cx="3474720" cy="411480"/>
+          </a:xfrm>
+          <a:prstGeom prst="rect">
+            <a:avLst/>
+          </a:prstGeom>
+          <a:noFill/>
+          <a:ln/>
+        </p:spPr>
+        <p:txBody>
+          <a:bodyPr wrap="square" lIns="0" tIns="0" rIns="0" bIns="0" rtlCol="0" anchor="ctr"/>
+          <a:lstStyle/>
+          <a:p>
+            <a:pPr indent="0" marL="0">
+              <a:buNone/>
+            </a:pPr>
+            <a:r>
+              <a:rPr lang="en-US" sz="1800" b="1" dirty="0">
+                <a:solidFill>
+                  <a:schemeClr val="bg1"/>
+                </a:solidFill>
+              </a:rPr>
+              <a:t>Berikutnya</a:t>
+            </a:r>
+            <a:endParaRPr lang="en-US" sz="1800" dirty="0"/>
+          </a:p>
+        </p:txBody>
+      </p:sp>
+      <p:sp>
+        <p:nvSpPr>
+          <p:cNvPr id="23" name="Text 18"/>
+          <p:cNvSpPr txBox="1"/>
+          <p:nvPr/>
+        </p:nvSpPr>
+        <p:spPr>
+          <a:xfrm>
+            <a:off x="4297680" y="4983480"/>
+            <a:ext cx="3474720" cy="1097280"/>
+          </a:xfrm>
+          <a:prstGeom prst="rect">
+            <a:avLst/>
+          </a:prstGeom>
+          <a:noFill/>
+          <a:ln/>
+        </p:spPr>
+        <p:txBody>
+          <a:bodyPr wrap="square" lIns="0" tIns="0" rIns="0" bIns="0" rtlCol="0" anchor="t"/>
+          <a:lstStyle/>
+          <a:p>
+            <a:pPr indent="0" marL="0">
+              <a:buNone/>
+            </a:pPr>
+            <a:r>
+              <a:rPr lang="en-US" sz="1500" dirty="0">
+                <a:solidFill>
+                  <a:schemeClr val="bg2"/>
+                </a:solidFill>
+              </a:rPr>
+              <a:t>Slot pertama setelah sekarang, lanjut ke hari berikutnya sampai seminggu.</a:t>
+            </a:r>
+            <a:endParaRPr lang="en-US" sz="1500" dirty="0"/>
+          </a:p>
+        </p:txBody>
+      </p:sp>
+      <p:sp>
+        <p:nvSpPr>
+          <p:cNvPr id="24" name="Shape 19"/>
+          <p:cNvSpPr/>
+          <p:nvPr/>
+        </p:nvSpPr>
+        <p:spPr>
+          <a:xfrm>
+            <a:off x="8046720" y="3657600"/>
+            <a:ext cx="640080" cy="640080"/>
+          </a:xfrm>
+          <a:prstGeom prst="ellipse">
+            <a:avLst/>
+          </a:prstGeom>
+          <a:solidFill>
+            <a:schemeClr val="accent1"/>
+          </a:solidFill>
+          <a:ln w="12700">
+            <a:solidFill>
+              <a:schemeClr val="accent1"/>
+            </a:solidFill>
+            <a:prstDash val="solid"/>
+          </a:ln>
+        </p:spPr>
+      </p:sp>
+      <p:pic>
+        <p:nvPicPr>
+          <p:cNvPr id="25" name="Image 2" descr="preencoded.png">    </p:cNvPr>
+          <p:cNvPicPr>
+            <a:picLocks noChangeAspect="1"/>
+          </p:cNvPicPr>
+          <p:nvPr/>
+        </p:nvPicPr>
+        <p:blipFill>
+          <a:blip r:embed="rId3"/>
+          <a:stretch>
+            <a:fillRect/>
+          </a:stretch>
+        </p:blipFill>
+        <p:spPr>
+          <a:xfrm>
+            <a:off x="8200339" y="3811219"/>
+            <a:ext cx="332842" cy="332842"/>
+          </a:xfrm>
+          <a:prstGeom prst="rect">
+            <a:avLst/>
+          </a:prstGeom>
+        </p:spPr>
+      </p:pic>
+      <p:sp>
+        <p:nvSpPr>
+          <p:cNvPr id="26" name="Text 20"/>
+          <p:cNvSpPr txBox="1"/>
+          <p:nvPr/>
+        </p:nvSpPr>
+        <p:spPr>
+          <a:xfrm>
+            <a:off x="8046720" y="4526280"/>
+            <a:ext cx="3474720" cy="411480"/>
+          </a:xfrm>
+          <a:prstGeom prst="rect">
+            <a:avLst/>
+          </a:prstGeom>
+          <a:noFill/>
+          <a:ln/>
+        </p:spPr>
+        <p:txBody>
+          <a:bodyPr wrap="square" lIns="0" tIns="0" rIns="0" bIns="0" rtlCol="0" anchor="ctr"/>
+          <a:lstStyle/>
+          <a:p>
+            <a:pPr indent="0" marL="0">
+              <a:buNone/>
+            </a:pPr>
+            <a:r>
+              <a:rPr lang="en-US" sz="1800" b="1" dirty="0">
+                <a:solidFill>
+                  <a:schemeClr val="bg1"/>
+                </a:solidFill>
+              </a:rPr>
+              <a:t>Jam kosong</a:t>
+            </a:r>
+            <a:endParaRPr lang="en-US" sz="1800" dirty="0"/>
+          </a:p>
+        </p:txBody>
+      </p:sp>
+      <p:sp>
+        <p:nvSpPr>
+          <p:cNvPr id="27" name="Text 21"/>
+          <p:cNvSpPr txBox="1"/>
+          <p:nvPr/>
+        </p:nvSpPr>
+        <p:spPr>
+          <a:xfrm>
+            <a:off x="8046720" y="4983480"/>
+            <a:ext cx="3474720" cy="1097280"/>
+          </a:xfrm>
+          <a:prstGeom prst="rect">
+            <a:avLst/>
+          </a:prstGeom>
+          <a:noFill/>
+          <a:ln/>
+        </p:spPr>
+        <p:txBody>
+          <a:bodyPr wrap="square" lIns="0" tIns="0" rIns="0" bIns="0" rtlCol="0" anchor="t"/>
+          <a:lstStyle/>
+          <a:p>
+            <a:pPr indent="0" marL="0">
+              <a:buNone/>
+            </a:pPr>
+            <a:r>
+              <a:rPr lang="en-US" sz="1500" dirty="0">
+                <a:solidFill>
+                  <a:schemeClr val="bg2"/>
+                </a:solidFill>
+              </a:rPr>
+              <a:t>Dihitung dari jadwal, tidak disimpan. Jam siaran per stasiun dari 168 jam.</a:t>
+            </a:r>
+            <a:endParaRPr lang="en-US" sz="1500" dirty="0"/>
+          </a:p>
+        </p:txBody>
+      </p:sp>
       <p:sp>
         <p:nvSpPr>
           <p:cNvPr id="25" name="Slide Number Placeholder 0"/>
@@ -3777,7 +3612,7 @@
                   <a:schemeClr val="bg1"/>
                 </a:solidFill>
               </a:rPr>
-              <a:t>Kenapa stack ini, dan apa alternatifnya</a:t>
+              <a:t>Kenapa stack ini</a:t>
             </a:r>
             <a:endParaRPr lang="en-US" sz="3200" dirty="0"/>
           </a:p>
@@ -3806,9 +3641,8 @@
             <a:tbl>
               <a:tblPr/>
               <a:tblGrid>
-                <a:gridCol w="2194560"/>
-                <a:gridCol w="3840480"/>
-                <a:gridCol w="5029200"/>
+                <a:gridCol w="3108960"/>
+                <a:gridCol w="7955280"/>
               </a:tblGrid>
               <a:tr h="0">
                 <a:tc>
@@ -3887,67 +3721,6 @@
                           </a:solidFill>
                         </a:rPr>
                         <a:t>Kenapa</a:t>
-                      </a:r>
-                      <a:endParaRPr lang="en-US" sz="1500" dirty="0"/>
-                    </a:p>
-                  </a:txBody>
-                  <a:tcPr marL="164592" marR="164592" marT="182880" marB="182880" anchor="t">
-                    <a:lnL w="9525" cap="flat" cmpd="sng" algn="ctr">
-                      <a:solidFill>
-                        <a:srgbClr val="3A3D46"/>
-                      </a:solidFill>
-                      <a:prstDash val="solid"/>
-                      <a:round/>
-                      <a:headEnd type="none" w="med" len="med"/>
-                      <a:tailEnd type="none" w="med" len="med"/>
-                    </a:lnL>
-                    <a:lnR w="9525" cap="flat" cmpd="sng" algn="ctr">
-                      <a:solidFill>
-                        <a:srgbClr val="3A3D46"/>
-                      </a:solidFill>
-                      <a:prstDash val="solid"/>
-                      <a:round/>
-                      <a:headEnd type="none" w="med" len="med"/>
-                      <a:tailEnd type="none" w="med" len="med"/>
-                    </a:lnR>
-                    <a:lnT w="9525" cap="flat" cmpd="sng" algn="ctr">
-                      <a:solidFill>
-                        <a:srgbClr val="3A3D46"/>
-                      </a:solidFill>
-                      <a:prstDash val="solid"/>
-                      <a:round/>
-                      <a:headEnd type="none" w="med" len="med"/>
-                      <a:tailEnd type="none" w="med" len="med"/>
-                    </a:lnT>
-                    <a:lnB w="9525" cap="flat" cmpd="sng" algn="ctr">
-                      <a:solidFill>
-                        <a:srgbClr val="3A3D46"/>
-                      </a:solidFill>
-                      <a:prstDash val="solid"/>
-                      <a:round/>
-                      <a:headEnd type="none" w="med" len="med"/>
-                      <a:tailEnd type="none" w="med" len="med"/>
-                    </a:lnB>
-                    <a:solidFill>
-                      <a:srgbClr val="25272E"/>
-                    </a:solidFill>
-                  </a:tcPr>
-                </a:tc>
-                <a:tc>
-                  <a:txBody>
-                    <a:bodyPr/>
-                    <a:lstStyle/>
-                    <a:p>
-                      <a:pPr indent="0" marL="0">
-                        <a:buNone/>
-                      </a:pPr>
-                      <a:r>
-                        <a:rPr lang="en-US" sz="1500" b="1" dirty="0">
-                          <a:solidFill>
-                            <a:srgbClr val="E0313E"/>
-                          </a:solidFill>
-                        </a:rPr>
-                        <a:t>Alternatif yang saya pertimbangkan</a:t>
                       </a:r>
                       <a:endParaRPr lang="en-US" sz="1500" dirty="0"/>
                     </a:p>
@@ -4112,64 +3885,6 @@
                     </a:lnB>
                   </a:tcPr>
                 </a:tc>
-                <a:tc>
-                  <a:txBody>
-                    <a:bodyPr/>
-                    <a:lstStyle/>
-                    <a:p>
-                      <a:pPr indent="0" marL="0">
-                        <a:buNone/>
-                      </a:pPr>
-                      <a:r>
-                        <a:rPr lang="en-US" sz="1700" dirty="0">
-                          <a:solidFill>
-                            <a:srgbClr val="AEB2BC"/>
-                          </a:solidFill>
-                        </a:rPr>
-                        <a:t>Admin generator (Filament): lebih cepat, tapi aturan jadwal tersebar di konfigurasi</a:t>
-                      </a:r>
-                      <a:endParaRPr lang="en-US" sz="1700" dirty="0"/>
-                    </a:p>
-                  </a:txBody>
-                  <a:tcPr marL="164592" marR="164592" marT="182880" marB="182880" anchor="t">
-                    <a:lnL w="9525" cap="flat" cmpd="sng" algn="ctr">
-                      <a:solidFill>
-                        <a:srgbClr val="3A3D46"/>
-                      </a:solidFill>
-                      <a:prstDash val="solid"/>
-                      <a:round/>
-                      <a:headEnd type="none" w="med" len="med"/>
-                      <a:tailEnd type="none" w="med" len="med"/>
-                    </a:lnL>
-                    <a:lnR w="9525" cap="flat" cmpd="sng" algn="ctr">
-                      <a:solidFill>
-                        <a:srgbClr val="3A3D46"/>
-                      </a:solidFill>
-                      <a:prstDash val="solid"/>
-                      <a:round/>
-                      <a:headEnd type="none" w="med" len="med"/>
-                      <a:tailEnd type="none" w="med" len="med"/>
-                    </a:lnR>
-                    <a:lnT w="9525" cap="flat" cmpd="sng" algn="ctr">
-                      <a:solidFill>
-                        <a:srgbClr val="3A3D46"/>
-                      </a:solidFill>
-                      <a:prstDash val="solid"/>
-                      <a:round/>
-                      <a:headEnd type="none" w="med" len="med"/>
-                      <a:tailEnd type="none" w="med" len="med"/>
-                    </a:lnT>
-                    <a:lnB w="9525" cap="flat" cmpd="sng" algn="ctr">
-                      <a:solidFill>
-                        <a:srgbClr val="3A3D46"/>
-                      </a:solidFill>
-                      <a:prstDash val="solid"/>
-                      <a:round/>
-                      <a:headEnd type="none" w="med" len="med"/>
-                      <a:tailEnd type="none" w="med" len="med"/>
-                    </a:lnB>
-                  </a:tcPr>
-                </a:tc>
               </a:tr>
               <a:tr h="0">
                 <a:tc>
@@ -4244,65 +3959,7 @@
                             <a:srgbClr val="AEB2BC"/>
                           </a:solidFill>
                         </a:rPr>
-                        <a:t>Database produksi</a:t>
-                      </a:r>
-                      <a:endParaRPr lang="en-US" sz="1700" dirty="0"/>
-                    </a:p>
-                  </a:txBody>
-                  <a:tcPr marL="164592" marR="164592" marT="182880" marB="182880" anchor="t">
-                    <a:lnL w="9525" cap="flat" cmpd="sng" algn="ctr">
-                      <a:solidFill>
-                        <a:srgbClr val="3A3D46"/>
-                      </a:solidFill>
-                      <a:prstDash val="solid"/>
-                      <a:round/>
-                      <a:headEnd type="none" w="med" len="med"/>
-                      <a:tailEnd type="none" w="med" len="med"/>
-                    </a:lnL>
-                    <a:lnR w="9525" cap="flat" cmpd="sng" algn="ctr">
-                      <a:solidFill>
-                        <a:srgbClr val="3A3D46"/>
-                      </a:solidFill>
-                      <a:prstDash val="solid"/>
-                      <a:round/>
-                      <a:headEnd type="none" w="med" len="med"/>
-                      <a:tailEnd type="none" w="med" len="med"/>
-                    </a:lnR>
-                    <a:lnT w="9525" cap="flat" cmpd="sng" algn="ctr">
-                      <a:solidFill>
-                        <a:srgbClr val="3A3D46"/>
-                      </a:solidFill>
-                      <a:prstDash val="solid"/>
-                      <a:round/>
-                      <a:headEnd type="none" w="med" len="med"/>
-                      <a:tailEnd type="none" w="med" len="med"/>
-                    </a:lnT>
-                    <a:lnB w="9525" cap="flat" cmpd="sng" algn="ctr">
-                      <a:solidFill>
-                        <a:srgbClr val="3A3D46"/>
-                      </a:solidFill>
-                      <a:prstDash val="solid"/>
-                      <a:round/>
-                      <a:headEnd type="none" w="med" len="med"/>
-                      <a:tailEnd type="none" w="med" len="med"/>
-                    </a:lnB>
-                  </a:tcPr>
-                </a:tc>
-                <a:tc>
-                  <a:txBody>
-                    <a:bodyPr/>
-                    <a:lstStyle/>
-                    <a:p>
-                      <a:pPr indent="0" marL="0">
-                        <a:buNone/>
-                      </a:pPr>
-                      <a:r>
-                        <a:rPr lang="en-US" sz="1700" dirty="0">
-                          <a:solidFill>
-                            <a:srgbClr val="AEB2BC"/>
-                          </a:solidFill>
-                        </a:rPr>
-                        <a:t>PostgreSQL punya exclusion constraint yang bisa mencegah bentrok di database. Tidak dipakai supaya sama dengan produksi; aturannya di service</a:t>
+                        <a:t>Database produksi. Kodenya tetap jalan di SQLite (tes) dan PostgreSQL (demo online)</a:t>
                       </a:r>
                       <a:endParaRPr lang="en-US" sz="1700" dirty="0"/>
                     </a:p>
@@ -4464,64 +4121,6 @@
                     </a:lnB>
                   </a:tcPr>
                 </a:tc>
-                <a:tc>
-                  <a:txBody>
-                    <a:bodyPr/>
-                    <a:lstStyle/>
-                    <a:p>
-                      <a:pPr indent="0" marL="0">
-                        <a:buNone/>
-                      </a:pPr>
-                      <a:r>
-                        <a:rPr lang="en-US" sz="1700" dirty="0">
-                          <a:solidFill>
-                            <a:srgbClr val="AEB2BC"/>
-                          </a:solidFill>
-                        </a:rPr>
-                        <a:t>Vue atau React: tidak perlu untuk halaman admin ini</a:t>
-                      </a:r>
-                      <a:endParaRPr lang="en-US" sz="1700" dirty="0"/>
-                    </a:p>
-                  </a:txBody>
-                  <a:tcPr marL="164592" marR="164592" marT="182880" marB="182880" anchor="t">
-                    <a:lnL w="9525" cap="flat" cmpd="sng" algn="ctr">
-                      <a:solidFill>
-                        <a:srgbClr val="3A3D46"/>
-                      </a:solidFill>
-                      <a:prstDash val="solid"/>
-                      <a:round/>
-                      <a:headEnd type="none" w="med" len="med"/>
-                      <a:tailEnd type="none" w="med" len="med"/>
-                    </a:lnL>
-                    <a:lnR w="9525" cap="flat" cmpd="sng" algn="ctr">
-                      <a:solidFill>
-                        <a:srgbClr val="3A3D46"/>
-                      </a:solidFill>
-                      <a:prstDash val="solid"/>
-                      <a:round/>
-                      <a:headEnd type="none" w="med" len="med"/>
-                      <a:tailEnd type="none" w="med" len="med"/>
-                    </a:lnR>
-                    <a:lnT w="9525" cap="flat" cmpd="sng" algn="ctr">
-                      <a:solidFill>
-                        <a:srgbClr val="3A3D46"/>
-                      </a:solidFill>
-                      <a:prstDash val="solid"/>
-                      <a:round/>
-                      <a:headEnd type="none" w="med" len="med"/>
-                      <a:tailEnd type="none" w="med" len="med"/>
-                    </a:lnT>
-                    <a:lnB w="9525" cap="flat" cmpd="sng" algn="ctr">
-                      <a:solidFill>
-                        <a:srgbClr val="3A3D46"/>
-                      </a:solidFill>
-                      <a:prstDash val="solid"/>
-                      <a:round/>
-                      <a:headEnd type="none" w="med" len="med"/>
-                      <a:tailEnd type="none" w="med" len="med"/>
-                    </a:lnB>
-                  </a:tcPr>
-                </a:tc>
               </a:tr>
               <a:tr h="0">
                 <a:tc>
@@ -4597,64 +4196,6 @@
                           </a:solidFill>
                         </a:rPr>
                         <a:t>19 feature test pada aturan jadwal</a:t>
-                      </a:r>
-                      <a:endParaRPr lang="en-US" sz="1700" dirty="0"/>
-                    </a:p>
-                  </a:txBody>
-                  <a:tcPr marL="164592" marR="164592" marT="182880" marB="182880" anchor="t">
-                    <a:lnL w="9525" cap="flat" cmpd="sng" algn="ctr">
-                      <a:solidFill>
-                        <a:srgbClr val="3A3D46"/>
-                      </a:solidFill>
-                      <a:prstDash val="solid"/>
-                      <a:round/>
-                      <a:headEnd type="none" w="med" len="med"/>
-                      <a:tailEnd type="none" w="med" len="med"/>
-                    </a:lnL>
-                    <a:lnR w="9525" cap="flat" cmpd="sng" algn="ctr">
-                      <a:solidFill>
-                        <a:srgbClr val="3A3D46"/>
-                      </a:solidFill>
-                      <a:prstDash val="solid"/>
-                      <a:round/>
-                      <a:headEnd type="none" w="med" len="med"/>
-                      <a:tailEnd type="none" w="med" len="med"/>
-                    </a:lnR>
-                    <a:lnT w="9525" cap="flat" cmpd="sng" algn="ctr">
-                      <a:solidFill>
-                        <a:srgbClr val="3A3D46"/>
-                      </a:solidFill>
-                      <a:prstDash val="solid"/>
-                      <a:round/>
-                      <a:headEnd type="none" w="med" len="med"/>
-                      <a:tailEnd type="none" w="med" len="med"/>
-                    </a:lnT>
-                    <a:lnB w="9525" cap="flat" cmpd="sng" algn="ctr">
-                      <a:solidFill>
-                        <a:srgbClr val="3A3D46"/>
-                      </a:solidFill>
-                      <a:prstDash val="solid"/>
-                      <a:round/>
-                      <a:headEnd type="none" w="med" len="med"/>
-                      <a:tailEnd type="none" w="med" len="med"/>
-                    </a:lnB>
-                  </a:tcPr>
-                </a:tc>
-                <a:tc>
-                  <a:txBody>
-                    <a:bodyPr/>
-                    <a:lstStyle/>
-                    <a:p>
-                      <a:pPr indent="0" marL="0">
-                        <a:buNone/>
-                      </a:pPr>
-                      <a:r>
-                        <a:rPr lang="en-US" sz="1700" dirty="0">
-                          <a:solidFill>
-                            <a:srgbClr val="AEB2BC"/>
-                          </a:solidFill>
-                        </a:rPr>
-                        <a:t>Pest: soal selera; PHPUnit sudah bawaan Laravel 10</a:t>
                       </a:r>
                       <a:endParaRPr lang="en-US" sz="1700" dirty="0"/>
                     </a:p>
@@ -9565,49 +9106,46 @@
                   <a:schemeClr val="bg1"/>
                 </a:solidFill>
               </a:rPr>
-              <a:t>Dari tabel per kota ke satu tabel</a:t>
+              <a:t>Struktur database (ERD)</a:t>
             </a:r>
             <a:endParaRPr lang="en-US" sz="3200" dirty="0"/>
           </a:p>
         </p:txBody>
       </p:sp>
-      <p:sp>
-        <p:nvSpPr>
-          <p:cNvPr id="4" name="panel"/>
-          <p:cNvSpPr/>
-          <p:nvPr/>
-        </p:nvSpPr>
-        <p:spPr>
-          <a:xfrm>
-            <a:off x="548640" y="1691640"/>
-            <a:ext cx="5349240" cy="3794760"/>
-          </a:xfrm>
-          <a:prstGeom prst="roundRect">
-            <a:avLst>
-              <a:gd name="adj" fmla="val 1928"/>
-            </a:avLst>
-          </a:prstGeom>
-          <a:solidFill>
-            <a:schemeClr val="tx2"/>
-          </a:solidFill>
-          <a:ln w="12700">
-            <a:solidFill>
-              <a:schemeClr val="tx2"/>
-            </a:solidFill>
-            <a:prstDash val="solid"/>
-          </a:ln>
-        </p:spPr>
-      </p:sp>
-      <p:sp>
-        <p:nvSpPr>
-          <p:cNvPr id="5" name="Text 2"/>
+      <p:pic>
+        <p:nvPicPr>
+          <p:cNvPr id="4" name="ERD" descr="/workspaces/.xc-work/erd/xchannel-id.png">    </p:cNvPr>
+          <p:cNvPicPr>
+            <a:picLocks noChangeAspect="1"/>
+          </p:cNvPicPr>
+          <p:nvPr/>
+        </p:nvPicPr>
+        <p:blipFill>
+          <a:blip r:embed="rId1"/>
+          <a:stretch>
+            <a:fillRect/>
+          </a:stretch>
+        </p:blipFill>
+        <p:spPr>
+          <a:xfrm>
+            <a:off x="548640" y="1417320"/>
+            <a:ext cx="4835236" cy="4800600"/>
+          </a:xfrm>
+          <a:prstGeom prst="rect">
+            <a:avLst/>
+          </a:prstGeom>
+        </p:spPr>
+      </p:pic>
+      <p:sp>
+        <p:nvSpPr>
+          <p:cNvPr id="5" name="Text 1"/>
           <p:cNvSpPr txBox="1"/>
           <p:nvPr/>
         </p:nvSpPr>
         <p:spPr>
           <a:xfrm>
-            <a:off x="822960" y="1874520"/>
-            <a:ext cx="2743200" cy="365760"/>
+            <a:off x="5795356" y="1417320"/>
+            <a:ext cx="5817524" cy="365760"/>
           </a:xfrm>
           <a:prstGeom prst="rect">
             <a:avLst/>
@@ -9623,220 +9161,255 @@
               <a:buNone/>
             </a:pPr>
             <a:r>
-              <a:rPr lang="en-US" sz="1800" b="1" dirty="0">
+              <a:rPr lang="en-US" sz="1400" b="1" dirty="0">
                 <a:solidFill>
                   <a:schemeClr val="bg1"/>
-                </a:solidFill>
-              </a:rPr>
-              <a:t>Produksi</a:t>
-            </a:r>
-            <a:endParaRPr lang="en-US" sz="1800" dirty="0"/>
-          </a:p>
-        </p:txBody>
-      </p:sp>
-      <p:sp>
-        <p:nvSpPr>
-          <p:cNvPr id="6" name="pill"/>
-          <p:cNvSpPr/>
-          <p:nvPr/>
-        </p:nvSpPr>
-        <p:spPr>
-          <a:xfrm>
-            <a:off x="4677156" y="1920240"/>
-            <a:ext cx="946404" cy="274320"/>
-          </a:xfrm>
-          <a:prstGeom prst="roundRect">
-            <a:avLst>
-              <a:gd name="adj" fmla="val 50000"/>
-            </a:avLst>
-          </a:prstGeom>
-          <a:solidFill>
-            <a:schemeClr val="accent2"/>
-          </a:solidFill>
-          <a:ln w="12700">
-            <a:solidFill>
-              <a:schemeClr val="accent2"/>
-            </a:solidFill>
-            <a:prstDash val="solid"/>
-          </a:ln>
-        </p:spPr>
-      </p:sp>
-      <p:sp>
-        <p:nvSpPr>
-          <p:cNvPr id="7" name="Text 4"/>
-          <p:cNvSpPr txBox="1"/>
-          <p:nvPr/>
-        </p:nvSpPr>
-        <p:spPr>
-          <a:xfrm>
-            <a:off x="4677156" y="1920240"/>
-            <a:ext cx="946404" cy="274320"/>
-          </a:xfrm>
-          <a:prstGeom prst="rect">
-            <a:avLst/>
-          </a:prstGeom>
-          <a:noFill/>
-          <a:ln/>
-        </p:spPr>
-        <p:txBody>
-          <a:bodyPr wrap="square" lIns="0" tIns="0" rIns="0" bIns="0" rtlCol="0" anchor="ctr"/>
-          <a:lstStyle/>
-          <a:p>
-            <a:pPr algn="ctr" indent="0" marL="0">
-              <a:buNone/>
-            </a:pPr>
-            <a:r>
-              <a:rPr lang="en-US" sz="1000" b="1" spc="150" kern="0" dirty="0">
-                <a:solidFill>
-                  <a:schemeClr val="tx1"/>
-                </a:solidFill>
-              </a:rPr>
-              <a:t>7 TABEL</a:t>
-            </a:r>
-            <a:endParaRPr lang="en-US" sz="1000" dirty="0"/>
-          </a:p>
-        </p:txBody>
-      </p:sp>
-      <p:sp>
-        <p:nvSpPr>
-          <p:cNvPr id="8" name="Text 5"/>
-          <p:cNvSpPr txBox="1"/>
-          <p:nvPr/>
-        </p:nvSpPr>
-        <p:spPr>
-          <a:xfrm>
-            <a:off x="822960" y="2423160"/>
-            <a:ext cx="4846320" cy="2103120"/>
-          </a:xfrm>
-          <a:prstGeom prst="rect">
-            <a:avLst/>
-          </a:prstGeom>
-          <a:noFill/>
-          <a:ln/>
-        </p:spPr>
-        <p:txBody>
-          <a:bodyPr wrap="square" lIns="0" tIns="0" rIns="0" bIns="0" rtlCol="0" anchor="t"/>
-          <a:lstStyle/>
-          <a:p>
-            <a:pPr indent="0" marL="0">
-              <a:buNone/>
-            </a:pPr>
-            <a:r>
-              <a:rPr lang="en-US" sz="1200" dirty="0">
-                <a:solidFill>
-                  <a:schemeClr val="accent6"/>
                 </a:solidFill>
                 <a:latin typeface="Courier New" pitchFamily="34" charset="0"/>
                 <a:ea typeface="Courier New" pitchFamily="34" charset="-122"/>
                 <a:cs typeface="Courier New" pitchFamily="34" charset="-120"/>
               </a:rPr>
-              <a:t>radio.api_jadwal = 'jadwal_radio_woman'</a:t>
-            </a:r>
-            <a:endParaRPr lang="en-US" sz="1200" dirty="0"/>
-          </a:p>
-          <a:p>
-            <a:pPr indent="0" marL="0">
-              <a:buNone/>
-            </a:pPr>
-            <a:endParaRPr lang="en-US" sz="1200" dirty="0"/>
-          </a:p>
-          <a:p>
-            <a:pPr indent="0" marL="0">
-              <a:buNone/>
-            </a:pPr>
-            <a:r>
-              <a:rPr lang="en-US" sz="1200" dirty="0">
-                <a:solidFill>
-                  <a:schemeClr val="accent6"/>
+              <a:t>schedule_slots</a:t>
+            </a:r>
+            <a:endParaRPr lang="en-US" sz="1400" dirty="0"/>
+          </a:p>
+        </p:txBody>
+      </p:sp>
+      <p:sp>
+        <p:nvSpPr>
+          <p:cNvPr id="6" name="Text 2"/>
+          <p:cNvSpPr txBox="1"/>
+          <p:nvPr/>
+        </p:nvSpPr>
+        <p:spPr>
+          <a:xfrm>
+            <a:off x="5795356" y="1801368"/>
+            <a:ext cx="5817524" cy="731520"/>
+          </a:xfrm>
+          <a:prstGeom prst="rect">
+            <a:avLst/>
+          </a:prstGeom>
+          <a:noFill/>
+          <a:ln/>
+        </p:spPr>
+        <p:txBody>
+          <a:bodyPr wrap="square" lIns="0" tIns="0" rIns="0" bIns="0" rtlCol="0" anchor="t"/>
+          <a:lstStyle/>
+          <a:p>
+            <a:pPr indent="0" marL="0">
+              <a:buNone/>
+            </a:pPr>
+            <a:r>
+              <a:rPr lang="en-US" sz="1400" dirty="0">
+                <a:solidFill>
+                  <a:schemeClr val="bg2"/>
+                </a:solidFill>
+              </a:rPr>
+              <a:t>Satu baris = satu program, satu hari, satu stasiun.</a:t>
+            </a:r>
+            <a:endParaRPr lang="en-US" sz="1400" dirty="0"/>
+          </a:p>
+        </p:txBody>
+      </p:sp>
+      <p:sp>
+        <p:nvSpPr>
+          <p:cNvPr id="7" name="Text 3"/>
+          <p:cNvSpPr txBox="1"/>
+          <p:nvPr/>
+        </p:nvSpPr>
+        <p:spPr>
+          <a:xfrm>
+            <a:off x="5795356" y="2606040"/>
+            <a:ext cx="5817524" cy="365760"/>
+          </a:xfrm>
+          <a:prstGeom prst="rect">
+            <a:avLst/>
+          </a:prstGeom>
+          <a:noFill/>
+          <a:ln/>
+        </p:spPr>
+        <p:txBody>
+          <a:bodyPr wrap="square" lIns="0" tIns="0" rIns="0" bIns="0" rtlCol="0" anchor="ctr"/>
+          <a:lstStyle/>
+          <a:p>
+            <a:pPr indent="0" marL="0">
+              <a:buNone/>
+            </a:pPr>
+            <a:r>
+              <a:rPr lang="en-US" sz="1400" b="1" dirty="0">
+                <a:solidFill>
+                  <a:schemeClr val="bg1"/>
                 </a:solidFill>
                 <a:latin typeface="Courier New" pitchFamily="34" charset="0"/>
                 <a:ea typeface="Courier New" pitchFamily="34" charset="-122"/>
                 <a:cs typeface="Courier New" pitchFamily="34" charset="-120"/>
               </a:rPr>
-              <a:t>jdwl_radio_bandung</a:t>
-            </a:r>
-            <a:endParaRPr lang="en-US" sz="1200" dirty="0"/>
-          </a:p>
-          <a:p>
-            <a:pPr indent="0" marL="0">
-              <a:buNone/>
-            </a:pPr>
-            <a:r>
-              <a:rPr lang="en-US" sz="1200" dirty="0">
-                <a:solidFill>
-                  <a:schemeClr val="accent6"/>
+              <a:t>starts_at, ends_at</a:t>
+            </a:r>
+            <a:endParaRPr lang="en-US" sz="1400" dirty="0"/>
+          </a:p>
+        </p:txBody>
+      </p:sp>
+      <p:sp>
+        <p:nvSpPr>
+          <p:cNvPr id="8" name="Text 4"/>
+          <p:cNvSpPr txBox="1"/>
+          <p:nvPr/>
+        </p:nvSpPr>
+        <p:spPr>
+          <a:xfrm>
+            <a:off x="5795356" y="2990088"/>
+            <a:ext cx="5817524" cy="731520"/>
+          </a:xfrm>
+          <a:prstGeom prst="rect">
+            <a:avLst/>
+          </a:prstGeom>
+          <a:noFill/>
+          <a:ln/>
+        </p:spPr>
+        <p:txBody>
+          <a:bodyPr wrap="square" lIns="0" tIns="0" rIns="0" bIns="0" rtlCol="0" anchor="t"/>
+          <a:lstStyle/>
+          <a:p>
+            <a:pPr indent="0" marL="0">
+              <a:buNone/>
+            </a:pPr>
+            <a:r>
+              <a:rPr lang="en-US" sz="1400" dirty="0">
+                <a:solidFill>
+                  <a:schemeClr val="bg2"/>
+                </a:solidFill>
+              </a:rPr>
+              <a:t>Menit sejak 00:00, dari 0 sampai 1440.</a:t>
+            </a:r>
+            <a:endParaRPr lang="en-US" sz="1400" dirty="0"/>
+          </a:p>
+        </p:txBody>
+      </p:sp>
+      <p:sp>
+        <p:nvSpPr>
+          <p:cNvPr id="9" name="Text 5"/>
+          <p:cNvSpPr txBox="1"/>
+          <p:nvPr/>
+        </p:nvSpPr>
+        <p:spPr>
+          <a:xfrm>
+            <a:off x="5795356" y="3794760"/>
+            <a:ext cx="5817524" cy="365760"/>
+          </a:xfrm>
+          <a:prstGeom prst="rect">
+            <a:avLst/>
+          </a:prstGeom>
+          <a:noFill/>
+          <a:ln/>
+        </p:spPr>
+        <p:txBody>
+          <a:bodyPr wrap="square" lIns="0" tIns="0" rIns="0" bIns="0" rtlCol="0" anchor="ctr"/>
+          <a:lstStyle/>
+          <a:p>
+            <a:pPr indent="0" marL="0">
+              <a:buNone/>
+            </a:pPr>
+            <a:r>
+              <a:rPr lang="en-US" sz="1400" b="1" dirty="0">
+                <a:solidFill>
+                  <a:schemeClr val="bg1"/>
                 </a:solidFill>
                 <a:latin typeface="Courier New" pitchFamily="34" charset="0"/>
                 <a:ea typeface="Courier New" pitchFamily="34" charset="-122"/>
                 <a:cs typeface="Courier New" pitchFamily="34" charset="-120"/>
               </a:rPr>
-              <a:t>jdwl_radio_surabaya</a:t>
-            </a:r>
-            <a:endParaRPr lang="en-US" sz="1200" dirty="0"/>
-          </a:p>
-          <a:p>
-            <a:pPr indent="0" marL="0">
-              <a:buNone/>
-            </a:pPr>
-            <a:r>
-              <a:rPr lang="en-US" sz="1200" dirty="0">
-                <a:solidFill>
-                  <a:schemeClr val="accent6"/>
+              <a:t>host_show</a:t>
+            </a:r>
+            <a:endParaRPr lang="en-US" sz="1400" dirty="0"/>
+          </a:p>
+        </p:txBody>
+      </p:sp>
+      <p:sp>
+        <p:nvSpPr>
+          <p:cNvPr id="10" name="Text 6"/>
+          <p:cNvSpPr txBox="1"/>
+          <p:nvPr/>
+        </p:nvSpPr>
+        <p:spPr>
+          <a:xfrm>
+            <a:off x="5795356" y="4178808"/>
+            <a:ext cx="5817524" cy="731520"/>
+          </a:xfrm>
+          <a:prstGeom prst="rect">
+            <a:avLst/>
+          </a:prstGeom>
+          <a:noFill/>
+          <a:ln/>
+        </p:spPr>
+        <p:txBody>
+          <a:bodyPr wrap="square" lIns="0" tIns="0" rIns="0" bIns="0" rtlCol="0" anchor="t"/>
+          <a:lstStyle/>
+          <a:p>
+            <a:pPr indent="0" marL="0">
+              <a:buNone/>
+            </a:pPr>
+            <a:r>
+              <a:rPr lang="en-US" sz="1400" dirty="0">
+                <a:solidFill>
+                  <a:schemeClr val="bg2"/>
+                </a:solidFill>
+              </a:rPr>
+              <a:t>Pivot banyak-ke-banyak antara program dan penyiar.</a:t>
+            </a:r>
+            <a:endParaRPr lang="en-US" sz="1400" dirty="0"/>
+          </a:p>
+        </p:txBody>
+      </p:sp>
+      <p:sp>
+        <p:nvSpPr>
+          <p:cNvPr id="11" name="Text 7"/>
+          <p:cNvSpPr txBox="1"/>
+          <p:nvPr/>
+        </p:nvSpPr>
+        <p:spPr>
+          <a:xfrm>
+            <a:off x="5795356" y="4983480"/>
+            <a:ext cx="5817524" cy="365760"/>
+          </a:xfrm>
+          <a:prstGeom prst="rect">
+            <a:avLst/>
+          </a:prstGeom>
+          <a:noFill/>
+          <a:ln/>
+        </p:spPr>
+        <p:txBody>
+          <a:bodyPr wrap="square" lIns="0" tIns="0" rIns="0" bIns="0" rtlCol="0" anchor="ctr"/>
+          <a:lstStyle/>
+          <a:p>
+            <a:pPr indent="0" marL="0">
+              <a:buNone/>
+            </a:pPr>
+            <a:r>
+              <a:rPr lang="en-US" sz="1400" b="1" dirty="0">
+                <a:solidFill>
+                  <a:schemeClr val="bg1"/>
                 </a:solidFill>
                 <a:latin typeface="Courier New" pitchFamily="34" charset="0"/>
                 <a:ea typeface="Courier New" pitchFamily="34" charset="-122"/>
                 <a:cs typeface="Courier New" pitchFamily="34" charset="-120"/>
               </a:rPr>
-              <a:t>jdwl_radio_suramadu  ...</a:t>
-            </a:r>
-            <a:endParaRPr lang="en-US" sz="1200" dirty="0"/>
-          </a:p>
-          <a:p>
-            <a:pPr indent="0" marL="0">
-              <a:buNone/>
-            </a:pPr>
-            <a:r>
-              <a:rPr lang="en-US" sz="1200" dirty="0">
-                <a:solidFill>
-                  <a:schemeClr val="accent6"/>
-                </a:solidFill>
-                <a:latin typeface="Courier New" pitchFamily="34" charset="0"/>
-                <a:ea typeface="Courier New" pitchFamily="34" charset="-122"/>
-                <a:cs typeface="Courier New" pitchFamily="34" charset="-120"/>
-              </a:rPr>
-              <a:t>  judul_siaran, hari_siaran,</a:t>
-            </a:r>
-            <a:endParaRPr lang="en-US" sz="1200" dirty="0"/>
-          </a:p>
-          <a:p>
-            <a:pPr indent="0" marL="0">
-              <a:buNone/>
-            </a:pPr>
-            <a:r>
-              <a:rPr lang="en-US" sz="1200" dirty="0">
-                <a:solidFill>
-                  <a:schemeClr val="accent6"/>
-                </a:solidFill>
-                <a:latin typeface="Courier New" pitchFamily="34" charset="0"/>
-                <a:ea typeface="Courier New" pitchFamily="34" charset="-122"/>
-                <a:cs typeface="Courier New" pitchFamily="34" charset="-120"/>
-              </a:rPr>
-              <a:t>  waktu_siaran, penyiar (text)</a:t>
-            </a:r>
-            <a:endParaRPr lang="en-US" sz="1200" dirty="0"/>
-          </a:p>
-        </p:txBody>
-      </p:sp>
-      <p:sp>
-        <p:nvSpPr>
-          <p:cNvPr id="9" name="Text 6"/>
+              <a:t>Foreign key</a:t>
+            </a:r>
+            <a:endParaRPr lang="en-US" sz="1400" dirty="0"/>
+          </a:p>
+        </p:txBody>
+      </p:sp>
+      <p:sp>
+        <p:nvSpPr>
+          <p:cNvPr id="12" name="Text 8"/>
           <p:cNvSpPr txBox="1"/>
           <p:nvPr/>
         </p:nvSpPr>
         <p:spPr>
           <a:xfrm>
-            <a:off x="822960" y="4572000"/>
-            <a:ext cx="4846320" cy="822960"/>
+            <a:off x="5795356" y="5367528"/>
+            <a:ext cx="5817524" cy="731520"/>
           </a:xfrm>
           <a:prstGeom prst="rect">
             <a:avLst/>
@@ -9852,323 +9425,12 @@
               <a:buNone/>
             </a:pPr>
             <a:r>
-              <a:rPr lang="en-US" sz="1300" dirty="0">
+              <a:rPr lang="en-US" sz="1400" dirty="0">
                 <a:solidFill>
                   <a:schemeClr val="bg2"/>
                 </a:solidFill>
               </a:rPr>
-              <a:t>Stasiun baru berarti tabel baru. Satu nama tabel di api_jadwal tidak cocok dengan tabel aslinya.</a:t>
-            </a:r>
-            <a:endParaRPr lang="en-US" sz="1300" dirty="0"/>
-          </a:p>
-        </p:txBody>
-      </p:sp>
-      <p:sp>
-        <p:nvSpPr>
-          <p:cNvPr id="10" name="panel"/>
-          <p:cNvSpPr/>
-          <p:nvPr/>
-        </p:nvSpPr>
-        <p:spPr>
-          <a:xfrm>
-            <a:off x="6263640" y="1691640"/>
-            <a:ext cx="5349240" cy="3794760"/>
-          </a:xfrm>
-          <a:prstGeom prst="roundRect">
-            <a:avLst>
-              <a:gd name="adj" fmla="val 1928"/>
-            </a:avLst>
-          </a:prstGeom>
-          <a:solidFill>
-            <a:schemeClr val="tx2"/>
-          </a:solidFill>
-          <a:ln w="12700">
-            <a:solidFill>
-              <a:schemeClr val="tx2"/>
-            </a:solidFill>
-            <a:prstDash val="solid"/>
-          </a:ln>
-        </p:spPr>
-      </p:sp>
-      <p:sp>
-        <p:nvSpPr>
-          <p:cNvPr id="11" name="Text 8"/>
-          <p:cNvSpPr txBox="1"/>
-          <p:nvPr/>
-        </p:nvSpPr>
-        <p:spPr>
-          <a:xfrm>
-            <a:off x="6537960" y="1874520"/>
-            <a:ext cx="2743200" cy="365760"/>
-          </a:xfrm>
-          <a:prstGeom prst="rect">
-            <a:avLst/>
-          </a:prstGeom>
-          <a:noFill/>
-          <a:ln/>
-        </p:spPr>
-        <p:txBody>
-          <a:bodyPr wrap="square" lIns="0" tIns="0" rIns="0" bIns="0" rtlCol="0" anchor="ctr"/>
-          <a:lstStyle/>
-          <a:p>
-            <a:pPr indent="0" marL="0">
-              <a:buNone/>
-            </a:pPr>
-            <a:r>
-              <a:rPr lang="en-US" sz="1800" b="1" dirty="0">
-                <a:solidFill>
-                  <a:schemeClr val="bg1"/>
-                </a:solidFill>
-              </a:rPr>
-              <a:t>Demo</a:t>
-            </a:r>
-            <a:endParaRPr lang="en-US" sz="1800" dirty="0"/>
-          </a:p>
-        </p:txBody>
-      </p:sp>
-      <p:sp>
-        <p:nvSpPr>
-          <p:cNvPr id="12" name="pill"/>
-          <p:cNvSpPr/>
-          <p:nvPr/>
-        </p:nvSpPr>
-        <p:spPr>
-          <a:xfrm>
-            <a:off x="10392156" y="1920240"/>
-            <a:ext cx="946404" cy="274320"/>
-          </a:xfrm>
-          <a:prstGeom prst="roundRect">
-            <a:avLst>
-              <a:gd name="adj" fmla="val 50000"/>
-            </a:avLst>
-          </a:prstGeom>
-          <a:solidFill>
-            <a:schemeClr val="accent3"/>
-          </a:solidFill>
-          <a:ln w="12700">
-            <a:solidFill>
-              <a:schemeClr val="accent3"/>
-            </a:solidFill>
-            <a:prstDash val="solid"/>
-          </a:ln>
-        </p:spPr>
-      </p:sp>
-      <p:sp>
-        <p:nvSpPr>
-          <p:cNvPr id="13" name="Text 10"/>
-          <p:cNvSpPr txBox="1"/>
-          <p:nvPr/>
-        </p:nvSpPr>
-        <p:spPr>
-          <a:xfrm>
-            <a:off x="10392156" y="1920240"/>
-            <a:ext cx="946404" cy="274320"/>
-          </a:xfrm>
-          <a:prstGeom prst="rect">
-            <a:avLst/>
-          </a:prstGeom>
-          <a:noFill/>
-          <a:ln/>
-        </p:spPr>
-        <p:txBody>
-          <a:bodyPr wrap="square" lIns="0" tIns="0" rIns="0" bIns="0" rtlCol="0" anchor="ctr"/>
-          <a:lstStyle/>
-          <a:p>
-            <a:pPr algn="ctr" indent="0" marL="0">
-              <a:buNone/>
-            </a:pPr>
-            <a:r>
-              <a:rPr lang="en-US" sz="1000" b="1" spc="150" kern="0" dirty="0">
-                <a:solidFill>
-                  <a:schemeClr val="tx1"/>
-                </a:solidFill>
-              </a:rPr>
-              <a:t>1 TABEL</a:t>
-            </a:r>
-            <a:endParaRPr lang="en-US" sz="1000" dirty="0"/>
-          </a:p>
-        </p:txBody>
-      </p:sp>
-      <p:sp>
-        <p:nvSpPr>
-          <p:cNvPr id="14" name="Text 11"/>
-          <p:cNvSpPr txBox="1"/>
-          <p:nvPr/>
-        </p:nvSpPr>
-        <p:spPr>
-          <a:xfrm>
-            <a:off x="6537960" y="2423160"/>
-            <a:ext cx="4846320" cy="2103120"/>
-          </a:xfrm>
-          <a:prstGeom prst="rect">
-            <a:avLst/>
-          </a:prstGeom>
-          <a:noFill/>
-          <a:ln/>
-        </p:spPr>
-        <p:txBody>
-          <a:bodyPr wrap="square" lIns="0" tIns="0" rIns="0" bIns="0" rtlCol="0" anchor="t"/>
-          <a:lstStyle/>
-          <a:p>
-            <a:pPr indent="0" marL="0">
-              <a:buNone/>
-            </a:pPr>
-            <a:r>
-              <a:rPr lang="en-US" sz="1200" dirty="0">
-                <a:solidFill>
-                  <a:schemeClr val="accent6"/>
-                </a:solidFill>
-                <a:latin typeface="Courier New" pitchFamily="34" charset="0"/>
-                <a:ea typeface="Courier New" pitchFamily="34" charset="-122"/>
-                <a:cs typeface="Courier New" pitchFamily="34" charset="-120"/>
-              </a:rPr>
-              <a:t>schedule_slots</a:t>
-            </a:r>
-            <a:endParaRPr lang="en-US" sz="1200" dirty="0"/>
-          </a:p>
-          <a:p>
-            <a:pPr indent="0" marL="0">
-              <a:buNone/>
-            </a:pPr>
-            <a:r>
-              <a:rPr lang="en-US" sz="1200" dirty="0">
-                <a:solidFill>
-                  <a:schemeClr val="accent6"/>
-                </a:solidFill>
-                <a:latin typeface="Courier New" pitchFamily="34" charset="0"/>
-                <a:ea typeface="Courier New" pitchFamily="34" charset="-122"/>
-                <a:cs typeface="Courier New" pitchFamily="34" charset="-120"/>
-              </a:rPr>
-              <a:t>  station_id  -&gt; stations</a:t>
-            </a:r>
-            <a:endParaRPr lang="en-US" sz="1200" dirty="0"/>
-          </a:p>
-          <a:p>
-            <a:pPr indent="0" marL="0">
-              <a:buNone/>
-            </a:pPr>
-            <a:r>
-              <a:rPr lang="en-US" sz="1200" dirty="0">
-                <a:solidFill>
-                  <a:schemeClr val="accent6"/>
-                </a:solidFill>
-                <a:latin typeface="Courier New" pitchFamily="34" charset="0"/>
-                <a:ea typeface="Courier New" pitchFamily="34" charset="-122"/>
-                <a:cs typeface="Courier New" pitchFamily="34" charset="-120"/>
-              </a:rPr>
-              <a:t>  show_id     -&gt; shows</a:t>
-            </a:r>
-            <a:endParaRPr lang="en-US" sz="1200" dirty="0"/>
-          </a:p>
-          <a:p>
-            <a:pPr indent="0" marL="0">
-              <a:buNone/>
-            </a:pPr>
-            <a:r>
-              <a:rPr lang="en-US" sz="1200" dirty="0">
-                <a:solidFill>
-                  <a:schemeClr val="accent6"/>
-                </a:solidFill>
-                <a:latin typeface="Courier New" pitchFamily="34" charset="0"/>
-                <a:ea typeface="Courier New" pitchFamily="34" charset="-122"/>
-                <a:cs typeface="Courier New" pitchFamily="34" charset="-120"/>
-              </a:rPr>
-              <a:t>  day_of_week, starts_at, ends_at</a:t>
-            </a:r>
-            <a:endParaRPr lang="en-US" sz="1200" dirty="0"/>
-          </a:p>
-          <a:p>
-            <a:pPr indent="0" marL="0">
-              <a:buNone/>
-            </a:pPr>
-            <a:endParaRPr lang="en-US" sz="1200" dirty="0"/>
-          </a:p>
-          <a:p>
-            <a:pPr indent="0" marL="0">
-              <a:buNone/>
-            </a:pPr>
-            <a:r>
-              <a:rPr lang="en-US" sz="1200" dirty="0">
-                <a:solidFill>
-                  <a:schemeClr val="accent6"/>
-                </a:solidFill>
-                <a:latin typeface="Courier New" pitchFamily="34" charset="0"/>
-                <a:ea typeface="Courier New" pitchFamily="34" charset="-122"/>
-                <a:cs typeface="Courier New" pitchFamily="34" charset="-120"/>
-              </a:rPr>
-              <a:t>host_show (show_id, host_id)</a:t>
-            </a:r>
-            <a:endParaRPr lang="en-US" sz="1200" dirty="0"/>
-          </a:p>
-        </p:txBody>
-      </p:sp>
-      <p:sp>
-        <p:nvSpPr>
-          <p:cNvPr id="15" name="Text 12"/>
-          <p:cNvSpPr txBox="1"/>
-          <p:nvPr/>
-        </p:nvSpPr>
-        <p:spPr>
-          <a:xfrm>
-            <a:off x="6537960" y="4572000"/>
-            <a:ext cx="4846320" cy="822960"/>
-          </a:xfrm>
-          <a:prstGeom prst="rect">
-            <a:avLst/>
-          </a:prstGeom>
-          <a:noFill/>
-          <a:ln/>
-        </p:spPr>
-        <p:txBody>
-          <a:bodyPr wrap="square" lIns="0" tIns="0" rIns="0" bIns="0" rtlCol="0" anchor="t"/>
-          <a:lstStyle/>
-          <a:p>
-            <a:pPr indent="0" marL="0">
-              <a:buNone/>
-            </a:pPr>
-            <a:r>
-              <a:rPr lang="en-US" sz="1300" dirty="0">
-                <a:solidFill>
-                  <a:schemeClr val="bg2"/>
-                </a:solidFill>
-              </a:rPr>
-              <a:t>Stasiun baru cukup satu baris. Foreign key menjaga relasi.</a:t>
-            </a:r>
-            <a:endParaRPr lang="en-US" sz="1300" dirty="0"/>
-          </a:p>
-        </p:txBody>
-      </p:sp>
-      <p:sp>
-        <p:nvSpPr>
-          <p:cNvPr id="16" name="Text 13"/>
-          <p:cNvSpPr txBox="1"/>
-          <p:nvPr/>
-        </p:nvSpPr>
-        <p:spPr>
-          <a:xfrm>
-            <a:off x="548640" y="5669280"/>
-            <a:ext cx="11064240" cy="457200"/>
-          </a:xfrm>
-          <a:prstGeom prst="rect">
-            <a:avLst/>
-          </a:prstGeom>
-          <a:noFill/>
-          <a:ln/>
-        </p:spPr>
-        <p:txBody>
-          <a:bodyPr wrap="square" lIns="0" tIns="0" rIns="0" bIns="0" rtlCol="0" anchor="ctr"/>
-          <a:lstStyle/>
-          <a:p>
-            <a:pPr indent="0" marL="0">
-              <a:buNone/>
-            </a:pPr>
-            <a:r>
-              <a:rPr lang="en-US" sz="1400" dirty="0">
-                <a:solidFill>
-                  <a:schemeClr val="bg1"/>
-                </a:solidFill>
-              </a:rPr>
-              <a:t>Migrasi tanpa downtime: isi tabel baru dari tabel lama, view per kota untuk API lama, pindahkan pembaca satu per satu.</a:t>
+              <a:t>Semua restrict on delete: yang masih dipakai tidak bisa dihapus.</a:t>
             </a:r>
             <a:endParaRPr lang="en-US" sz="1400" dirty="0"/>
           </a:p>
@@ -10276,7 +9538,7 @@
                   <a:schemeClr val="bg1"/>
                 </a:solidFill>
               </a:rPr>
-              <a:t>Waktu sebagai angka, bukan teks</a:t>
+              <a:t>Dari tabel per kota ke satu tabel</a:t>
             </a:r>
             <a:endParaRPr lang="en-US" sz="3200" dirty="0"/>
           </a:p>
@@ -10284,696 +9546,18 @@
       </p:sp>
       <p:sp>
         <p:nvSpPr>
-          <p:cNvPr id="4" name="Text 1"/>
-          <p:cNvSpPr txBox="1"/>
+          <p:cNvPr id="4" name="panel"/>
+          <p:cNvSpPr/>
           <p:nvPr/>
         </p:nvSpPr>
         <p:spPr>
           <a:xfrm>
             <a:off x="548640" y="1691640"/>
-            <a:ext cx="4572000" cy="365760"/>
-          </a:xfrm>
-          <a:prstGeom prst="rect">
-            <a:avLst/>
-          </a:prstGeom>
-          <a:noFill/>
-          <a:ln/>
-        </p:spPr>
-        <p:txBody>
-          <a:bodyPr wrap="square" lIns="0" tIns="0" rIns="0" bIns="0" rtlCol="0" anchor="ctr"/>
-          <a:lstStyle/>
-          <a:p>
-            <a:pPr indent="0" marL="0">
-              <a:buNone/>
-            </a:pPr>
-            <a:r>
-              <a:rPr lang="en-US" sz="1600" b="1" dirty="0">
-                <a:solidFill>
-                  <a:schemeClr val="bg2"/>
-                </a:solidFill>
-              </a:rPr>
-              <a:t>Di produksi</a:t>
-            </a:r>
-            <a:endParaRPr lang="en-US" sz="1600" dirty="0"/>
-          </a:p>
-        </p:txBody>
-      </p:sp>
-      <p:sp>
-        <p:nvSpPr>
-          <p:cNvPr id="5" name="Shape 2"/>
-          <p:cNvSpPr/>
-          <p:nvPr/>
-        </p:nvSpPr>
-        <p:spPr>
-          <a:xfrm>
-            <a:off x="548640" y="2194560"/>
-            <a:ext cx="2423160" cy="457200"/>
+            <a:ext cx="5349240" cy="3794760"/>
           </a:xfrm>
           <a:prstGeom prst="roundRect">
             <a:avLst>
-              <a:gd name="adj" fmla="val 50000"/>
-            </a:avLst>
-          </a:prstGeom>
-          <a:solidFill>
-            <a:schemeClr val="accent4"/>
-          </a:solidFill>
-          <a:ln w="12700">
-            <a:solidFill>
-              <a:schemeClr val="accent4"/>
-            </a:solidFill>
-            <a:prstDash val="solid"/>
-          </a:ln>
-        </p:spPr>
-      </p:sp>
-      <p:sp>
-        <p:nvSpPr>
-          <p:cNvPr id="6" name="Text 3"/>
-          <p:cNvSpPr txBox="1"/>
-          <p:nvPr/>
-        </p:nvSpPr>
-        <p:spPr>
-          <a:xfrm>
-            <a:off x="548640" y="2194560"/>
-            <a:ext cx="2423160" cy="457200"/>
-          </a:xfrm>
-          <a:prstGeom prst="rect">
-            <a:avLst/>
-          </a:prstGeom>
-          <a:noFill/>
-          <a:ln/>
-        </p:spPr>
-        <p:txBody>
-          <a:bodyPr wrap="square" lIns="0" tIns="0" rIns="0" bIns="0" rtlCol="0" anchor="ctr"/>
-          <a:lstStyle/>
-          <a:p>
-            <a:pPr algn="ctr" indent="0" marL="0">
-              <a:buNone/>
-            </a:pPr>
-            <a:r>
-              <a:rPr lang="en-US" sz="1200" dirty="0">
-                <a:solidFill>
-                  <a:schemeClr val="bg1"/>
-                </a:solidFill>
-                <a:latin typeface="Courier New" pitchFamily="34" charset="0"/>
-                <a:ea typeface="Courier New" pitchFamily="34" charset="-122"/>
-                <a:cs typeface="Courier New" pitchFamily="34" charset="-120"/>
-              </a:rPr>
-              <a:t>senin-jumat</a:t>
-            </a:r>
-            <a:endParaRPr lang="en-US" sz="1200" dirty="0"/>
-          </a:p>
-        </p:txBody>
-      </p:sp>
-      <p:sp>
-        <p:nvSpPr>
-          <p:cNvPr id="7" name="Shape 4"/>
-          <p:cNvSpPr/>
-          <p:nvPr/>
-        </p:nvSpPr>
-        <p:spPr>
-          <a:xfrm>
-            <a:off x="3154680" y="2194560"/>
-            <a:ext cx="2423160" cy="457200"/>
-          </a:xfrm>
-          <a:prstGeom prst="roundRect">
-            <a:avLst>
-              <a:gd name="adj" fmla="val 50000"/>
-            </a:avLst>
-          </a:prstGeom>
-          <a:solidFill>
-            <a:schemeClr val="accent4"/>
-          </a:solidFill>
-          <a:ln w="12700">
-            <a:solidFill>
-              <a:schemeClr val="accent4"/>
-            </a:solidFill>
-            <a:prstDash val="solid"/>
-          </a:ln>
-        </p:spPr>
-      </p:sp>
-      <p:sp>
-        <p:nvSpPr>
-          <p:cNvPr id="8" name="Text 5"/>
-          <p:cNvSpPr txBox="1"/>
-          <p:nvPr/>
-        </p:nvSpPr>
-        <p:spPr>
-          <a:xfrm>
-            <a:off x="3154680" y="2194560"/>
-            <a:ext cx="2423160" cy="457200"/>
-          </a:xfrm>
-          <a:prstGeom prst="rect">
-            <a:avLst/>
-          </a:prstGeom>
-          <a:noFill/>
-          <a:ln/>
-        </p:spPr>
-        <p:txBody>
-          <a:bodyPr wrap="square" lIns="0" tIns="0" rIns="0" bIns="0" rtlCol="0" anchor="ctr"/>
-          <a:lstStyle/>
-          <a:p>
-            <a:pPr algn="ctr" indent="0" marL="0">
-              <a:buNone/>
-            </a:pPr>
-            <a:r>
-              <a:rPr lang="en-US" sz="1200" dirty="0">
-                <a:solidFill>
-                  <a:schemeClr val="bg1"/>
-                </a:solidFill>
-                <a:latin typeface="Courier New" pitchFamily="34" charset="0"/>
-                <a:ea typeface="Courier New" pitchFamily="34" charset="-122"/>
-                <a:cs typeface="Courier New" pitchFamily="34" charset="-120"/>
-              </a:rPr>
-              <a:t>Senin- Jumat</a:t>
-            </a:r>
-            <a:endParaRPr lang="en-US" sz="1200" dirty="0"/>
-          </a:p>
-        </p:txBody>
-      </p:sp>
-      <p:sp>
-        <p:nvSpPr>
-          <p:cNvPr id="9" name="Shape 6"/>
-          <p:cNvSpPr/>
-          <p:nvPr/>
-        </p:nvSpPr>
-        <p:spPr>
-          <a:xfrm>
-            <a:off x="548640" y="2834640"/>
-            <a:ext cx="2423160" cy="457200"/>
-          </a:xfrm>
-          <a:prstGeom prst="roundRect">
-            <a:avLst>
-              <a:gd name="adj" fmla="val 50000"/>
-            </a:avLst>
-          </a:prstGeom>
-          <a:solidFill>
-            <a:schemeClr val="accent4"/>
-          </a:solidFill>
-          <a:ln w="12700">
-            <a:solidFill>
-              <a:schemeClr val="accent4"/>
-            </a:solidFill>
-            <a:prstDash val="solid"/>
-          </a:ln>
-        </p:spPr>
-      </p:sp>
-      <p:sp>
-        <p:nvSpPr>
-          <p:cNvPr id="10" name="Text 7"/>
-          <p:cNvSpPr txBox="1"/>
-          <p:nvPr/>
-        </p:nvSpPr>
-        <p:spPr>
-          <a:xfrm>
-            <a:off x="548640" y="2834640"/>
-            <a:ext cx="2423160" cy="457200"/>
-          </a:xfrm>
-          <a:prstGeom prst="rect">
-            <a:avLst/>
-          </a:prstGeom>
-          <a:noFill/>
-          <a:ln/>
-        </p:spPr>
-        <p:txBody>
-          <a:bodyPr wrap="square" lIns="0" tIns="0" rIns="0" bIns="0" rtlCol="0" anchor="ctr"/>
-          <a:lstStyle/>
-          <a:p>
-            <a:pPr algn="ctr" indent="0" marL="0">
-              <a:buNone/>
-            </a:pPr>
-            <a:r>
-              <a:rPr lang="en-US" sz="1200" dirty="0">
-                <a:solidFill>
-                  <a:schemeClr val="bg1"/>
-                </a:solidFill>
-                <a:latin typeface="Courier New" pitchFamily="34" charset="0"/>
-                <a:ea typeface="Courier New" pitchFamily="34" charset="-122"/>
-                <a:cs typeface="Courier New" pitchFamily="34" charset="-120"/>
-              </a:rPr>
-              <a:t>Monday-Friday</a:t>
-            </a:r>
-            <a:endParaRPr lang="en-US" sz="1200" dirty="0"/>
-          </a:p>
-        </p:txBody>
-      </p:sp>
-      <p:sp>
-        <p:nvSpPr>
-          <p:cNvPr id="11" name="Shape 8"/>
-          <p:cNvSpPr/>
-          <p:nvPr/>
-        </p:nvSpPr>
-        <p:spPr>
-          <a:xfrm>
-            <a:off x="3154680" y="2834640"/>
-            <a:ext cx="2423160" cy="457200"/>
-          </a:xfrm>
-          <a:prstGeom prst="roundRect">
-            <a:avLst>
-              <a:gd name="adj" fmla="val 50000"/>
-            </a:avLst>
-          </a:prstGeom>
-          <a:solidFill>
-            <a:schemeClr val="accent4"/>
-          </a:solidFill>
-          <a:ln w="12700">
-            <a:solidFill>
-              <a:schemeClr val="accent4"/>
-            </a:solidFill>
-            <a:prstDash val="solid"/>
-          </a:ln>
-        </p:spPr>
-      </p:sp>
-      <p:sp>
-        <p:nvSpPr>
-          <p:cNvPr id="12" name="Text 9"/>
-          <p:cNvSpPr txBox="1"/>
-          <p:nvPr/>
-        </p:nvSpPr>
-        <p:spPr>
-          <a:xfrm>
-            <a:off x="3154680" y="2834640"/>
-            <a:ext cx="2423160" cy="457200"/>
-          </a:xfrm>
-          <a:prstGeom prst="rect">
-            <a:avLst/>
-          </a:prstGeom>
-          <a:noFill/>
-          <a:ln/>
-        </p:spPr>
-        <p:txBody>
-          <a:bodyPr wrap="square" lIns="0" tIns="0" rIns="0" bIns="0" rtlCol="0" anchor="ctr"/>
-          <a:lstStyle/>
-          <a:p>
-            <a:pPr algn="ctr" indent="0" marL="0">
-              <a:buNone/>
-            </a:pPr>
-            <a:r>
-              <a:rPr lang="en-US" sz="1200" dirty="0">
-                <a:solidFill>
-                  <a:schemeClr val="bg1"/>
-                </a:solidFill>
-                <a:latin typeface="Courier New" pitchFamily="34" charset="0"/>
-                <a:ea typeface="Courier New" pitchFamily="34" charset="-122"/>
-                <a:cs typeface="Courier New" pitchFamily="34" charset="-120"/>
-              </a:rPr>
-              <a:t>6:00 AM - 10:00 AM</a:t>
-            </a:r>
-            <a:endParaRPr lang="en-US" sz="1200" dirty="0"/>
-          </a:p>
-        </p:txBody>
-      </p:sp>
-      <p:sp>
-        <p:nvSpPr>
-          <p:cNvPr id="13" name="Shape 10"/>
-          <p:cNvSpPr/>
-          <p:nvPr/>
-        </p:nvSpPr>
-        <p:spPr>
-          <a:xfrm>
-            <a:off x="548640" y="3474720"/>
-            <a:ext cx="2423160" cy="457200"/>
-          </a:xfrm>
-          <a:prstGeom prst="roundRect">
-            <a:avLst>
-              <a:gd name="adj" fmla="val 50000"/>
-            </a:avLst>
-          </a:prstGeom>
-          <a:solidFill>
-            <a:schemeClr val="accent4"/>
-          </a:solidFill>
-          <a:ln w="12700">
-            <a:solidFill>
-              <a:schemeClr val="accent4"/>
-            </a:solidFill>
-            <a:prstDash val="solid"/>
-          </a:ln>
-        </p:spPr>
-      </p:sp>
-      <p:sp>
-        <p:nvSpPr>
-          <p:cNvPr id="14" name="Text 11"/>
-          <p:cNvSpPr txBox="1"/>
-          <p:nvPr/>
-        </p:nvSpPr>
-        <p:spPr>
-          <a:xfrm>
-            <a:off x="548640" y="3474720"/>
-            <a:ext cx="2423160" cy="457200"/>
-          </a:xfrm>
-          <a:prstGeom prst="rect">
-            <a:avLst/>
-          </a:prstGeom>
-          <a:noFill/>
-          <a:ln/>
-        </p:spPr>
-        <p:txBody>
-          <a:bodyPr wrap="square" lIns="0" tIns="0" rIns="0" bIns="0" rtlCol="0" anchor="ctr"/>
-          <a:lstStyle/>
-          <a:p>
-            <a:pPr algn="ctr" indent="0" marL="0">
-              <a:buNone/>
-            </a:pPr>
-            <a:r>
-              <a:rPr lang="en-US" sz="1200" dirty="0">
-                <a:solidFill>
-                  <a:schemeClr val="bg1"/>
-                </a:solidFill>
-                <a:latin typeface="Courier New" pitchFamily="34" charset="0"/>
-                <a:ea typeface="Courier New" pitchFamily="34" charset="-122"/>
-                <a:cs typeface="Courier New" pitchFamily="34" charset="-120"/>
-              </a:rPr>
-              <a:t>08.00-09.00</a:t>
-            </a:r>
-            <a:endParaRPr lang="en-US" sz="1200" dirty="0"/>
-          </a:p>
-        </p:txBody>
-      </p:sp>
-      <p:sp>
-        <p:nvSpPr>
-          <p:cNvPr id="15" name="Shape 12"/>
-          <p:cNvSpPr/>
-          <p:nvPr/>
-        </p:nvSpPr>
-        <p:spPr>
-          <a:xfrm>
-            <a:off x="3154680" y="3474720"/>
-            <a:ext cx="2423160" cy="457200"/>
-          </a:xfrm>
-          <a:prstGeom prst="roundRect">
-            <a:avLst>
-              <a:gd name="adj" fmla="val 50000"/>
-            </a:avLst>
-          </a:prstGeom>
-          <a:solidFill>
-            <a:schemeClr val="accent4"/>
-          </a:solidFill>
-          <a:ln w="12700">
-            <a:solidFill>
-              <a:schemeClr val="accent4"/>
-            </a:solidFill>
-            <a:prstDash val="solid"/>
-          </a:ln>
-        </p:spPr>
-      </p:sp>
-      <p:sp>
-        <p:nvSpPr>
-          <p:cNvPr id="16" name="Text 13"/>
-          <p:cNvSpPr txBox="1"/>
-          <p:nvPr/>
-        </p:nvSpPr>
-        <p:spPr>
-          <a:xfrm>
-            <a:off x="3154680" y="3474720"/>
-            <a:ext cx="2423160" cy="457200"/>
-          </a:xfrm>
-          <a:prstGeom prst="rect">
-            <a:avLst/>
-          </a:prstGeom>
-          <a:noFill/>
-          <a:ln/>
-        </p:spPr>
-        <p:txBody>
-          <a:bodyPr wrap="square" lIns="0" tIns="0" rIns="0" bIns="0" rtlCol="0" anchor="ctr"/>
-          <a:lstStyle/>
-          <a:p>
-            <a:pPr algn="ctr" indent="0" marL="0">
-              <a:buNone/>
-            </a:pPr>
-            <a:r>
-              <a:rPr lang="en-US" sz="1200" dirty="0">
-                <a:solidFill>
-                  <a:schemeClr val="bg1"/>
-                </a:solidFill>
-                <a:latin typeface="Courier New" pitchFamily="34" charset="0"/>
-                <a:ea typeface="Courier New" pitchFamily="34" charset="-122"/>
-                <a:cs typeface="Courier New" pitchFamily="34" charset="-120"/>
-              </a:rPr>
-              <a:t>20:00-24:00</a:t>
-            </a:r>
-            <a:endParaRPr lang="en-US" sz="1200" dirty="0"/>
-          </a:p>
-        </p:txBody>
-      </p:sp>
-      <p:sp>
-        <p:nvSpPr>
-          <p:cNvPr id="17" name="Shape 14"/>
-          <p:cNvSpPr/>
-          <p:nvPr/>
-        </p:nvSpPr>
-        <p:spPr>
-          <a:xfrm>
-            <a:off x="5852160" y="3108960"/>
-            <a:ext cx="822960" cy="914"/>
-          </a:xfrm>
-          <a:prstGeom prst="line">
-            <a:avLst/>
-          </a:prstGeom>
-          <a:noFill/>
-          <a:ln w="19050">
-            <a:solidFill>
-              <a:schemeClr val="accent5"/>
-            </a:solidFill>
-            <a:prstDash val="solid"/>
-            <a:tailEnd type="triangle"/>
-          </a:ln>
-        </p:spPr>
-      </p:sp>
-      <p:sp>
-        <p:nvSpPr>
-          <p:cNvPr id="18" name="Text 15"/>
-          <p:cNvSpPr txBox="1"/>
-          <p:nvPr/>
-        </p:nvSpPr>
-        <p:spPr>
-          <a:xfrm>
-            <a:off x="6949440" y="1691640"/>
-            <a:ext cx="4572000" cy="365760"/>
-          </a:xfrm>
-          <a:prstGeom prst="rect">
-            <a:avLst/>
-          </a:prstGeom>
-          <a:noFill/>
-          <a:ln/>
-        </p:spPr>
-        <p:txBody>
-          <a:bodyPr wrap="square" lIns="0" tIns="0" rIns="0" bIns="0" rtlCol="0" anchor="ctr"/>
-          <a:lstStyle/>
-          <a:p>
-            <a:pPr indent="0" marL="0">
-              <a:buNone/>
-            </a:pPr>
-            <a:r>
-              <a:rPr lang="en-US" sz="1600" b="1" dirty="0">
-                <a:solidFill>
-                  <a:schemeClr val="bg2"/>
-                </a:solidFill>
-              </a:rPr>
-              <a:t>Di demo</a:t>
-            </a:r>
-            <a:endParaRPr lang="en-US" sz="1600" dirty="0"/>
-          </a:p>
-        </p:txBody>
-      </p:sp>
-      <p:sp>
-        <p:nvSpPr>
-          <p:cNvPr id="19" name="Text 16"/>
-          <p:cNvSpPr txBox="1"/>
-          <p:nvPr/>
-        </p:nvSpPr>
-        <p:spPr>
-          <a:xfrm>
-            <a:off x="6949440" y="2148840"/>
-            <a:ext cx="2194560" cy="914400"/>
-          </a:xfrm>
-          <a:prstGeom prst="rect">
-            <a:avLst/>
-          </a:prstGeom>
-          <a:noFill/>
-          <a:ln/>
-        </p:spPr>
-        <p:txBody>
-          <a:bodyPr wrap="square" lIns="0" tIns="0" rIns="0" bIns="0" rtlCol="0" anchor="ctr"/>
-          <a:lstStyle/>
-          <a:p>
-            <a:pPr indent="0" marL="0">
-              <a:buNone/>
-            </a:pPr>
-            <a:r>
-              <a:rPr lang="en-US" sz="4800" b="1" dirty="0">
-                <a:solidFill>
-                  <a:schemeClr val="accent1"/>
-                </a:solidFill>
-                <a:latin typeface="+mj-lt" pitchFamily="34" charset="0"/>
-                <a:ea typeface="+mj-lt" pitchFamily="34" charset="-122"/>
-                <a:cs typeface="+mj-lt" pitchFamily="34" charset="-120"/>
-              </a:rPr>
-              <a:t>450</a:t>
-            </a:r>
-            <a:endParaRPr lang="en-US" sz="4800" dirty="0"/>
-          </a:p>
-        </p:txBody>
-      </p:sp>
-      <p:sp>
-        <p:nvSpPr>
-          <p:cNvPr id="20" name="Text 17"/>
-          <p:cNvSpPr txBox="1"/>
-          <p:nvPr/>
-        </p:nvSpPr>
-        <p:spPr>
-          <a:xfrm>
-            <a:off x="6949440" y="3063240"/>
-            <a:ext cx="2194560" cy="320040"/>
-          </a:xfrm>
-          <a:prstGeom prst="rect">
-            <a:avLst/>
-          </a:prstGeom>
-          <a:noFill/>
-          <a:ln/>
-        </p:spPr>
-        <p:txBody>
-          <a:bodyPr wrap="square" lIns="0" tIns="0" rIns="0" bIns="0" rtlCol="0" anchor="ctr"/>
-          <a:lstStyle/>
-          <a:p>
-            <a:pPr indent="0" marL="0">
-              <a:buNone/>
-            </a:pPr>
-            <a:r>
-              <a:rPr lang="en-US" sz="1400" dirty="0">
-                <a:solidFill>
-                  <a:schemeClr val="bg2"/>
-                </a:solidFill>
-              </a:rPr>
-              <a:t>menit = 07:30</a:t>
-            </a:r>
-            <a:endParaRPr lang="en-US" sz="1400" dirty="0"/>
-          </a:p>
-        </p:txBody>
-      </p:sp>
-      <p:sp>
-        <p:nvSpPr>
-          <p:cNvPr id="21" name="Text 18"/>
-          <p:cNvSpPr txBox="1"/>
-          <p:nvPr/>
-        </p:nvSpPr>
-        <p:spPr>
-          <a:xfrm>
-            <a:off x="9326880" y="2148840"/>
-            <a:ext cx="2194560" cy="914400"/>
-          </a:xfrm>
-          <a:prstGeom prst="rect">
-            <a:avLst/>
-          </a:prstGeom>
-          <a:noFill/>
-          <a:ln/>
-        </p:spPr>
-        <p:txBody>
-          <a:bodyPr wrap="square" lIns="0" tIns="0" rIns="0" bIns="0" rtlCol="0" anchor="ctr"/>
-          <a:lstStyle/>
-          <a:p>
-            <a:pPr indent="0" marL="0">
-              <a:buNone/>
-            </a:pPr>
-            <a:r>
-              <a:rPr lang="en-US" sz="4800" b="1" dirty="0">
-                <a:solidFill>
-                  <a:schemeClr val="accent1"/>
-                </a:solidFill>
-                <a:latin typeface="+mj-lt" pitchFamily="34" charset="0"/>
-                <a:ea typeface="+mj-lt" pitchFamily="34" charset="-122"/>
-                <a:cs typeface="+mj-lt" pitchFamily="34" charset="-120"/>
-              </a:rPr>
-              <a:t>1440</a:t>
-            </a:r>
-            <a:endParaRPr lang="en-US" sz="4800" dirty="0"/>
-          </a:p>
-        </p:txBody>
-      </p:sp>
-      <p:sp>
-        <p:nvSpPr>
-          <p:cNvPr id="22" name="Text 19"/>
-          <p:cNvSpPr txBox="1"/>
-          <p:nvPr/>
-        </p:nvSpPr>
-        <p:spPr>
-          <a:xfrm>
-            <a:off x="9326880" y="3063240"/>
-            <a:ext cx="2194560" cy="320040"/>
-          </a:xfrm>
-          <a:prstGeom prst="rect">
-            <a:avLst/>
-          </a:prstGeom>
-          <a:noFill/>
-          <a:ln/>
-        </p:spPr>
-        <p:txBody>
-          <a:bodyPr wrap="square" lIns="0" tIns="0" rIns="0" bIns="0" rtlCol="0" anchor="ctr"/>
-          <a:lstStyle/>
-          <a:p>
-            <a:pPr indent="0" marL="0">
-              <a:buNone/>
-            </a:pPr>
-            <a:r>
-              <a:rPr lang="en-US" sz="1400" dirty="0">
-                <a:solidFill>
-                  <a:schemeClr val="bg2"/>
-                </a:solidFill>
-              </a:rPr>
-              <a:t>menit = 24:00</a:t>
-            </a:r>
-            <a:endParaRPr lang="en-US" sz="1400" dirty="0"/>
-          </a:p>
-        </p:txBody>
-      </p:sp>
-      <p:sp>
-        <p:nvSpPr>
-          <p:cNvPr id="23" name="Text 20"/>
-          <p:cNvSpPr txBox="1"/>
-          <p:nvPr/>
-        </p:nvSpPr>
-        <p:spPr>
-          <a:xfrm>
-            <a:off x="6949440" y="3566160"/>
-            <a:ext cx="4663440" cy="640080"/>
-          </a:xfrm>
-          <a:prstGeom prst="rect">
-            <a:avLst/>
-          </a:prstGeom>
-          <a:noFill/>
-          <a:ln/>
-        </p:spPr>
-        <p:txBody>
-          <a:bodyPr wrap="square" lIns="0" tIns="0" rIns="0" bIns="0" rtlCol="0" anchor="t"/>
-          <a:lstStyle/>
-          <a:p>
-            <a:pPr indent="0" marL="0">
-              <a:buNone/>
-            </a:pPr>
-            <a:r>
-              <a:rPr lang="en-US" sz="1400" dirty="0">
-                <a:solidFill>
-                  <a:schemeClr val="bg1"/>
-                </a:solidFill>
-              </a:rPr>
-              <a:t>day_of_week 1-7 (ISO), satu baris per hari. Form hanya menerima HH:MM.</a:t>
-            </a:r>
-            <a:endParaRPr lang="en-US" sz="1400" dirty="0"/>
-          </a:p>
-        </p:txBody>
-      </p:sp>
-      <p:sp>
-        <p:nvSpPr>
-          <p:cNvPr id="24" name="panel"/>
-          <p:cNvSpPr/>
-          <p:nvPr/>
-        </p:nvSpPr>
-        <p:spPr>
-          <a:xfrm>
-            <a:off x="548640" y="4526280"/>
-            <a:ext cx="11064240" cy="1554480"/>
-          </a:xfrm>
-          <a:prstGeom prst="roundRect">
-            <a:avLst>
-              <a:gd name="adj" fmla="val 4706"/>
+              <a:gd name="adj" fmla="val 1928"/>
             </a:avLst>
           </a:prstGeom>
           <a:solidFill>
@@ -10989,14 +9573,14 @@
       </p:sp>
       <p:sp>
         <p:nvSpPr>
-          <p:cNvPr id="25" name="Text 22"/>
+          <p:cNvPr id="5" name="Text 2"/>
           <p:cNvSpPr txBox="1"/>
           <p:nvPr/>
         </p:nvSpPr>
         <p:spPr>
           <a:xfrm>
-            <a:off x="822960" y="4709160"/>
-            <a:ext cx="10515600" cy="365760"/>
+            <a:off x="822960" y="1874520"/>
+            <a:ext cx="2743200" cy="365760"/>
           </a:xfrm>
           <a:prstGeom prst="rect">
             <a:avLst/>
@@ -11012,27 +9596,54 @@
               <a:buNone/>
             </a:pPr>
             <a:r>
-              <a:rPr lang="en-US" sz="1600" b="1" dirty="0">
+              <a:rPr lang="en-US" sz="1800" b="1" dirty="0">
                 <a:solidFill>
                   <a:schemeClr val="bg1"/>
                 </a:solidFill>
               </a:rPr>
-              <a:t>Bentrok jika masing-masing mulai sebelum yang lain selesai</a:t>
-            </a:r>
-            <a:endParaRPr lang="en-US" sz="1600" dirty="0"/>
-          </a:p>
-        </p:txBody>
-      </p:sp>
-      <p:sp>
-        <p:nvSpPr>
-          <p:cNvPr id="26" name="Text 23"/>
+              <a:t>Produksi</a:t>
+            </a:r>
+            <a:endParaRPr lang="en-US" sz="1800" dirty="0"/>
+          </a:p>
+        </p:txBody>
+      </p:sp>
+      <p:sp>
+        <p:nvSpPr>
+          <p:cNvPr id="6" name="pill"/>
+          <p:cNvSpPr/>
+          <p:nvPr/>
+        </p:nvSpPr>
+        <p:spPr>
+          <a:xfrm>
+            <a:off x="4677156" y="1920240"/>
+            <a:ext cx="946404" cy="274320"/>
+          </a:xfrm>
+          <a:prstGeom prst="roundRect">
+            <a:avLst>
+              <a:gd name="adj" fmla="val 50000"/>
+            </a:avLst>
+          </a:prstGeom>
+          <a:solidFill>
+            <a:schemeClr val="accent2"/>
+          </a:solidFill>
+          <a:ln w="12700">
+            <a:solidFill>
+              <a:schemeClr val="accent2"/>
+            </a:solidFill>
+            <a:prstDash val="solid"/>
+          </a:ln>
+        </p:spPr>
+      </p:sp>
+      <p:sp>
+        <p:nvSpPr>
+          <p:cNvPr id="7" name="Text 4"/>
           <p:cNvSpPr txBox="1"/>
           <p:nvPr/>
         </p:nvSpPr>
         <p:spPr>
           <a:xfrm>
-            <a:off x="822960" y="5166360"/>
-            <a:ext cx="6400800" cy="411480"/>
+            <a:off x="4677156" y="1920240"/>
+            <a:ext cx="946404" cy="274320"/>
           </a:xfrm>
           <a:prstGeom prst="rect">
             <a:avLst/>
@@ -11044,19 +9655,245 @@
           <a:bodyPr wrap="square" lIns="0" tIns="0" rIns="0" bIns="0" rtlCol="0" anchor="ctr"/>
           <a:lstStyle/>
           <a:p>
-            <a:pPr indent="0" marL="0">
-              <a:buNone/>
-            </a:pPr>
-            <a:r>
-              <a:rPr lang="en-US" sz="1800" b="1" dirty="0">
-                <a:solidFill>
-                  <a:schemeClr val="accent1"/>
+            <a:pPr algn="ctr" indent="0" marL="0">
+              <a:buNone/>
+            </a:pPr>
+            <a:r>
+              <a:rPr lang="en-US" sz="1000" b="1" spc="150" kern="0" dirty="0">
+                <a:solidFill>
+                  <a:schemeClr val="tx1"/>
+                </a:solidFill>
+              </a:rPr>
+              <a:t>7 TABEL</a:t>
+            </a:r>
+            <a:endParaRPr lang="en-US" sz="1000" dirty="0"/>
+          </a:p>
+        </p:txBody>
+      </p:sp>
+      <p:sp>
+        <p:nvSpPr>
+          <p:cNvPr id="8" name="Text 5"/>
+          <p:cNvSpPr txBox="1"/>
+          <p:nvPr/>
+        </p:nvSpPr>
+        <p:spPr>
+          <a:xfrm>
+            <a:off x="822960" y="2423160"/>
+            <a:ext cx="4846320" cy="2103120"/>
+          </a:xfrm>
+          <a:prstGeom prst="rect">
+            <a:avLst/>
+          </a:prstGeom>
+          <a:noFill/>
+          <a:ln/>
+        </p:spPr>
+        <p:txBody>
+          <a:bodyPr wrap="square" lIns="0" tIns="0" rIns="0" bIns="0" rtlCol="0" anchor="t"/>
+          <a:lstStyle/>
+          <a:p>
+            <a:pPr indent="0" marL="0">
+              <a:buNone/>
+            </a:pPr>
+            <a:r>
+              <a:rPr lang="en-US" sz="1200" dirty="0">
+                <a:solidFill>
+                  <a:schemeClr val="accent6"/>
                 </a:solidFill>
                 <a:latin typeface="Courier New" pitchFamily="34" charset="0"/>
                 <a:ea typeface="Courier New" pitchFamily="34" charset="-122"/>
                 <a:cs typeface="Courier New" pitchFamily="34" charset="-120"/>
               </a:rPr>
-              <a:t>starts_at &lt; :end  AND  ends_at &gt; :start</a:t>
+              <a:t>radio.api_jadwal = 'jadwal_radio_woman'</a:t>
+            </a:r>
+            <a:endParaRPr lang="en-US" sz="1200" dirty="0"/>
+          </a:p>
+          <a:p>
+            <a:pPr indent="0" marL="0">
+              <a:buNone/>
+            </a:pPr>
+            <a:endParaRPr lang="en-US" sz="1200" dirty="0"/>
+          </a:p>
+          <a:p>
+            <a:pPr indent="0" marL="0">
+              <a:buNone/>
+            </a:pPr>
+            <a:r>
+              <a:rPr lang="en-US" sz="1200" dirty="0">
+                <a:solidFill>
+                  <a:schemeClr val="accent6"/>
+                </a:solidFill>
+                <a:latin typeface="Courier New" pitchFamily="34" charset="0"/>
+                <a:ea typeface="Courier New" pitchFamily="34" charset="-122"/>
+                <a:cs typeface="Courier New" pitchFamily="34" charset="-120"/>
+              </a:rPr>
+              <a:t>jdwl_radio_bandung</a:t>
+            </a:r>
+            <a:endParaRPr lang="en-US" sz="1200" dirty="0"/>
+          </a:p>
+          <a:p>
+            <a:pPr indent="0" marL="0">
+              <a:buNone/>
+            </a:pPr>
+            <a:r>
+              <a:rPr lang="en-US" sz="1200" dirty="0">
+                <a:solidFill>
+                  <a:schemeClr val="accent6"/>
+                </a:solidFill>
+                <a:latin typeface="Courier New" pitchFamily="34" charset="0"/>
+                <a:ea typeface="Courier New" pitchFamily="34" charset="-122"/>
+                <a:cs typeface="Courier New" pitchFamily="34" charset="-120"/>
+              </a:rPr>
+              <a:t>jdwl_radio_surabaya</a:t>
+            </a:r>
+            <a:endParaRPr lang="en-US" sz="1200" dirty="0"/>
+          </a:p>
+          <a:p>
+            <a:pPr indent="0" marL="0">
+              <a:buNone/>
+            </a:pPr>
+            <a:r>
+              <a:rPr lang="en-US" sz="1200" dirty="0">
+                <a:solidFill>
+                  <a:schemeClr val="accent6"/>
+                </a:solidFill>
+                <a:latin typeface="Courier New" pitchFamily="34" charset="0"/>
+                <a:ea typeface="Courier New" pitchFamily="34" charset="-122"/>
+                <a:cs typeface="Courier New" pitchFamily="34" charset="-120"/>
+              </a:rPr>
+              <a:t>jdwl_radio_suramadu  ...</a:t>
+            </a:r>
+            <a:endParaRPr lang="en-US" sz="1200" dirty="0"/>
+          </a:p>
+          <a:p>
+            <a:pPr indent="0" marL="0">
+              <a:buNone/>
+            </a:pPr>
+            <a:r>
+              <a:rPr lang="en-US" sz="1200" dirty="0">
+                <a:solidFill>
+                  <a:schemeClr val="accent6"/>
+                </a:solidFill>
+                <a:latin typeface="Courier New" pitchFamily="34" charset="0"/>
+                <a:ea typeface="Courier New" pitchFamily="34" charset="-122"/>
+                <a:cs typeface="Courier New" pitchFamily="34" charset="-120"/>
+              </a:rPr>
+              <a:t>  judul_siaran, hari_siaran,</a:t>
+            </a:r>
+            <a:endParaRPr lang="en-US" sz="1200" dirty="0"/>
+          </a:p>
+          <a:p>
+            <a:pPr indent="0" marL="0">
+              <a:buNone/>
+            </a:pPr>
+            <a:r>
+              <a:rPr lang="en-US" sz="1200" dirty="0">
+                <a:solidFill>
+                  <a:schemeClr val="accent6"/>
+                </a:solidFill>
+                <a:latin typeface="Courier New" pitchFamily="34" charset="0"/>
+                <a:ea typeface="Courier New" pitchFamily="34" charset="-122"/>
+                <a:cs typeface="Courier New" pitchFamily="34" charset="-120"/>
+              </a:rPr>
+              <a:t>  waktu_siaran, penyiar (text)</a:t>
+            </a:r>
+            <a:endParaRPr lang="en-US" sz="1200" dirty="0"/>
+          </a:p>
+        </p:txBody>
+      </p:sp>
+      <p:sp>
+        <p:nvSpPr>
+          <p:cNvPr id="9" name="Text 6"/>
+          <p:cNvSpPr txBox="1"/>
+          <p:nvPr/>
+        </p:nvSpPr>
+        <p:spPr>
+          <a:xfrm>
+            <a:off x="822960" y="4572000"/>
+            <a:ext cx="4846320" cy="822960"/>
+          </a:xfrm>
+          <a:prstGeom prst="rect">
+            <a:avLst/>
+          </a:prstGeom>
+          <a:noFill/>
+          <a:ln/>
+        </p:spPr>
+        <p:txBody>
+          <a:bodyPr wrap="square" lIns="0" tIns="0" rIns="0" bIns="0" rtlCol="0" anchor="t"/>
+          <a:lstStyle/>
+          <a:p>
+            <a:pPr indent="0" marL="0">
+              <a:buNone/>
+            </a:pPr>
+            <a:r>
+              <a:rPr lang="en-US" sz="1300" dirty="0">
+                <a:solidFill>
+                  <a:schemeClr val="bg2"/>
+                </a:solidFill>
+              </a:rPr>
+              <a:t>Stasiun baru berarti tabel baru. Satu nama tabel di api_jadwal tidak cocok dengan tabel aslinya.</a:t>
+            </a:r>
+            <a:endParaRPr lang="en-US" sz="1300" dirty="0"/>
+          </a:p>
+        </p:txBody>
+      </p:sp>
+      <p:sp>
+        <p:nvSpPr>
+          <p:cNvPr id="10" name="panel"/>
+          <p:cNvSpPr/>
+          <p:nvPr/>
+        </p:nvSpPr>
+        <p:spPr>
+          <a:xfrm>
+            <a:off x="6263640" y="1691640"/>
+            <a:ext cx="5349240" cy="3794760"/>
+          </a:xfrm>
+          <a:prstGeom prst="roundRect">
+            <a:avLst>
+              <a:gd name="adj" fmla="val 1928"/>
+            </a:avLst>
+          </a:prstGeom>
+          <a:solidFill>
+            <a:schemeClr val="tx2"/>
+          </a:solidFill>
+          <a:ln w="12700">
+            <a:solidFill>
+              <a:schemeClr val="tx2"/>
+            </a:solidFill>
+            <a:prstDash val="solid"/>
+          </a:ln>
+        </p:spPr>
+      </p:sp>
+      <p:sp>
+        <p:nvSpPr>
+          <p:cNvPr id="11" name="Text 8"/>
+          <p:cNvSpPr txBox="1"/>
+          <p:nvPr/>
+        </p:nvSpPr>
+        <p:spPr>
+          <a:xfrm>
+            <a:off x="6537960" y="1874520"/>
+            <a:ext cx="2743200" cy="365760"/>
+          </a:xfrm>
+          <a:prstGeom prst="rect">
+            <a:avLst/>
+          </a:prstGeom>
+          <a:noFill/>
+          <a:ln/>
+        </p:spPr>
+        <p:txBody>
+          <a:bodyPr wrap="square" lIns="0" tIns="0" rIns="0" bIns="0" rtlCol="0" anchor="ctr"/>
+          <a:lstStyle/>
+          <a:p>
+            <a:pPr indent="0" marL="0">
+              <a:buNone/>
+            </a:pPr>
+            <a:r>
+              <a:rPr lang="en-US" sz="1800" b="1" dirty="0">
+                <a:solidFill>
+                  <a:schemeClr val="bg1"/>
+                </a:solidFill>
+              </a:rPr>
+              <a:t>Demo</a:t>
             </a:r>
             <a:endParaRPr lang="en-US" sz="1800" dirty="0"/>
           </a:p>
@@ -11064,14 +9901,41 @@
       </p:sp>
       <p:sp>
         <p:nvSpPr>
-          <p:cNvPr id="27" name="Text 24"/>
+          <p:cNvPr id="12" name="pill"/>
+          <p:cNvSpPr/>
+          <p:nvPr/>
+        </p:nvSpPr>
+        <p:spPr>
+          <a:xfrm>
+            <a:off x="10392156" y="1920240"/>
+            <a:ext cx="946404" cy="274320"/>
+          </a:xfrm>
+          <a:prstGeom prst="roundRect">
+            <a:avLst>
+              <a:gd name="adj" fmla="val 50000"/>
+            </a:avLst>
+          </a:prstGeom>
+          <a:solidFill>
+            <a:schemeClr val="accent3"/>
+          </a:solidFill>
+          <a:ln w="12700">
+            <a:solidFill>
+              <a:schemeClr val="accent3"/>
+            </a:solidFill>
+            <a:prstDash val="solid"/>
+          </a:ln>
+        </p:spPr>
+      </p:sp>
+      <p:sp>
+        <p:nvSpPr>
+          <p:cNvPr id="13" name="Text 10"/>
           <p:cNvSpPr txBox="1"/>
           <p:nvPr/>
         </p:nvSpPr>
         <p:spPr>
           <a:xfrm>
-            <a:off x="822960" y="5623560"/>
-            <a:ext cx="10058400" cy="320040"/>
+            <a:off x="10392156" y="1920240"/>
+            <a:ext cx="946404" cy="274320"/>
           </a:xfrm>
           <a:prstGeom prst="rect">
             <a:avLst/>
@@ -11083,16 +9947,201 @@
           <a:bodyPr wrap="square" lIns="0" tIns="0" rIns="0" bIns="0" rtlCol="0" anchor="ctr"/>
           <a:lstStyle/>
           <a:p>
+            <a:pPr algn="ctr" indent="0" marL="0">
+              <a:buNone/>
+            </a:pPr>
+            <a:r>
+              <a:rPr lang="en-US" sz="1000" b="1" spc="150" kern="0" dirty="0">
+                <a:solidFill>
+                  <a:schemeClr val="tx1"/>
+                </a:solidFill>
+              </a:rPr>
+              <a:t>1 TABEL</a:t>
+            </a:r>
+            <a:endParaRPr lang="en-US" sz="1000" dirty="0"/>
+          </a:p>
+        </p:txBody>
+      </p:sp>
+      <p:sp>
+        <p:nvSpPr>
+          <p:cNvPr id="14" name="Text 11"/>
+          <p:cNvSpPr txBox="1"/>
+          <p:nvPr/>
+        </p:nvSpPr>
+        <p:spPr>
+          <a:xfrm>
+            <a:off x="6537960" y="2423160"/>
+            <a:ext cx="4846320" cy="2103120"/>
+          </a:xfrm>
+          <a:prstGeom prst="rect">
+            <a:avLst/>
+          </a:prstGeom>
+          <a:noFill/>
+          <a:ln/>
+        </p:spPr>
+        <p:txBody>
+          <a:bodyPr wrap="square" lIns="0" tIns="0" rIns="0" bIns="0" rtlCol="0" anchor="t"/>
+          <a:lstStyle/>
+          <a:p>
+            <a:pPr indent="0" marL="0">
+              <a:buNone/>
+            </a:pPr>
+            <a:r>
+              <a:rPr lang="en-US" sz="1200" dirty="0">
+                <a:solidFill>
+                  <a:schemeClr val="accent6"/>
+                </a:solidFill>
+                <a:latin typeface="Courier New" pitchFamily="34" charset="0"/>
+                <a:ea typeface="Courier New" pitchFamily="34" charset="-122"/>
+                <a:cs typeface="Courier New" pitchFamily="34" charset="-120"/>
+              </a:rPr>
+              <a:t>schedule_slots</a:t>
+            </a:r>
+            <a:endParaRPr lang="en-US" sz="1200" dirty="0"/>
+          </a:p>
+          <a:p>
+            <a:pPr indent="0" marL="0">
+              <a:buNone/>
+            </a:pPr>
+            <a:r>
+              <a:rPr lang="en-US" sz="1200" dirty="0">
+                <a:solidFill>
+                  <a:schemeClr val="accent6"/>
+                </a:solidFill>
+                <a:latin typeface="Courier New" pitchFamily="34" charset="0"/>
+                <a:ea typeface="Courier New" pitchFamily="34" charset="-122"/>
+                <a:cs typeface="Courier New" pitchFamily="34" charset="-120"/>
+              </a:rPr>
+              <a:t>  station_id  -&gt; stations</a:t>
+            </a:r>
+            <a:endParaRPr lang="en-US" sz="1200" dirty="0"/>
+          </a:p>
+          <a:p>
+            <a:pPr indent="0" marL="0">
+              <a:buNone/>
+            </a:pPr>
+            <a:r>
+              <a:rPr lang="en-US" sz="1200" dirty="0">
+                <a:solidFill>
+                  <a:schemeClr val="accent6"/>
+                </a:solidFill>
+                <a:latin typeface="Courier New" pitchFamily="34" charset="0"/>
+                <a:ea typeface="Courier New" pitchFamily="34" charset="-122"/>
+                <a:cs typeface="Courier New" pitchFamily="34" charset="-120"/>
+              </a:rPr>
+              <a:t>  show_id     -&gt; shows</a:t>
+            </a:r>
+            <a:endParaRPr lang="en-US" sz="1200" dirty="0"/>
+          </a:p>
+          <a:p>
+            <a:pPr indent="0" marL="0">
+              <a:buNone/>
+            </a:pPr>
+            <a:r>
+              <a:rPr lang="en-US" sz="1200" dirty="0">
+                <a:solidFill>
+                  <a:schemeClr val="accent6"/>
+                </a:solidFill>
+                <a:latin typeface="Courier New" pitchFamily="34" charset="0"/>
+                <a:ea typeface="Courier New" pitchFamily="34" charset="-122"/>
+                <a:cs typeface="Courier New" pitchFamily="34" charset="-120"/>
+              </a:rPr>
+              <a:t>  day_of_week, starts_at, ends_at</a:t>
+            </a:r>
+            <a:endParaRPr lang="en-US" sz="1200" dirty="0"/>
+          </a:p>
+          <a:p>
+            <a:pPr indent="0" marL="0">
+              <a:buNone/>
+            </a:pPr>
+            <a:endParaRPr lang="en-US" sz="1200" dirty="0"/>
+          </a:p>
+          <a:p>
+            <a:pPr indent="0" marL="0">
+              <a:buNone/>
+            </a:pPr>
+            <a:r>
+              <a:rPr lang="en-US" sz="1200" dirty="0">
+                <a:solidFill>
+                  <a:schemeClr val="accent6"/>
+                </a:solidFill>
+                <a:latin typeface="Courier New" pitchFamily="34" charset="0"/>
+                <a:ea typeface="Courier New" pitchFamily="34" charset="-122"/>
+                <a:cs typeface="Courier New" pitchFamily="34" charset="-120"/>
+              </a:rPr>
+              <a:t>host_show (show_id, host_id)</a:t>
+            </a:r>
+            <a:endParaRPr lang="en-US" sz="1200" dirty="0"/>
+          </a:p>
+        </p:txBody>
+      </p:sp>
+      <p:sp>
+        <p:nvSpPr>
+          <p:cNvPr id="15" name="Text 12"/>
+          <p:cNvSpPr txBox="1"/>
+          <p:nvPr/>
+        </p:nvSpPr>
+        <p:spPr>
+          <a:xfrm>
+            <a:off x="6537960" y="4572000"/>
+            <a:ext cx="4846320" cy="822960"/>
+          </a:xfrm>
+          <a:prstGeom prst="rect">
+            <a:avLst/>
+          </a:prstGeom>
+          <a:noFill/>
+          <a:ln/>
+        </p:spPr>
+        <p:txBody>
+          <a:bodyPr wrap="square" lIns="0" tIns="0" rIns="0" bIns="0" rtlCol="0" anchor="t"/>
+          <a:lstStyle/>
+          <a:p>
+            <a:pPr indent="0" marL="0">
+              <a:buNone/>
+            </a:pPr>
+            <a:r>
+              <a:rPr lang="en-US" sz="1300" dirty="0">
+                <a:solidFill>
+                  <a:schemeClr val="bg2"/>
+                </a:solidFill>
+              </a:rPr>
+              <a:t>Stasiun baru cukup satu baris. Foreign key menjaga relasi.</a:t>
+            </a:r>
+            <a:endParaRPr lang="en-US" sz="1300" dirty="0"/>
+          </a:p>
+        </p:txBody>
+      </p:sp>
+      <p:sp>
+        <p:nvSpPr>
+          <p:cNvPr id="16" name="Text 13"/>
+          <p:cNvSpPr txBox="1"/>
+          <p:nvPr/>
+        </p:nvSpPr>
+        <p:spPr>
+          <a:xfrm>
+            <a:off x="548640" y="5669280"/>
+            <a:ext cx="11064240" cy="457200"/>
+          </a:xfrm>
+          <a:prstGeom prst="rect">
+            <a:avLst/>
+          </a:prstGeom>
+          <a:noFill/>
+          <a:ln/>
+        </p:spPr>
+        <p:txBody>
+          <a:bodyPr wrap="square" lIns="0" tIns="0" rIns="0" bIns="0" rtlCol="0" anchor="ctr"/>
+          <a:lstStyle/>
+          <a:p>
             <a:pPr indent="0" marL="0">
               <a:buNone/>
             </a:pPr>
             <a:r>
               <a:rPr lang="en-US" sz="1400" dirty="0">
                 <a:solidFill>
-                  <a:schemeClr val="bg2"/>
-                </a:solidFill>
-              </a:rPr>
-              <a:t>Bersentuhan (10:00 lalu 10:00) boleh.</a:t>
+                  <a:schemeClr val="bg1"/>
+                </a:solidFill>
+              </a:rPr>
+              <a:t>Migrasi tanpa downtime: isi tabel baru dari tabel lama, view per kota untuk API lama, pindahkan pembaca satu per satu.</a:t>
             </a:r>
             <a:endParaRPr lang="en-US" sz="1400" dirty="0"/>
           </a:p>
@@ -11200,7 +10249,7 @@
                   <a:schemeClr val="bg1"/>
                 </a:solidFill>
               </a:rPr>
-              <a:t>Aturan bentrok saat menyimpan</a:t>
+              <a:t>Waktu sebagai angka, bukan teks</a:t>
             </a:r>
             <a:endParaRPr lang="en-US" sz="3200" dirty="0"/>
           </a:p>
@@ -11214,8 +10263,8 @@
         </p:nvSpPr>
         <p:spPr>
           <a:xfrm>
-            <a:off x="2651760" y="1691640"/>
-            <a:ext cx="731520" cy="228600"/>
+            <a:off x="548640" y="1691640"/>
+            <a:ext cx="4572000" cy="365760"/>
           </a:xfrm>
           <a:prstGeom prst="rect">
             <a:avLst/>
@@ -11227,215 +10276,35 @@
           <a:bodyPr wrap="square" lIns="0" tIns="0" rIns="0" bIns="0" rtlCol="0" anchor="ctr"/>
           <a:lstStyle/>
           <a:p>
-            <a:pPr algn="l" indent="0" marL="0">
-              <a:buNone/>
-            </a:pPr>
-            <a:r>
-              <a:rPr lang="en-US" sz="1000" dirty="0">
-                <a:solidFill>
-                  <a:schemeClr val="accent5"/>
-                </a:solidFill>
-              </a:rPr>
-              <a:t>00:00</a:t>
-            </a:r>
-            <a:endParaRPr lang="en-US" sz="1000" dirty="0"/>
-          </a:p>
-        </p:txBody>
-      </p:sp>
-      <p:sp>
-        <p:nvSpPr>
-          <p:cNvPr id="5" name="Text 2"/>
-          <p:cNvSpPr txBox="1"/>
-          <p:nvPr/>
-        </p:nvSpPr>
-        <p:spPr>
-          <a:xfrm>
-            <a:off x="4526280" y="1691640"/>
-            <a:ext cx="731520" cy="228600"/>
-          </a:xfrm>
-          <a:prstGeom prst="rect">
-            <a:avLst/>
-          </a:prstGeom>
-          <a:noFill/>
-          <a:ln/>
-        </p:spPr>
-        <p:txBody>
-          <a:bodyPr wrap="square" lIns="0" tIns="0" rIns="0" bIns="0" rtlCol="0" anchor="ctr"/>
-          <a:lstStyle/>
-          <a:p>
-            <a:pPr algn="ctr" indent="0" marL="0">
-              <a:buNone/>
-            </a:pPr>
-            <a:r>
-              <a:rPr lang="en-US" sz="1000" dirty="0">
-                <a:solidFill>
-                  <a:schemeClr val="accent5"/>
-                </a:solidFill>
-              </a:rPr>
-              <a:t>06:00</a:t>
-            </a:r>
-            <a:endParaRPr lang="en-US" sz="1000" dirty="0"/>
-          </a:p>
-        </p:txBody>
-      </p:sp>
-      <p:sp>
-        <p:nvSpPr>
-          <p:cNvPr id="6" name="Text 3"/>
-          <p:cNvSpPr txBox="1"/>
-          <p:nvPr/>
-        </p:nvSpPr>
-        <p:spPr>
-          <a:xfrm>
-            <a:off x="6766560" y="1691640"/>
-            <a:ext cx="731520" cy="228600"/>
-          </a:xfrm>
-          <a:prstGeom prst="rect">
-            <a:avLst/>
-          </a:prstGeom>
-          <a:noFill/>
-          <a:ln/>
-        </p:spPr>
-        <p:txBody>
-          <a:bodyPr wrap="square" lIns="0" tIns="0" rIns="0" bIns="0" rtlCol="0" anchor="ctr"/>
-          <a:lstStyle/>
-          <a:p>
-            <a:pPr algn="ctr" indent="0" marL="0">
-              <a:buNone/>
-            </a:pPr>
-            <a:r>
-              <a:rPr lang="en-US" sz="1000" dirty="0">
-                <a:solidFill>
-                  <a:schemeClr val="accent5"/>
-                </a:solidFill>
-              </a:rPr>
-              <a:t>12:00</a:t>
-            </a:r>
-            <a:endParaRPr lang="en-US" sz="1000" dirty="0"/>
-          </a:p>
-        </p:txBody>
-      </p:sp>
-      <p:sp>
-        <p:nvSpPr>
-          <p:cNvPr id="7" name="Text 4"/>
-          <p:cNvSpPr txBox="1"/>
-          <p:nvPr/>
-        </p:nvSpPr>
-        <p:spPr>
-          <a:xfrm>
-            <a:off x="9006840" y="1691640"/>
-            <a:ext cx="731520" cy="228600"/>
-          </a:xfrm>
-          <a:prstGeom prst="rect">
-            <a:avLst/>
-          </a:prstGeom>
-          <a:noFill/>
-          <a:ln/>
-        </p:spPr>
-        <p:txBody>
-          <a:bodyPr wrap="square" lIns="0" tIns="0" rIns="0" bIns="0" rtlCol="0" anchor="ctr"/>
-          <a:lstStyle/>
-          <a:p>
-            <a:pPr algn="ctr" indent="0" marL="0">
-              <a:buNone/>
-            </a:pPr>
-            <a:r>
-              <a:rPr lang="en-US" sz="1000" dirty="0">
-                <a:solidFill>
-                  <a:schemeClr val="accent5"/>
-                </a:solidFill>
-              </a:rPr>
-              <a:t>18:00</a:t>
-            </a:r>
-            <a:endParaRPr lang="en-US" sz="1000" dirty="0"/>
-          </a:p>
-        </p:txBody>
-      </p:sp>
-      <p:sp>
-        <p:nvSpPr>
-          <p:cNvPr id="8" name="Text 5"/>
-          <p:cNvSpPr txBox="1"/>
-          <p:nvPr/>
-        </p:nvSpPr>
-        <p:spPr>
-          <a:xfrm>
-            <a:off x="10881360" y="1691640"/>
-            <a:ext cx="731520" cy="228600"/>
-          </a:xfrm>
-          <a:prstGeom prst="rect">
-            <a:avLst/>
-          </a:prstGeom>
-          <a:noFill/>
-          <a:ln/>
-        </p:spPr>
-        <p:txBody>
-          <a:bodyPr wrap="square" lIns="0" tIns="0" rIns="0" bIns="0" rtlCol="0" anchor="ctr"/>
-          <a:lstStyle/>
-          <a:p>
-            <a:pPr algn="r" indent="0" marL="0">
-              <a:buNone/>
-            </a:pPr>
-            <a:r>
-              <a:rPr lang="en-US" sz="1000" dirty="0">
-                <a:solidFill>
-                  <a:schemeClr val="accent5"/>
-                </a:solidFill>
-              </a:rPr>
-              <a:t>24:00</a:t>
-            </a:r>
-            <a:endParaRPr lang="en-US" sz="1000" dirty="0"/>
-          </a:p>
-        </p:txBody>
-      </p:sp>
-      <p:sp>
-        <p:nvSpPr>
-          <p:cNvPr id="9" name="Text 6"/>
-          <p:cNvSpPr txBox="1"/>
-          <p:nvPr/>
-        </p:nvSpPr>
-        <p:spPr>
-          <a:xfrm>
-            <a:off x="548640" y="2011680"/>
-            <a:ext cx="2011680" cy="457200"/>
-          </a:xfrm>
-          <a:prstGeom prst="rect">
-            <a:avLst/>
-          </a:prstGeom>
-          <a:noFill/>
-          <a:ln/>
-        </p:spPr>
-        <p:txBody>
-          <a:bodyPr wrap="square" lIns="0" tIns="0" rIns="0" bIns="0" rtlCol="0" anchor="ctr"/>
-          <a:lstStyle/>
-          <a:p>
-            <a:pPr indent="0" marL="0">
-              <a:buNone/>
-            </a:pPr>
-            <a:r>
-              <a:rPr lang="en-US" sz="1400" dirty="0">
-                <a:solidFill>
-                  <a:schemeClr val="bg1"/>
-                </a:solidFill>
-              </a:rPr>
-              <a:t>Senin, Jakarta</a:t>
-            </a:r>
-            <a:endParaRPr lang="en-US" sz="1400" dirty="0"/>
-          </a:p>
-        </p:txBody>
-      </p:sp>
-      <p:sp>
-        <p:nvSpPr>
-          <p:cNvPr id="10" name="Shape 7"/>
+            <a:pPr indent="0" marL="0">
+              <a:buNone/>
+            </a:pPr>
+            <a:r>
+              <a:rPr lang="en-US" sz="1600" b="1" dirty="0">
+                <a:solidFill>
+                  <a:schemeClr val="bg2"/>
+                </a:solidFill>
+              </a:rPr>
+              <a:t>Di produksi</a:t>
+            </a:r>
+            <a:endParaRPr lang="en-US" sz="1600" dirty="0"/>
+          </a:p>
+        </p:txBody>
+      </p:sp>
+      <p:sp>
+        <p:nvSpPr>
+          <p:cNvPr id="5" name="Shape 2"/>
           <p:cNvSpPr/>
           <p:nvPr/>
         </p:nvSpPr>
         <p:spPr>
           <a:xfrm>
-            <a:off x="2651760" y="2011680"/>
-            <a:ext cx="8961120" cy="457200"/>
+            <a:off x="548640" y="2194560"/>
+            <a:ext cx="2423160" cy="457200"/>
           </a:xfrm>
           <a:prstGeom prst="roundRect">
             <a:avLst>
-              <a:gd name="adj" fmla="val 12000"/>
+              <a:gd name="adj" fmla="val 50000"/>
             </a:avLst>
           </a:prstGeom>
           <a:solidFill>
@@ -11451,180 +10320,57 @@
       </p:sp>
       <p:sp>
         <p:nvSpPr>
-          <p:cNvPr id="11" name="Shape 8"/>
+          <p:cNvPr id="6" name="Text 3"/>
+          <p:cNvSpPr txBox="1"/>
+          <p:nvPr/>
+        </p:nvSpPr>
+        <p:spPr>
+          <a:xfrm>
+            <a:off x="548640" y="2194560"/>
+            <a:ext cx="2423160" cy="457200"/>
+          </a:xfrm>
+          <a:prstGeom prst="rect">
+            <a:avLst/>
+          </a:prstGeom>
+          <a:noFill/>
+          <a:ln/>
+        </p:spPr>
+        <p:txBody>
+          <a:bodyPr wrap="square" lIns="0" tIns="0" rIns="0" bIns="0" rtlCol="0" anchor="ctr"/>
+          <a:lstStyle/>
+          <a:p>
+            <a:pPr algn="ctr" indent="0" marL="0">
+              <a:buNone/>
+            </a:pPr>
+            <a:r>
+              <a:rPr lang="en-US" sz="1200" dirty="0">
+                <a:solidFill>
+                  <a:schemeClr val="bg1"/>
+                </a:solidFill>
+                <a:latin typeface="Courier New" pitchFamily="34" charset="0"/>
+                <a:ea typeface="Courier New" pitchFamily="34" charset="-122"/>
+                <a:cs typeface="Courier New" pitchFamily="34" charset="-120"/>
+              </a:rPr>
+              <a:t>senin-jumat</a:t>
+            </a:r>
+            <a:endParaRPr lang="en-US" sz="1200" dirty="0"/>
+          </a:p>
+        </p:txBody>
+      </p:sp>
+      <p:sp>
+        <p:nvSpPr>
+          <p:cNvPr id="7" name="Shape 4"/>
           <p:cNvSpPr/>
           <p:nvPr/>
         </p:nvSpPr>
         <p:spPr>
           <a:xfrm>
-            <a:off x="4910328" y="2057400"/>
-            <a:ext cx="1456944" cy="365760"/>
+            <a:off x="3154680" y="2194560"/>
+            <a:ext cx="2423160" cy="457200"/>
           </a:xfrm>
           <a:prstGeom prst="roundRect">
             <a:avLst>
-              <a:gd name="adj" fmla="val 12500"/>
-            </a:avLst>
-          </a:prstGeom>
-          <a:solidFill>
-            <a:schemeClr val="bg1"/>
-          </a:solidFill>
-          <a:ln w="12700">
-            <a:solidFill>
-              <a:schemeClr val="bg1"/>
-            </a:solidFill>
-            <a:prstDash val="solid"/>
-          </a:ln>
-        </p:spPr>
-      </p:sp>
-      <p:sp>
-        <p:nvSpPr>
-          <p:cNvPr id="12" name="Text 9"/>
-          <p:cNvSpPr txBox="1"/>
-          <p:nvPr/>
-        </p:nvSpPr>
-        <p:spPr>
-          <a:xfrm>
-            <a:off x="4946904" y="2011680"/>
-            <a:ext cx="1402080" cy="457200"/>
-          </a:xfrm>
-          <a:prstGeom prst="rect">
-            <a:avLst/>
-          </a:prstGeom>
-          <a:noFill/>
-          <a:ln/>
-        </p:spPr>
-        <p:txBody>
-          <a:bodyPr wrap="square" lIns="0" tIns="0" rIns="0" bIns="0" rtlCol="0" anchor="ctr"/>
-          <a:lstStyle/>
-          <a:p>
-            <a:pPr indent="0" marL="0">
-              <a:buNone/>
-            </a:pPr>
-            <a:r>
-              <a:rPr lang="en-US" sz="1000" dirty="0">
-                <a:solidFill>
-                  <a:schemeClr val="tx1"/>
-                </a:solidFill>
-              </a:rPr>
-              <a:t>Pagi Jakarta</a:t>
-            </a:r>
-            <a:endParaRPr lang="en-US" sz="1000" dirty="0"/>
-          </a:p>
-        </p:txBody>
-      </p:sp>
-      <p:sp>
-        <p:nvSpPr>
-          <p:cNvPr id="13" name="Shape 10"/>
-          <p:cNvSpPr/>
-          <p:nvPr/>
-        </p:nvSpPr>
-        <p:spPr>
-          <a:xfrm>
-            <a:off x="6403848" y="2057400"/>
-            <a:ext cx="1083564" cy="365760"/>
-          </a:xfrm>
-          <a:prstGeom prst="roundRect">
-            <a:avLst>
-              <a:gd name="adj" fmla="val 12500"/>
-            </a:avLst>
-          </a:prstGeom>
-          <a:solidFill>
-            <a:schemeClr val="bg1"/>
-          </a:solidFill>
-          <a:ln w="12700">
-            <a:solidFill>
-              <a:schemeClr val="bg1"/>
-            </a:solidFill>
-            <a:prstDash val="solid"/>
-          </a:ln>
-        </p:spPr>
-      </p:sp>
-      <p:sp>
-        <p:nvSpPr>
-          <p:cNvPr id="14" name="Text 11"/>
-          <p:cNvSpPr txBox="1"/>
-          <p:nvPr/>
-        </p:nvSpPr>
-        <p:spPr>
-          <a:xfrm>
-            <a:off x="6440424" y="2011680"/>
-            <a:ext cx="1028700" cy="457200"/>
-          </a:xfrm>
-          <a:prstGeom prst="rect">
-            <a:avLst/>
-          </a:prstGeom>
-          <a:noFill/>
-          <a:ln/>
-        </p:spPr>
-        <p:txBody>
-          <a:bodyPr wrap="square" lIns="0" tIns="0" rIns="0" bIns="0" rtlCol="0" anchor="ctr"/>
-          <a:lstStyle/>
-          <a:p>
-            <a:pPr indent="0" marL="0">
-              <a:buNone/>
-            </a:pPr>
-            <a:r>
-              <a:rPr lang="en-US" sz="1000" dirty="0">
-                <a:solidFill>
-                  <a:schemeClr val="tx1"/>
-                </a:solidFill>
-              </a:rPr>
-              <a:t>Jam Makan Siang</a:t>
-            </a:r>
-            <a:endParaRPr lang="en-US" sz="1000" dirty="0"/>
-          </a:p>
-        </p:txBody>
-      </p:sp>
-      <p:sp>
-        <p:nvSpPr>
-          <p:cNvPr id="15" name="Text 12"/>
-          <p:cNvSpPr txBox="1"/>
-          <p:nvPr/>
-        </p:nvSpPr>
-        <p:spPr>
-          <a:xfrm>
-            <a:off x="548640" y="2788920"/>
-            <a:ext cx="2011680" cy="457200"/>
-          </a:xfrm>
-          <a:prstGeom prst="rect">
-            <a:avLst/>
-          </a:prstGeom>
-          <a:noFill/>
-          <a:ln/>
-        </p:spPr>
-        <p:txBody>
-          <a:bodyPr wrap="square" lIns="0" tIns="0" rIns="0" bIns="0" rtlCol="0" anchor="ctr"/>
-          <a:lstStyle/>
-          <a:p>
-            <a:pPr indent="0" marL="0">
-              <a:buNone/>
-            </a:pPr>
-            <a:r>
-              <a:rPr lang="en-US" sz="1400" dirty="0">
-                <a:solidFill>
-                  <a:schemeClr val="bg1"/>
-                </a:solidFill>
-              </a:rPr>
-              <a:t>Baru 09:00-11:00</a:t>
-            </a:r>
-            <a:endParaRPr lang="en-US" sz="1400" dirty="0"/>
-          </a:p>
-        </p:txBody>
-      </p:sp>
-      <p:sp>
-        <p:nvSpPr>
-          <p:cNvPr id="16" name="Shape 13"/>
-          <p:cNvSpPr/>
-          <p:nvPr/>
-        </p:nvSpPr>
-        <p:spPr>
-          <a:xfrm>
-            <a:off x="2651760" y="2788920"/>
-            <a:ext cx="8961120" cy="457200"/>
-          </a:xfrm>
-          <a:prstGeom prst="roundRect">
-            <a:avLst>
-              <a:gd name="adj" fmla="val 12000"/>
+              <a:gd name="adj" fmla="val 50000"/>
             </a:avLst>
           </a:prstGeom>
           <a:solidFill>
@@ -11640,153 +10386,57 @@
       </p:sp>
       <p:sp>
         <p:nvSpPr>
-          <p:cNvPr id="17" name="Shape 14"/>
+          <p:cNvPr id="8" name="Text 5"/>
+          <p:cNvSpPr txBox="1"/>
+          <p:nvPr/>
+        </p:nvSpPr>
+        <p:spPr>
+          <a:xfrm>
+            <a:off x="3154680" y="2194560"/>
+            <a:ext cx="2423160" cy="457200"/>
+          </a:xfrm>
+          <a:prstGeom prst="rect">
+            <a:avLst/>
+          </a:prstGeom>
+          <a:noFill/>
+          <a:ln/>
+        </p:spPr>
+        <p:txBody>
+          <a:bodyPr wrap="square" lIns="0" tIns="0" rIns="0" bIns="0" rtlCol="0" anchor="ctr"/>
+          <a:lstStyle/>
+          <a:p>
+            <a:pPr algn="ctr" indent="0" marL="0">
+              <a:buNone/>
+            </a:pPr>
+            <a:r>
+              <a:rPr lang="en-US" sz="1200" dirty="0">
+                <a:solidFill>
+                  <a:schemeClr val="bg1"/>
+                </a:solidFill>
+                <a:latin typeface="Courier New" pitchFamily="34" charset="0"/>
+                <a:ea typeface="Courier New" pitchFamily="34" charset="-122"/>
+                <a:cs typeface="Courier New" pitchFamily="34" charset="-120"/>
+              </a:rPr>
+              <a:t>Senin- Jumat</a:t>
+            </a:r>
+            <a:endParaRPr lang="en-US" sz="1200" dirty="0"/>
+          </a:p>
+        </p:txBody>
+      </p:sp>
+      <p:sp>
+        <p:nvSpPr>
+          <p:cNvPr id="9" name="Shape 6"/>
           <p:cNvSpPr/>
           <p:nvPr/>
         </p:nvSpPr>
         <p:spPr>
           <a:xfrm>
-            <a:off x="6030468" y="2834640"/>
-            <a:ext cx="710184" cy="365760"/>
+            <a:off x="548640" y="2834640"/>
+            <a:ext cx="2423160" cy="457200"/>
           </a:xfrm>
           <a:prstGeom prst="roundRect">
             <a:avLst>
-              <a:gd name="adj" fmla="val 12500"/>
-            </a:avLst>
-          </a:prstGeom>
-          <a:solidFill>
-            <a:schemeClr val="accent1"/>
-          </a:solidFill>
-          <a:ln w="12700">
-            <a:solidFill>
-              <a:schemeClr val="accent1"/>
-            </a:solidFill>
-            <a:prstDash val="solid"/>
-          </a:ln>
-        </p:spPr>
-      </p:sp>
-      <p:sp>
-        <p:nvSpPr>
-          <p:cNvPr id="18" name="Text 15"/>
-          <p:cNvSpPr txBox="1"/>
-          <p:nvPr/>
-        </p:nvSpPr>
-        <p:spPr>
-          <a:xfrm>
-            <a:off x="6067044" y="2788920"/>
-            <a:ext cx="655320" cy="457200"/>
-          </a:xfrm>
-          <a:prstGeom prst="rect">
-            <a:avLst/>
-          </a:prstGeom>
-          <a:noFill/>
-          <a:ln/>
-        </p:spPr>
-        <p:txBody>
-          <a:bodyPr wrap="square" lIns="0" tIns="0" rIns="0" bIns="0" rtlCol="0" anchor="ctr"/>
-          <a:lstStyle/>
-          <a:p>
-            <a:pPr indent="0" marL="0">
-              <a:buNone/>
-            </a:pPr>
-            <a:r>
-              <a:rPr lang="en-US" sz="1000" dirty="0">
-                <a:solidFill>
-                  <a:schemeClr val="bg1"/>
-                </a:solidFill>
-              </a:rPr>
-              <a:t>Ngobrol</a:t>
-            </a:r>
-            <a:endParaRPr lang="en-US" sz="1000" dirty="0"/>
-          </a:p>
-        </p:txBody>
-      </p:sp>
-      <p:sp>
-        <p:nvSpPr>
-          <p:cNvPr id="19" name="Text 16"/>
-          <p:cNvSpPr txBox="1"/>
-          <p:nvPr/>
-        </p:nvSpPr>
-        <p:spPr>
-          <a:xfrm>
-            <a:off x="2651760" y="3319272"/>
-            <a:ext cx="8961120" cy="274320"/>
-          </a:xfrm>
-          <a:prstGeom prst="rect">
-            <a:avLst/>
-          </a:prstGeom>
-          <a:noFill/>
-          <a:ln/>
-        </p:spPr>
-        <p:txBody>
-          <a:bodyPr wrap="square" lIns="0" tIns="0" rIns="0" bIns="0" rtlCol="0" anchor="ctr"/>
-          <a:lstStyle/>
-          <a:p>
-            <a:pPr indent="0" marL="0">
-              <a:buNone/>
-            </a:pPr>
-            <a:r>
-              <a:rPr lang="en-US" sz="1300" dirty="0">
-                <a:solidFill>
-                  <a:schemeClr val="accent1"/>
-                </a:solidFill>
-              </a:rPr>
-              <a:t>Ditolak: bentrok dengan "Pagi Jakarta" (06:00 - 10:00)</a:t>
-            </a:r>
-            <a:endParaRPr lang="en-US" sz="1300" dirty="0"/>
-          </a:p>
-        </p:txBody>
-      </p:sp>
-      <p:sp>
-        <p:nvSpPr>
-          <p:cNvPr id="20" name="Text 17"/>
-          <p:cNvSpPr txBox="1"/>
-          <p:nvPr/>
-        </p:nvSpPr>
-        <p:spPr>
-          <a:xfrm>
-            <a:off x="548640" y="3749040"/>
-            <a:ext cx="2011680" cy="457200"/>
-          </a:xfrm>
-          <a:prstGeom prst="rect">
-            <a:avLst/>
-          </a:prstGeom>
-          <a:noFill/>
-          <a:ln/>
-        </p:spPr>
-        <p:txBody>
-          <a:bodyPr wrap="square" lIns="0" tIns="0" rIns="0" bIns="0" rtlCol="0" anchor="ctr"/>
-          <a:lstStyle/>
-          <a:p>
-            <a:pPr indent="0" marL="0">
-              <a:buNone/>
-            </a:pPr>
-            <a:r>
-              <a:rPr lang="en-US" sz="1400" dirty="0">
-                <a:solidFill>
-                  <a:schemeClr val="bg1"/>
-                </a:solidFill>
-              </a:rPr>
-              <a:t>Baru 13:00-14:00</a:t>
-            </a:r>
-            <a:endParaRPr lang="en-US" sz="1400" dirty="0"/>
-          </a:p>
-        </p:txBody>
-      </p:sp>
-      <p:sp>
-        <p:nvSpPr>
-          <p:cNvPr id="21" name="Shape 18"/>
-          <p:cNvSpPr/>
-          <p:nvPr/>
-        </p:nvSpPr>
-        <p:spPr>
-          <a:xfrm>
-            <a:off x="2651760" y="3749040"/>
-            <a:ext cx="8961120" cy="457200"/>
-          </a:xfrm>
-          <a:prstGeom prst="roundRect">
-            <a:avLst>
-              <a:gd name="adj" fmla="val 12000"/>
+              <a:gd name="adj" fmla="val 50000"/>
             </a:avLst>
           </a:prstGeom>
           <a:solidFill>
@@ -11802,26 +10452,65 @@
       </p:sp>
       <p:sp>
         <p:nvSpPr>
-          <p:cNvPr id="22" name="Shape 19"/>
+          <p:cNvPr id="10" name="Text 7"/>
+          <p:cNvSpPr txBox="1"/>
+          <p:nvPr/>
+        </p:nvSpPr>
+        <p:spPr>
+          <a:xfrm>
+            <a:off x="548640" y="2834640"/>
+            <a:ext cx="2423160" cy="457200"/>
+          </a:xfrm>
+          <a:prstGeom prst="rect">
+            <a:avLst/>
+          </a:prstGeom>
+          <a:noFill/>
+          <a:ln/>
+        </p:spPr>
+        <p:txBody>
+          <a:bodyPr wrap="square" lIns="0" tIns="0" rIns="0" bIns="0" rtlCol="0" anchor="ctr"/>
+          <a:lstStyle/>
+          <a:p>
+            <a:pPr algn="ctr" indent="0" marL="0">
+              <a:buNone/>
+            </a:pPr>
+            <a:r>
+              <a:rPr lang="en-US" sz="1200" dirty="0">
+                <a:solidFill>
+                  <a:schemeClr val="bg1"/>
+                </a:solidFill>
+                <a:latin typeface="Courier New" pitchFamily="34" charset="0"/>
+                <a:ea typeface="Courier New" pitchFamily="34" charset="-122"/>
+                <a:cs typeface="Courier New" pitchFamily="34" charset="-120"/>
+              </a:rPr>
+              <a:t>Monday-Friday</a:t>
+            </a:r>
+            <a:endParaRPr lang="en-US" sz="1200" dirty="0"/>
+          </a:p>
+        </p:txBody>
+      </p:sp>
+      <p:sp>
+        <p:nvSpPr>
+          <p:cNvPr id="11" name="Shape 8"/>
           <p:cNvSpPr/>
           <p:nvPr/>
         </p:nvSpPr>
         <p:spPr>
           <a:xfrm>
-            <a:off x="7523988" y="3794760"/>
-            <a:ext cx="336804" cy="365760"/>
+            <a:off x="3154680" y="2834640"/>
+            <a:ext cx="2423160" cy="457200"/>
           </a:xfrm>
           <a:prstGeom prst="roundRect">
             <a:avLst>
-              <a:gd name="adj" fmla="val 13575"/>
+              <a:gd name="adj" fmla="val 50000"/>
             </a:avLst>
           </a:prstGeom>
           <a:solidFill>
-            <a:schemeClr val="accent3"/>
+            <a:schemeClr val="accent4"/>
           </a:solidFill>
           <a:ln w="12700">
             <a:solidFill>
-              <a:schemeClr val="accent3"/>
+              <a:schemeClr val="accent4"/>
             </a:solidFill>
             <a:prstDash val="solid"/>
           </a:ln>
@@ -11829,90 +10518,435 @@
       </p:sp>
       <p:sp>
         <p:nvSpPr>
+          <p:cNvPr id="12" name="Text 9"/>
+          <p:cNvSpPr txBox="1"/>
+          <p:nvPr/>
+        </p:nvSpPr>
+        <p:spPr>
+          <a:xfrm>
+            <a:off x="3154680" y="2834640"/>
+            <a:ext cx="2423160" cy="457200"/>
+          </a:xfrm>
+          <a:prstGeom prst="rect">
+            <a:avLst/>
+          </a:prstGeom>
+          <a:noFill/>
+          <a:ln/>
+        </p:spPr>
+        <p:txBody>
+          <a:bodyPr wrap="square" lIns="0" tIns="0" rIns="0" bIns="0" rtlCol="0" anchor="ctr"/>
+          <a:lstStyle/>
+          <a:p>
+            <a:pPr algn="ctr" indent="0" marL="0">
+              <a:buNone/>
+            </a:pPr>
+            <a:r>
+              <a:rPr lang="en-US" sz="1200" dirty="0">
+                <a:solidFill>
+                  <a:schemeClr val="bg1"/>
+                </a:solidFill>
+                <a:latin typeface="Courier New" pitchFamily="34" charset="0"/>
+                <a:ea typeface="Courier New" pitchFamily="34" charset="-122"/>
+                <a:cs typeface="Courier New" pitchFamily="34" charset="-120"/>
+              </a:rPr>
+              <a:t>6:00 AM - 10:00 AM</a:t>
+            </a:r>
+            <a:endParaRPr lang="en-US" sz="1200" dirty="0"/>
+          </a:p>
+        </p:txBody>
+      </p:sp>
+      <p:sp>
+        <p:nvSpPr>
+          <p:cNvPr id="13" name="Shape 10"/>
+          <p:cNvSpPr/>
+          <p:nvPr/>
+        </p:nvSpPr>
+        <p:spPr>
+          <a:xfrm>
+            <a:off x="548640" y="3474720"/>
+            <a:ext cx="2423160" cy="457200"/>
+          </a:xfrm>
+          <a:prstGeom prst="roundRect">
+            <a:avLst>
+              <a:gd name="adj" fmla="val 50000"/>
+            </a:avLst>
+          </a:prstGeom>
+          <a:solidFill>
+            <a:schemeClr val="accent4"/>
+          </a:solidFill>
+          <a:ln w="12700">
+            <a:solidFill>
+              <a:schemeClr val="accent4"/>
+            </a:solidFill>
+            <a:prstDash val="solid"/>
+          </a:ln>
+        </p:spPr>
+      </p:sp>
+      <p:sp>
+        <p:nvSpPr>
+          <p:cNvPr id="14" name="Text 11"/>
+          <p:cNvSpPr txBox="1"/>
+          <p:nvPr/>
+        </p:nvSpPr>
+        <p:spPr>
+          <a:xfrm>
+            <a:off x="548640" y="3474720"/>
+            <a:ext cx="2423160" cy="457200"/>
+          </a:xfrm>
+          <a:prstGeom prst="rect">
+            <a:avLst/>
+          </a:prstGeom>
+          <a:noFill/>
+          <a:ln/>
+        </p:spPr>
+        <p:txBody>
+          <a:bodyPr wrap="square" lIns="0" tIns="0" rIns="0" bIns="0" rtlCol="0" anchor="ctr"/>
+          <a:lstStyle/>
+          <a:p>
+            <a:pPr algn="ctr" indent="0" marL="0">
+              <a:buNone/>
+            </a:pPr>
+            <a:r>
+              <a:rPr lang="en-US" sz="1200" dirty="0">
+                <a:solidFill>
+                  <a:schemeClr val="bg1"/>
+                </a:solidFill>
+                <a:latin typeface="Courier New" pitchFamily="34" charset="0"/>
+                <a:ea typeface="Courier New" pitchFamily="34" charset="-122"/>
+                <a:cs typeface="Courier New" pitchFamily="34" charset="-120"/>
+              </a:rPr>
+              <a:t>08.00-09.00</a:t>
+            </a:r>
+            <a:endParaRPr lang="en-US" sz="1200" dirty="0"/>
+          </a:p>
+        </p:txBody>
+      </p:sp>
+      <p:sp>
+        <p:nvSpPr>
+          <p:cNvPr id="15" name="Shape 12"/>
+          <p:cNvSpPr/>
+          <p:nvPr/>
+        </p:nvSpPr>
+        <p:spPr>
+          <a:xfrm>
+            <a:off x="3154680" y="3474720"/>
+            <a:ext cx="2423160" cy="457200"/>
+          </a:xfrm>
+          <a:prstGeom prst="roundRect">
+            <a:avLst>
+              <a:gd name="adj" fmla="val 50000"/>
+            </a:avLst>
+          </a:prstGeom>
+          <a:solidFill>
+            <a:schemeClr val="accent4"/>
+          </a:solidFill>
+          <a:ln w="12700">
+            <a:solidFill>
+              <a:schemeClr val="accent4"/>
+            </a:solidFill>
+            <a:prstDash val="solid"/>
+          </a:ln>
+        </p:spPr>
+      </p:sp>
+      <p:sp>
+        <p:nvSpPr>
+          <p:cNvPr id="16" name="Text 13"/>
+          <p:cNvSpPr txBox="1"/>
+          <p:nvPr/>
+        </p:nvSpPr>
+        <p:spPr>
+          <a:xfrm>
+            <a:off x="3154680" y="3474720"/>
+            <a:ext cx="2423160" cy="457200"/>
+          </a:xfrm>
+          <a:prstGeom prst="rect">
+            <a:avLst/>
+          </a:prstGeom>
+          <a:noFill/>
+          <a:ln/>
+        </p:spPr>
+        <p:txBody>
+          <a:bodyPr wrap="square" lIns="0" tIns="0" rIns="0" bIns="0" rtlCol="0" anchor="ctr"/>
+          <a:lstStyle/>
+          <a:p>
+            <a:pPr algn="ctr" indent="0" marL="0">
+              <a:buNone/>
+            </a:pPr>
+            <a:r>
+              <a:rPr lang="en-US" sz="1200" dirty="0">
+                <a:solidFill>
+                  <a:schemeClr val="bg1"/>
+                </a:solidFill>
+                <a:latin typeface="Courier New" pitchFamily="34" charset="0"/>
+                <a:ea typeface="Courier New" pitchFamily="34" charset="-122"/>
+                <a:cs typeface="Courier New" pitchFamily="34" charset="-120"/>
+              </a:rPr>
+              <a:t>20:00-24:00</a:t>
+            </a:r>
+            <a:endParaRPr lang="en-US" sz="1200" dirty="0"/>
+          </a:p>
+        </p:txBody>
+      </p:sp>
+      <p:sp>
+        <p:nvSpPr>
+          <p:cNvPr id="17" name="Shape 14"/>
+          <p:cNvSpPr/>
+          <p:nvPr/>
+        </p:nvSpPr>
+        <p:spPr>
+          <a:xfrm>
+            <a:off x="5852160" y="3108960"/>
+            <a:ext cx="822960" cy="914"/>
+          </a:xfrm>
+          <a:prstGeom prst="line">
+            <a:avLst/>
+          </a:prstGeom>
+          <a:noFill/>
+          <a:ln w="19050">
+            <a:solidFill>
+              <a:schemeClr val="accent5"/>
+            </a:solidFill>
+            <a:prstDash val="solid"/>
+            <a:tailEnd type="triangle"/>
+          </a:ln>
+        </p:spPr>
+      </p:sp>
+      <p:sp>
+        <p:nvSpPr>
+          <p:cNvPr id="18" name="Text 15"/>
+          <p:cNvSpPr txBox="1"/>
+          <p:nvPr/>
+        </p:nvSpPr>
+        <p:spPr>
+          <a:xfrm>
+            <a:off x="6949440" y="1691640"/>
+            <a:ext cx="4572000" cy="365760"/>
+          </a:xfrm>
+          <a:prstGeom prst="rect">
+            <a:avLst/>
+          </a:prstGeom>
+          <a:noFill/>
+          <a:ln/>
+        </p:spPr>
+        <p:txBody>
+          <a:bodyPr wrap="square" lIns="0" tIns="0" rIns="0" bIns="0" rtlCol="0" anchor="ctr"/>
+          <a:lstStyle/>
+          <a:p>
+            <a:pPr indent="0" marL="0">
+              <a:buNone/>
+            </a:pPr>
+            <a:r>
+              <a:rPr lang="en-US" sz="1600" b="1" dirty="0">
+                <a:solidFill>
+                  <a:schemeClr val="bg2"/>
+                </a:solidFill>
+              </a:rPr>
+              <a:t>Di demo</a:t>
+            </a:r>
+            <a:endParaRPr lang="en-US" sz="1600" dirty="0"/>
+          </a:p>
+        </p:txBody>
+      </p:sp>
+      <p:sp>
+        <p:nvSpPr>
+          <p:cNvPr id="19" name="Text 16"/>
+          <p:cNvSpPr txBox="1"/>
+          <p:nvPr/>
+        </p:nvSpPr>
+        <p:spPr>
+          <a:xfrm>
+            <a:off x="6949440" y="2148840"/>
+            <a:ext cx="2194560" cy="914400"/>
+          </a:xfrm>
+          <a:prstGeom prst="rect">
+            <a:avLst/>
+          </a:prstGeom>
+          <a:noFill/>
+          <a:ln/>
+        </p:spPr>
+        <p:txBody>
+          <a:bodyPr wrap="square" lIns="0" tIns="0" rIns="0" bIns="0" rtlCol="0" anchor="ctr"/>
+          <a:lstStyle/>
+          <a:p>
+            <a:pPr indent="0" marL="0">
+              <a:buNone/>
+            </a:pPr>
+            <a:r>
+              <a:rPr lang="en-US" sz="4800" b="1" dirty="0">
+                <a:solidFill>
+                  <a:schemeClr val="accent1"/>
+                </a:solidFill>
+                <a:latin typeface="+mj-lt" pitchFamily="34" charset="0"/>
+                <a:ea typeface="+mj-lt" pitchFamily="34" charset="-122"/>
+                <a:cs typeface="+mj-lt" pitchFamily="34" charset="-120"/>
+              </a:rPr>
+              <a:t>450</a:t>
+            </a:r>
+            <a:endParaRPr lang="en-US" sz="4800" dirty="0"/>
+          </a:p>
+        </p:txBody>
+      </p:sp>
+      <p:sp>
+        <p:nvSpPr>
+          <p:cNvPr id="20" name="Text 17"/>
+          <p:cNvSpPr txBox="1"/>
+          <p:nvPr/>
+        </p:nvSpPr>
+        <p:spPr>
+          <a:xfrm>
+            <a:off x="6949440" y="3063240"/>
+            <a:ext cx="2194560" cy="320040"/>
+          </a:xfrm>
+          <a:prstGeom prst="rect">
+            <a:avLst/>
+          </a:prstGeom>
+          <a:noFill/>
+          <a:ln/>
+        </p:spPr>
+        <p:txBody>
+          <a:bodyPr wrap="square" lIns="0" tIns="0" rIns="0" bIns="0" rtlCol="0" anchor="ctr"/>
+          <a:lstStyle/>
+          <a:p>
+            <a:pPr indent="0" marL="0">
+              <a:buNone/>
+            </a:pPr>
+            <a:r>
+              <a:rPr lang="en-US" sz="1400" dirty="0">
+                <a:solidFill>
+                  <a:schemeClr val="bg2"/>
+                </a:solidFill>
+              </a:rPr>
+              <a:t>menit = 07:30</a:t>
+            </a:r>
+            <a:endParaRPr lang="en-US" sz="1400" dirty="0"/>
+          </a:p>
+        </p:txBody>
+      </p:sp>
+      <p:sp>
+        <p:nvSpPr>
+          <p:cNvPr id="21" name="Text 18"/>
+          <p:cNvSpPr txBox="1"/>
+          <p:nvPr/>
+        </p:nvSpPr>
+        <p:spPr>
+          <a:xfrm>
+            <a:off x="9326880" y="2148840"/>
+            <a:ext cx="2194560" cy="914400"/>
+          </a:xfrm>
+          <a:prstGeom prst="rect">
+            <a:avLst/>
+          </a:prstGeom>
+          <a:noFill/>
+          <a:ln/>
+        </p:spPr>
+        <p:txBody>
+          <a:bodyPr wrap="square" lIns="0" tIns="0" rIns="0" bIns="0" rtlCol="0" anchor="ctr"/>
+          <a:lstStyle/>
+          <a:p>
+            <a:pPr indent="0" marL="0">
+              <a:buNone/>
+            </a:pPr>
+            <a:r>
+              <a:rPr lang="en-US" sz="4800" b="1" dirty="0">
+                <a:solidFill>
+                  <a:schemeClr val="accent1"/>
+                </a:solidFill>
+                <a:latin typeface="+mj-lt" pitchFamily="34" charset="0"/>
+                <a:ea typeface="+mj-lt" pitchFamily="34" charset="-122"/>
+                <a:cs typeface="+mj-lt" pitchFamily="34" charset="-120"/>
+              </a:rPr>
+              <a:t>1440</a:t>
+            </a:r>
+            <a:endParaRPr lang="en-US" sz="4800" dirty="0"/>
+          </a:p>
+        </p:txBody>
+      </p:sp>
+      <p:sp>
+        <p:nvSpPr>
+          <p:cNvPr id="22" name="Text 19"/>
+          <p:cNvSpPr txBox="1"/>
+          <p:nvPr/>
+        </p:nvSpPr>
+        <p:spPr>
+          <a:xfrm>
+            <a:off x="9326880" y="3063240"/>
+            <a:ext cx="2194560" cy="320040"/>
+          </a:xfrm>
+          <a:prstGeom prst="rect">
+            <a:avLst/>
+          </a:prstGeom>
+          <a:noFill/>
+          <a:ln/>
+        </p:spPr>
+        <p:txBody>
+          <a:bodyPr wrap="square" lIns="0" tIns="0" rIns="0" bIns="0" rtlCol="0" anchor="ctr"/>
+          <a:lstStyle/>
+          <a:p>
+            <a:pPr indent="0" marL="0">
+              <a:buNone/>
+            </a:pPr>
+            <a:r>
+              <a:rPr lang="en-US" sz="1400" dirty="0">
+                <a:solidFill>
+                  <a:schemeClr val="bg2"/>
+                </a:solidFill>
+              </a:rPr>
+              <a:t>menit = 24:00</a:t>
+            </a:r>
+            <a:endParaRPr lang="en-US" sz="1400" dirty="0"/>
+          </a:p>
+        </p:txBody>
+      </p:sp>
+      <p:sp>
+        <p:nvSpPr>
           <p:cNvPr id="23" name="Text 20"/>
           <p:cNvSpPr txBox="1"/>
           <p:nvPr/>
         </p:nvSpPr>
         <p:spPr>
           <a:xfrm>
-            <a:off x="7560564" y="3749040"/>
-            <a:ext cx="281940" cy="457200"/>
-          </a:xfrm>
-          <a:prstGeom prst="rect">
-            <a:avLst/>
-          </a:prstGeom>
-          <a:noFill/>
-          <a:ln/>
-        </p:spPr>
-        <p:txBody>
-          <a:bodyPr wrap="square" lIns="0" tIns="0" rIns="0" bIns="0" rtlCol="0" anchor="ctr"/>
-          <a:lstStyle/>
-          <a:p>
-            <a:pPr indent="0" marL="0">
-              <a:buNone/>
-            </a:pPr>
-            <a:r>
-              <a:rPr lang="en-US" sz="1000" dirty="0">
+            <a:off x="6949440" y="3566160"/>
+            <a:ext cx="4663440" cy="640080"/>
+          </a:xfrm>
+          <a:prstGeom prst="rect">
+            <a:avLst/>
+          </a:prstGeom>
+          <a:noFill/>
+          <a:ln/>
+        </p:spPr>
+        <p:txBody>
+          <a:bodyPr wrap="square" lIns="0" tIns="0" rIns="0" bIns="0" rtlCol="0" anchor="t"/>
+          <a:lstStyle/>
+          <a:p>
+            <a:pPr indent="0" marL="0">
+              <a:buNone/>
+            </a:pPr>
+            <a:r>
+              <a:rPr lang="en-US" sz="1400" dirty="0">
                 <a:solidFill>
                   <a:schemeClr val="bg1"/>
                 </a:solidFill>
               </a:rPr>
-              <a:t>OK</a:t>
-            </a:r>
-            <a:endParaRPr lang="en-US" sz="1000" dirty="0"/>
-          </a:p>
-        </p:txBody>
-      </p:sp>
-      <p:sp>
-        <p:nvSpPr>
-          <p:cNvPr id="24" name="Text 21"/>
-          <p:cNvSpPr txBox="1"/>
-          <p:nvPr/>
-        </p:nvSpPr>
-        <p:spPr>
-          <a:xfrm>
-            <a:off x="2651760" y="4279392"/>
-            <a:ext cx="8961120" cy="274320"/>
-          </a:xfrm>
-          <a:prstGeom prst="rect">
-            <a:avLst/>
-          </a:prstGeom>
-          <a:noFill/>
-          <a:ln/>
-        </p:spPr>
-        <p:txBody>
-          <a:bodyPr wrap="square" lIns="0" tIns="0" rIns="0" bIns="0" rtlCol="0" anchor="ctr"/>
-          <a:lstStyle/>
-          <a:p>
-            <a:pPr indent="0" marL="0">
-              <a:buNone/>
-            </a:pPr>
-            <a:r>
-              <a:rPr lang="en-US" sz="1300" dirty="0">
-                <a:solidFill>
-                  <a:schemeClr val="accent3"/>
-                </a:solidFill>
-              </a:rPr>
-              <a:t>Boleh: mulai tepat saat program sebelumnya selesai</a:t>
-            </a:r>
-            <a:endParaRPr lang="en-US" sz="1300" dirty="0"/>
-          </a:p>
-        </p:txBody>
-      </p:sp>
-      <p:sp>
-        <p:nvSpPr>
-          <p:cNvPr id="25" name="panel"/>
+              <a:t>day_of_week 1-7 (ISO), satu baris per hari. Form hanya menerima HH:MM.</a:t>
+            </a:r>
+            <a:endParaRPr lang="en-US" sz="1400" dirty="0"/>
+          </a:p>
+        </p:txBody>
+      </p:sp>
+      <p:sp>
+        <p:nvSpPr>
+          <p:cNvPr id="24" name="panel"/>
           <p:cNvSpPr/>
           <p:nvPr/>
         </p:nvSpPr>
         <p:spPr>
           <a:xfrm>
-            <a:off x="548640" y="4754880"/>
-            <a:ext cx="3520440" cy="1325880"/>
+            <a:off x="548640" y="4526280"/>
+            <a:ext cx="11064240" cy="1554480"/>
           </a:xfrm>
           <a:prstGeom prst="roundRect">
             <a:avLst>
-              <a:gd name="adj" fmla="val 5517"/>
+              <a:gd name="adj" fmla="val 4706"/>
             </a:avLst>
           </a:prstGeom>
           <a:solidFill>
@@ -11928,63 +10962,14 @@
       </p:sp>
       <p:sp>
         <p:nvSpPr>
-          <p:cNvPr id="26" name="Shape 23"/>
-          <p:cNvSpPr/>
-          <p:nvPr/>
-        </p:nvSpPr>
-        <p:spPr>
-          <a:xfrm>
-            <a:off x="777240" y="4983480"/>
-            <a:ext cx="502920" cy="502920"/>
-          </a:xfrm>
-          <a:prstGeom prst="ellipse">
-            <a:avLst/>
-          </a:prstGeom>
-          <a:solidFill>
-            <a:schemeClr val="accent1"/>
-          </a:solidFill>
-          <a:ln w="12700">
-            <a:solidFill>
-              <a:schemeClr val="accent1"/>
-            </a:solidFill>
-            <a:prstDash val="solid"/>
-          </a:ln>
-        </p:spPr>
-      </p:sp>
-      <p:pic>
-        <p:nvPicPr>
-          <p:cNvPr id="27" name="Image 0" descr="preencoded.png">    </p:cNvPr>
-          <p:cNvPicPr>
-            <a:picLocks noChangeAspect="1"/>
-          </p:cNvPicPr>
-          <p:nvPr/>
-        </p:nvPicPr>
-        <p:blipFill>
-          <a:blip r:embed="rId1"/>
-          <a:stretch>
-            <a:fillRect/>
-          </a:stretch>
-        </p:blipFill>
-        <p:spPr>
-          <a:xfrm>
-            <a:off x="897941" y="5104181"/>
-            <a:ext cx="261518" cy="261518"/>
-          </a:xfrm>
-          <a:prstGeom prst="rect">
-            <a:avLst/>
-          </a:prstGeom>
-        </p:spPr>
-      </p:pic>
-      <p:sp>
-        <p:nvSpPr>
-          <p:cNvPr id="28" name="Text 24"/>
+          <p:cNvPr id="25" name="Text 22"/>
           <p:cNvSpPr txBox="1"/>
           <p:nvPr/>
         </p:nvSpPr>
         <p:spPr>
           <a:xfrm>
-            <a:off x="1463040" y="4937760"/>
-            <a:ext cx="2468880" cy="365760"/>
+            <a:off x="822960" y="4709160"/>
+            <a:ext cx="10515600" cy="365760"/>
           </a:xfrm>
           <a:prstGeom prst="rect">
             <a:avLst/>
@@ -12000,346 +10985,89 @@
               <a:buNone/>
             </a:pPr>
             <a:r>
-              <a:rPr lang="en-US" sz="1500" b="1" dirty="0">
+              <a:rPr lang="en-US" sz="1600" b="1" dirty="0">
                 <a:solidFill>
                   <a:schemeClr val="bg1"/>
                 </a:solidFill>
               </a:rPr>
-              <a:t>Pesan yang jelas</a:t>
-            </a:r>
-            <a:endParaRPr lang="en-US" sz="1500" dirty="0"/>
-          </a:p>
-        </p:txBody>
-      </p:sp>
-      <p:sp>
-        <p:nvSpPr>
-          <p:cNvPr id="29" name="Text 25"/>
+              <a:t>Bentrok jika masing-masing mulai sebelum yang lain selesai</a:t>
+            </a:r>
+            <a:endParaRPr lang="en-US" sz="1600" dirty="0"/>
+          </a:p>
+        </p:txBody>
+      </p:sp>
+      <p:sp>
+        <p:nvSpPr>
+          <p:cNvPr id="26" name="Text 23"/>
           <p:cNvSpPr txBox="1"/>
           <p:nvPr/>
         </p:nvSpPr>
         <p:spPr>
           <a:xfrm>
-            <a:off x="1463040" y="5321808"/>
-            <a:ext cx="2468880" cy="640080"/>
-          </a:xfrm>
-          <a:prstGeom prst="rect">
-            <a:avLst/>
-          </a:prstGeom>
-          <a:noFill/>
-          <a:ln/>
-        </p:spPr>
-        <p:txBody>
-          <a:bodyPr wrap="square" lIns="0" tIns="0" rIns="0" bIns="0" rtlCol="0" anchor="t"/>
-          <a:lstStyle/>
-          <a:p>
-            <a:pPr indent="0" marL="0">
-              <a:buNone/>
-            </a:pPr>
-            <a:r>
-              <a:rPr lang="en-US" sz="1300" dirty="0">
+            <a:off x="822960" y="5166360"/>
+            <a:ext cx="6400800" cy="411480"/>
+          </a:xfrm>
+          <a:prstGeom prst="rect">
+            <a:avLst/>
+          </a:prstGeom>
+          <a:noFill/>
+          <a:ln/>
+        </p:spPr>
+        <p:txBody>
+          <a:bodyPr wrap="square" lIns="0" tIns="0" rIns="0" bIns="0" rtlCol="0" anchor="ctr"/>
+          <a:lstStyle/>
+          <a:p>
+            <a:pPr indent="0" marL="0">
+              <a:buNone/>
+            </a:pPr>
+            <a:r>
+              <a:rPr lang="en-US" sz="1800" b="1" dirty="0">
+                <a:solidFill>
+                  <a:schemeClr val="accent1"/>
+                </a:solidFill>
+                <a:latin typeface="Courier New" pitchFamily="34" charset="0"/>
+                <a:ea typeface="Courier New" pitchFamily="34" charset="-122"/>
+                <a:cs typeface="Courier New" pitchFamily="34" charset="-120"/>
+              </a:rPr>
+              <a:t>starts_at &lt; :end  AND  ends_at &gt; :start</a:t>
+            </a:r>
+            <a:endParaRPr lang="en-US" sz="1800" dirty="0"/>
+          </a:p>
+        </p:txBody>
+      </p:sp>
+      <p:sp>
+        <p:nvSpPr>
+          <p:cNvPr id="27" name="Text 24"/>
+          <p:cNvSpPr txBox="1"/>
+          <p:nvPr/>
+        </p:nvSpPr>
+        <p:spPr>
+          <a:xfrm>
+            <a:off x="822960" y="5623560"/>
+            <a:ext cx="10058400" cy="320040"/>
+          </a:xfrm>
+          <a:prstGeom prst="rect">
+            <a:avLst/>
+          </a:prstGeom>
+          <a:noFill/>
+          <a:ln/>
+        </p:spPr>
+        <p:txBody>
+          <a:bodyPr wrap="square" lIns="0" tIns="0" rIns="0" bIns="0" rtlCol="0" anchor="ctr"/>
+          <a:lstStyle/>
+          <a:p>
+            <a:pPr indent="0" marL="0">
+              <a:buNone/>
+            </a:pPr>
+            <a:r>
+              <a:rPr lang="en-US" sz="1400" dirty="0">
                 <a:solidFill>
                   <a:schemeClr val="bg2"/>
                 </a:solidFill>
               </a:rPr>
-              <a:t>Hari, jam, dan program yang menghalangi.</a:t>
-            </a:r>
-            <a:endParaRPr lang="en-US" sz="1300" dirty="0"/>
-          </a:p>
-        </p:txBody>
-      </p:sp>
-      <p:sp>
-        <p:nvSpPr>
-          <p:cNvPr id="30" name="panel"/>
-          <p:cNvSpPr/>
-          <p:nvPr/>
-        </p:nvSpPr>
-        <p:spPr>
-          <a:xfrm>
-            <a:off x="4297680" y="4754880"/>
-            <a:ext cx="3520440" cy="1325880"/>
-          </a:xfrm>
-          <a:prstGeom prst="roundRect">
-            <a:avLst>
-              <a:gd name="adj" fmla="val 5517"/>
-            </a:avLst>
-          </a:prstGeom>
-          <a:solidFill>
-            <a:schemeClr val="tx2"/>
-          </a:solidFill>
-          <a:ln w="12700">
-            <a:solidFill>
-              <a:schemeClr val="tx2"/>
-            </a:solidFill>
-            <a:prstDash val="solid"/>
-          </a:ln>
-        </p:spPr>
-      </p:sp>
-      <p:sp>
-        <p:nvSpPr>
-          <p:cNvPr id="31" name="Shape 27"/>
-          <p:cNvSpPr/>
-          <p:nvPr/>
-        </p:nvSpPr>
-        <p:spPr>
-          <a:xfrm>
-            <a:off x="4526280" y="4983480"/>
-            <a:ext cx="502920" cy="502920"/>
-          </a:xfrm>
-          <a:prstGeom prst="ellipse">
-            <a:avLst/>
-          </a:prstGeom>
-          <a:solidFill>
-            <a:schemeClr val="accent1"/>
-          </a:solidFill>
-          <a:ln w="12700">
-            <a:solidFill>
-              <a:schemeClr val="accent1"/>
-            </a:solidFill>
-            <a:prstDash val="solid"/>
-          </a:ln>
-        </p:spPr>
-      </p:sp>
-      <p:pic>
-        <p:nvPicPr>
-          <p:cNvPr id="32" name="Image 1" descr="preencoded.png">    </p:cNvPr>
-          <p:cNvPicPr>
-            <a:picLocks noChangeAspect="1"/>
-          </p:cNvPicPr>
-          <p:nvPr/>
-        </p:nvPicPr>
-        <p:blipFill>
-          <a:blip r:embed="rId2"/>
-          <a:stretch>
-            <a:fillRect/>
-          </a:stretch>
-        </p:blipFill>
-        <p:spPr>
-          <a:xfrm>
-            <a:off x="4646981" y="5104181"/>
-            <a:ext cx="261518" cy="261518"/>
-          </a:xfrm>
-          <a:prstGeom prst="rect">
-            <a:avLst/>
-          </a:prstGeom>
-        </p:spPr>
-      </p:pic>
-      <p:sp>
-        <p:nvSpPr>
-          <p:cNvPr id="33" name="Text 28"/>
-          <p:cNvSpPr txBox="1"/>
-          <p:nvPr/>
-        </p:nvSpPr>
-        <p:spPr>
-          <a:xfrm>
-            <a:off x="5212080" y="4937760"/>
-            <a:ext cx="2468880" cy="365760"/>
-          </a:xfrm>
-          <a:prstGeom prst="rect">
-            <a:avLst/>
-          </a:prstGeom>
-          <a:noFill/>
-          <a:ln/>
-        </p:spPr>
-        <p:txBody>
-          <a:bodyPr wrap="square" lIns="0" tIns="0" rIns="0" bIns="0" rtlCol="0" anchor="ctr"/>
-          <a:lstStyle/>
-          <a:p>
-            <a:pPr indent="0" marL="0">
-              <a:buNone/>
-            </a:pPr>
-            <a:r>
-              <a:rPr lang="en-US" sz="1500" b="1" dirty="0">
-                <a:solidFill>
-                  <a:schemeClr val="bg1"/>
-                </a:solidFill>
-              </a:rPr>
-              <a:t>Semua hari atau tidak</a:t>
-            </a:r>
-            <a:endParaRPr lang="en-US" sz="1500" dirty="0"/>
-          </a:p>
-        </p:txBody>
-      </p:sp>
-      <p:sp>
-        <p:nvSpPr>
-          <p:cNvPr id="34" name="Text 29"/>
-          <p:cNvSpPr txBox="1"/>
-          <p:nvPr/>
-        </p:nvSpPr>
-        <p:spPr>
-          <a:xfrm>
-            <a:off x="5212080" y="5321808"/>
-            <a:ext cx="2468880" cy="640080"/>
-          </a:xfrm>
-          <a:prstGeom prst="rect">
-            <a:avLst/>
-          </a:prstGeom>
-          <a:noFill/>
-          <a:ln/>
-        </p:spPr>
-        <p:txBody>
-          <a:bodyPr wrap="square" lIns="0" tIns="0" rIns="0" bIns="0" rtlCol="0" anchor="t"/>
-          <a:lstStyle/>
-          <a:p>
-            <a:pPr indent="0" marL="0">
-              <a:buNone/>
-            </a:pPr>
-            <a:r>
-              <a:rPr lang="en-US" sz="1300" dirty="0">
-                <a:solidFill>
-                  <a:schemeClr val="bg2"/>
-                </a:solidFill>
-              </a:rPr>
-              <a:t>Senin-Jumat dalam satu transaksi.</a:t>
-            </a:r>
-            <a:endParaRPr lang="en-US" sz="1300" dirty="0"/>
-          </a:p>
-        </p:txBody>
-      </p:sp>
-      <p:sp>
-        <p:nvSpPr>
-          <p:cNvPr id="35" name="panel"/>
-          <p:cNvSpPr/>
-          <p:nvPr/>
-        </p:nvSpPr>
-        <p:spPr>
-          <a:xfrm>
-            <a:off x="8046720" y="4754880"/>
-            <a:ext cx="3520440" cy="1325880"/>
-          </a:xfrm>
-          <a:prstGeom prst="roundRect">
-            <a:avLst>
-              <a:gd name="adj" fmla="val 5517"/>
-            </a:avLst>
-          </a:prstGeom>
-          <a:solidFill>
-            <a:schemeClr val="tx2"/>
-          </a:solidFill>
-          <a:ln w="12700">
-            <a:solidFill>
-              <a:schemeClr val="tx2"/>
-            </a:solidFill>
-            <a:prstDash val="solid"/>
-          </a:ln>
-        </p:spPr>
-      </p:sp>
-      <p:sp>
-        <p:nvSpPr>
-          <p:cNvPr id="36" name="Shape 31"/>
-          <p:cNvSpPr/>
-          <p:nvPr/>
-        </p:nvSpPr>
-        <p:spPr>
-          <a:xfrm>
-            <a:off x="8275320" y="4983480"/>
-            <a:ext cx="502920" cy="502920"/>
-          </a:xfrm>
-          <a:prstGeom prst="ellipse">
-            <a:avLst/>
-          </a:prstGeom>
-          <a:solidFill>
-            <a:schemeClr val="accent1"/>
-          </a:solidFill>
-          <a:ln w="12700">
-            <a:solidFill>
-              <a:schemeClr val="accent1"/>
-            </a:solidFill>
-            <a:prstDash val="solid"/>
-          </a:ln>
-        </p:spPr>
-      </p:sp>
-      <p:pic>
-        <p:nvPicPr>
-          <p:cNvPr id="37" name="Image 2" descr="preencoded.png">    </p:cNvPr>
-          <p:cNvPicPr>
-            <a:picLocks noChangeAspect="1"/>
-          </p:cNvPicPr>
-          <p:nvPr/>
-        </p:nvPicPr>
-        <p:blipFill>
-          <a:blip r:embed="rId3"/>
-          <a:stretch>
-            <a:fillRect/>
-          </a:stretch>
-        </p:blipFill>
-        <p:spPr>
-          <a:xfrm>
-            <a:off x="8396021" y="5104181"/>
-            <a:ext cx="261518" cy="261518"/>
-          </a:xfrm>
-          <a:prstGeom prst="rect">
-            <a:avLst/>
-          </a:prstGeom>
-        </p:spPr>
-      </p:pic>
-      <p:sp>
-        <p:nvSpPr>
-          <p:cNvPr id="38" name="Text 32"/>
-          <p:cNvSpPr txBox="1"/>
-          <p:nvPr/>
-        </p:nvSpPr>
-        <p:spPr>
-          <a:xfrm>
-            <a:off x="8961120" y="4937760"/>
-            <a:ext cx="2468880" cy="365760"/>
-          </a:xfrm>
-          <a:prstGeom prst="rect">
-            <a:avLst/>
-          </a:prstGeom>
-          <a:noFill/>
-          <a:ln/>
-        </p:spPr>
-        <p:txBody>
-          <a:bodyPr wrap="square" lIns="0" tIns="0" rIns="0" bIns="0" rtlCol="0" anchor="ctr"/>
-          <a:lstStyle/>
-          <a:p>
-            <a:pPr indent="0" marL="0">
-              <a:buNone/>
-            </a:pPr>
-            <a:r>
-              <a:rPr lang="en-US" sz="1500" b="1" dirty="0">
-                <a:solidFill>
-                  <a:schemeClr val="bg1"/>
-                </a:solidFill>
-              </a:rPr>
-              <a:t>Lewat tengah malam</a:t>
-            </a:r>
-            <a:endParaRPr lang="en-US" sz="1500" dirty="0"/>
-          </a:p>
-        </p:txBody>
-      </p:sp>
-      <p:sp>
-        <p:nvSpPr>
-          <p:cNvPr id="39" name="Text 33"/>
-          <p:cNvSpPr txBox="1"/>
-          <p:nvPr/>
-        </p:nvSpPr>
-        <p:spPr>
-          <a:xfrm>
-            <a:off x="8961120" y="5321808"/>
-            <a:ext cx="2468880" cy="640080"/>
-          </a:xfrm>
-          <a:prstGeom prst="rect">
-            <a:avLst/>
-          </a:prstGeom>
-          <a:noFill/>
-          <a:ln/>
-        </p:spPr>
-        <p:txBody>
-          <a:bodyPr wrap="square" lIns="0" tIns="0" rIns="0" bIns="0" rtlCol="0" anchor="t"/>
-          <a:lstStyle/>
-          <a:p>
-            <a:pPr indent="0" marL="0">
-              <a:buNone/>
-            </a:pPr>
-            <a:r>
-              <a:rPr lang="en-US" sz="1300" dirty="0">
-                <a:solidFill>
-                  <a:schemeClr val="bg2"/>
-                </a:solidFill>
-              </a:rPr>
-              <a:t>Dua slot: sampai 24:00, lalu dari 00:00.</a:t>
-            </a:r>
-            <a:endParaRPr lang="en-US" sz="1300" dirty="0"/>
+              <a:t>Bersentuhan (10:00 lalu 10:00) boleh.</a:t>
+            </a:r>
+            <a:endParaRPr lang="en-US" sz="1400" dirty="0"/>
           </a:p>
         </p:txBody>
       </p:sp>
@@ -12445,7 +11173,7 @@
                   <a:schemeClr val="bg1"/>
                 </a:solidFill>
               </a:rPr>
-              <a:t>Mengudara, berikutnya, dan jam kosong</a:t>
+              <a:t>Aturan bentrok saat menyimpan</a:t>
             </a:r>
             <a:endParaRPr lang="en-US" sz="3200" dirty="0"/>
           </a:p>
@@ -12459,7 +11187,7 @@
         </p:nvSpPr>
         <p:spPr>
           <a:xfrm>
-            <a:off x="548640" y="1691640"/>
+            <a:off x="2651760" y="1691640"/>
             <a:ext cx="731520" cy="228600"/>
           </a:xfrm>
           <a:prstGeom prst="rect">
@@ -12495,7 +11223,7 @@
         </p:nvSpPr>
         <p:spPr>
           <a:xfrm>
-            <a:off x="2948940" y="1691640"/>
+            <a:off x="4526280" y="1691640"/>
             <a:ext cx="731520" cy="228600"/>
           </a:xfrm>
           <a:prstGeom prst="rect">
@@ -12531,7 +11259,7 @@
         </p:nvSpPr>
         <p:spPr>
           <a:xfrm>
-            <a:off x="5715000" y="1691640"/>
+            <a:off x="6766560" y="1691640"/>
             <a:ext cx="731520" cy="228600"/>
           </a:xfrm>
           <a:prstGeom prst="rect">
@@ -12567,7 +11295,7 @@
         </p:nvSpPr>
         <p:spPr>
           <a:xfrm>
-            <a:off x="8481060" y="1691640"/>
+            <a:off x="9006840" y="1691640"/>
             <a:ext cx="731520" cy="228600"/>
           </a:xfrm>
           <a:prstGeom prst="rect">
@@ -12633,18 +11361,54 @@
       </p:sp>
       <p:sp>
         <p:nvSpPr>
-          <p:cNvPr id="9" name="Shape 6"/>
+          <p:cNvPr id="9" name="Text 6"/>
+          <p:cNvSpPr txBox="1"/>
+          <p:nvPr/>
+        </p:nvSpPr>
+        <p:spPr>
+          <a:xfrm>
+            <a:off x="548640" y="2011680"/>
+            <a:ext cx="2011680" cy="457200"/>
+          </a:xfrm>
+          <a:prstGeom prst="rect">
+            <a:avLst/>
+          </a:prstGeom>
+          <a:noFill/>
+          <a:ln/>
+        </p:spPr>
+        <p:txBody>
+          <a:bodyPr wrap="square" lIns="0" tIns="0" rIns="0" bIns="0" rtlCol="0" anchor="ctr"/>
+          <a:lstStyle/>
+          <a:p>
+            <a:pPr indent="0" marL="0">
+              <a:buNone/>
+            </a:pPr>
+            <a:r>
+              <a:rPr lang="en-US" sz="1400" dirty="0">
+                <a:solidFill>
+                  <a:schemeClr val="bg1"/>
+                </a:solidFill>
+              </a:rPr>
+              <a:t>Senin, Jakarta</a:t>
+            </a:r>
+            <a:endParaRPr lang="en-US" sz="1400" dirty="0"/>
+          </a:p>
+        </p:txBody>
+      </p:sp>
+      <p:sp>
+        <p:nvSpPr>
+          <p:cNvPr id="10" name="Shape 7"/>
           <p:cNvSpPr/>
           <p:nvPr/>
         </p:nvSpPr>
         <p:spPr>
           <a:xfrm>
-            <a:off x="548640" y="2011680"/>
-            <a:ext cx="11064240" cy="594360"/>
+            <a:off x="2651760" y="2011680"/>
+            <a:ext cx="8961120" cy="457200"/>
           </a:xfrm>
           <a:prstGeom prst="roundRect">
             <a:avLst>
-              <a:gd name="adj" fmla="val 9231"/>
+              <a:gd name="adj" fmla="val 12000"/>
             </a:avLst>
           </a:prstGeom>
           <a:solidFill>
@@ -12660,18 +11424,18 @@
       </p:sp>
       <p:sp>
         <p:nvSpPr>
-          <p:cNvPr id="10" name="Shape 7"/>
+          <p:cNvPr id="11" name="Shape 8"/>
           <p:cNvSpPr/>
           <p:nvPr/>
         </p:nvSpPr>
         <p:spPr>
           <a:xfrm>
-            <a:off x="3332988" y="2057400"/>
-            <a:ext cx="1807464" cy="502920"/>
+            <a:off x="4910328" y="2057400"/>
+            <a:ext cx="1456944" cy="365760"/>
           </a:xfrm>
           <a:prstGeom prst="roundRect">
             <a:avLst>
-              <a:gd name="adj" fmla="val 9091"/>
+              <a:gd name="adj" fmla="val 12500"/>
             </a:avLst>
           </a:prstGeom>
           <a:solidFill>
@@ -12687,14 +11451,14 @@
       </p:sp>
       <p:sp>
         <p:nvSpPr>
-          <p:cNvPr id="11" name="Text 8"/>
+          <p:cNvPr id="12" name="Text 9"/>
           <p:cNvSpPr txBox="1"/>
           <p:nvPr/>
         </p:nvSpPr>
         <p:spPr>
           <a:xfrm>
-            <a:off x="3369564" y="2011680"/>
-            <a:ext cx="1752600" cy="594360"/>
+            <a:off x="4946904" y="2011680"/>
+            <a:ext cx="1402080" cy="457200"/>
           </a:xfrm>
           <a:prstGeom prst="rect">
             <a:avLst/>
@@ -12715,7 +11479,7 @@
                   <a:schemeClr val="tx1"/>
                 </a:solidFill>
               </a:rPr>
-              <a:t>Pagi Banten</a:t>
+              <a:t>Pagi Jakarta</a:t>
             </a:r>
             <a:endParaRPr lang="en-US" sz="1000" dirty="0"/>
           </a:p>
@@ -12723,18 +11487,18 @@
       </p:sp>
       <p:sp>
         <p:nvSpPr>
-          <p:cNvPr id="12" name="Shape 9"/>
+          <p:cNvPr id="13" name="Shape 10"/>
           <p:cNvSpPr/>
           <p:nvPr/>
         </p:nvSpPr>
         <p:spPr>
           <a:xfrm>
-            <a:off x="7943088" y="2057400"/>
-            <a:ext cx="1346454" cy="502920"/>
+            <a:off x="6403848" y="2057400"/>
+            <a:ext cx="1083564" cy="365760"/>
           </a:xfrm>
           <a:prstGeom prst="roundRect">
             <a:avLst>
-              <a:gd name="adj" fmla="val 9091"/>
+              <a:gd name="adj" fmla="val 12500"/>
             </a:avLst>
           </a:prstGeom>
           <a:solidFill>
@@ -12750,14 +11514,14 @@
       </p:sp>
       <p:sp>
         <p:nvSpPr>
-          <p:cNvPr id="13" name="Text 10"/>
+          <p:cNvPr id="14" name="Text 11"/>
           <p:cNvSpPr txBox="1"/>
           <p:nvPr/>
         </p:nvSpPr>
         <p:spPr>
           <a:xfrm>
-            <a:off x="7979664" y="2011680"/>
-            <a:ext cx="1291590" cy="594360"/>
+            <a:off x="6440424" y="2011680"/>
+            <a:ext cx="1028700" cy="457200"/>
           </a:xfrm>
           <a:prstGeom prst="rect">
             <a:avLst/>
@@ -12778,7 +11542,7 @@
                   <a:schemeClr val="tx1"/>
                 </a:solidFill>
               </a:rPr>
-              <a:t>Jalan Pulang</a:t>
+              <a:t>Jam Makan Siang</a:t>
             </a:r>
             <a:endParaRPr lang="en-US" sz="1000" dirty="0"/>
           </a:p>
@@ -12786,22 +11550,62 @@
       </p:sp>
       <p:sp>
         <p:nvSpPr>
-          <p:cNvPr id="14" name="Shape 11"/>
+          <p:cNvPr id="15" name="Text 12"/>
+          <p:cNvSpPr txBox="1"/>
+          <p:nvPr/>
+        </p:nvSpPr>
+        <p:spPr>
+          <a:xfrm>
+            <a:off x="548640" y="2788920"/>
+            <a:ext cx="2011680" cy="457200"/>
+          </a:xfrm>
+          <a:prstGeom prst="rect">
+            <a:avLst/>
+          </a:prstGeom>
+          <a:noFill/>
+          <a:ln/>
+        </p:spPr>
+        <p:txBody>
+          <a:bodyPr wrap="square" lIns="0" tIns="0" rIns="0" bIns="0" rtlCol="0" anchor="ctr"/>
+          <a:lstStyle/>
+          <a:p>
+            <a:pPr indent="0" marL="0">
+              <a:buNone/>
+            </a:pPr>
+            <a:r>
+              <a:rPr lang="en-US" sz="1400" dirty="0">
+                <a:solidFill>
+                  <a:schemeClr val="bg1"/>
+                </a:solidFill>
+              </a:rPr>
+              <a:t>Baru 09:00-11:00</a:t>
+            </a:r>
+            <a:endParaRPr lang="en-US" sz="1400" dirty="0"/>
+          </a:p>
+        </p:txBody>
+      </p:sp>
+      <p:sp>
+        <p:nvSpPr>
+          <p:cNvPr id="16" name="Shape 13"/>
           <p:cNvSpPr/>
           <p:nvPr/>
         </p:nvSpPr>
         <p:spPr>
           <a:xfrm>
-            <a:off x="4467225" y="1901952"/>
-            <a:ext cx="914" cy="813816"/>
-          </a:xfrm>
-          <a:prstGeom prst="line">
-            <a:avLst/>
-          </a:prstGeom>
-          <a:noFill/>
-          <a:ln w="31750">
+            <a:off x="2651760" y="2788920"/>
+            <a:ext cx="8961120" cy="457200"/>
+          </a:xfrm>
+          <a:prstGeom prst="roundRect">
+            <a:avLst>
+              <a:gd name="adj" fmla="val 12000"/>
+            </a:avLst>
+          </a:prstGeom>
+          <a:solidFill>
+            <a:schemeClr val="accent4"/>
+          </a:solidFill>
+          <a:ln w="12700">
             <a:solidFill>
-              <a:schemeClr val="accent1"/>
+              <a:schemeClr val="accent4"/>
             </a:solidFill>
             <a:prstDash val="solid"/>
           </a:ln>
@@ -12809,53 +11613,19 @@
       </p:sp>
       <p:sp>
         <p:nvSpPr>
-          <p:cNvPr id="15" name="Text 12"/>
-          <p:cNvSpPr txBox="1"/>
-          <p:nvPr/>
-        </p:nvSpPr>
-        <p:spPr>
-          <a:xfrm>
-            <a:off x="548640" y="2743200"/>
-            <a:ext cx="11064240" cy="320040"/>
-          </a:xfrm>
-          <a:prstGeom prst="rect">
-            <a:avLst/>
-          </a:prstGeom>
-          <a:noFill/>
-          <a:ln/>
-        </p:spPr>
-        <p:txBody>
-          <a:bodyPr wrap="square" lIns="0" tIns="0" rIns="0" bIns="0" rtlCol="0" anchor="ctr"/>
-          <a:lstStyle/>
-          <a:p>
-            <a:pPr indent="0" marL="0">
-              <a:buNone/>
-            </a:pPr>
-            <a:r>
-              <a:rPr lang="en-US" sz="1300" dirty="0">
-                <a:solidFill>
-                  <a:schemeClr val="bg2"/>
-                </a:solidFill>
-              </a:rPr>
-              <a:t>XChannel Banten, Senin 08:30. Garis merah = sekarang; abu-abu = musik otomatis.</a:t>
-            </a:r>
-            <a:endParaRPr lang="en-US" sz="1300" dirty="0"/>
-          </a:p>
-        </p:txBody>
-      </p:sp>
-      <p:sp>
-        <p:nvSpPr>
-          <p:cNvPr id="16" name="Shape 13"/>
+          <p:cNvPr id="17" name="Shape 14"/>
           <p:cNvSpPr/>
           <p:nvPr/>
         </p:nvSpPr>
         <p:spPr>
           <a:xfrm>
-            <a:off x="548640" y="3657600"/>
-            <a:ext cx="640080" cy="640080"/>
-          </a:xfrm>
-          <a:prstGeom prst="ellipse">
-            <a:avLst/>
+            <a:off x="6030468" y="2834640"/>
+            <a:ext cx="710184" cy="365760"/>
+          </a:xfrm>
+          <a:prstGeom prst="roundRect">
+            <a:avLst>
+              <a:gd name="adj" fmla="val 12500"/>
+            </a:avLst>
           </a:prstGeom>
           <a:solidFill>
             <a:schemeClr val="accent1"/>
@@ -12868,40 +11638,16 @@
           </a:ln>
         </p:spPr>
       </p:sp>
-      <p:pic>
-        <p:nvPicPr>
-          <p:cNvPr id="17" name="Image 0" descr="preencoded.png">    </p:cNvPr>
-          <p:cNvPicPr>
-            <a:picLocks noChangeAspect="1"/>
-          </p:cNvPicPr>
-          <p:nvPr/>
-        </p:nvPicPr>
-        <p:blipFill>
-          <a:blip r:embed="rId1"/>
-          <a:stretch>
-            <a:fillRect/>
-          </a:stretch>
-        </p:blipFill>
-        <p:spPr>
-          <a:xfrm>
-            <a:off x="702259" y="3811219"/>
-            <a:ext cx="332842" cy="332842"/>
-          </a:xfrm>
-          <a:prstGeom prst="rect">
-            <a:avLst/>
-          </a:prstGeom>
-        </p:spPr>
-      </p:pic>
-      <p:sp>
-        <p:nvSpPr>
-          <p:cNvPr id="18" name="Text 14"/>
+      <p:sp>
+        <p:nvSpPr>
+          <p:cNvPr id="18" name="Text 15"/>
           <p:cNvSpPr txBox="1"/>
           <p:nvPr/>
         </p:nvSpPr>
         <p:spPr>
           <a:xfrm>
-            <a:off x="548640" y="4526280"/>
-            <a:ext cx="3474720" cy="411480"/>
+            <a:off x="6067044" y="2788920"/>
+            <a:ext cx="655320" cy="457200"/>
           </a:xfrm>
           <a:prstGeom prst="rect">
             <a:avLst/>
@@ -12917,63 +11663,252 @@
               <a:buNone/>
             </a:pPr>
             <a:r>
-              <a:rPr lang="en-US" sz="1800" b="1" dirty="0">
+              <a:rPr lang="en-US" sz="1000" dirty="0">
                 <a:solidFill>
                   <a:schemeClr val="bg1"/>
                 </a:solidFill>
               </a:rPr>
-              <a:t>Mengudara</a:t>
-            </a:r>
-            <a:endParaRPr lang="en-US" sz="1800" dirty="0"/>
-          </a:p>
-        </p:txBody>
-      </p:sp>
-      <p:sp>
-        <p:nvSpPr>
-          <p:cNvPr id="19" name="Text 15"/>
+              <a:t>Ngobrol</a:t>
+            </a:r>
+            <a:endParaRPr lang="en-US" sz="1000" dirty="0"/>
+          </a:p>
+        </p:txBody>
+      </p:sp>
+      <p:sp>
+        <p:nvSpPr>
+          <p:cNvPr id="19" name="Text 16"/>
           <p:cNvSpPr txBox="1"/>
           <p:nvPr/>
         </p:nvSpPr>
         <p:spPr>
           <a:xfrm>
-            <a:off x="548640" y="4983480"/>
-            <a:ext cx="3474720" cy="1097280"/>
-          </a:xfrm>
-          <a:prstGeom prst="rect">
-            <a:avLst/>
-          </a:prstGeom>
-          <a:noFill/>
-          <a:ln/>
-        </p:spPr>
-        <p:txBody>
-          <a:bodyPr wrap="square" lIns="0" tIns="0" rIns="0" bIns="0" rtlCol="0" anchor="t"/>
-          <a:lstStyle/>
-          <a:p>
-            <a:pPr indent="0" marL="0">
-              <a:buNone/>
-            </a:pPr>
-            <a:r>
-              <a:rPr lang="en-US" sz="1500" dirty="0">
-                <a:solidFill>
-                  <a:schemeClr val="bg2"/>
-                </a:solidFill>
-              </a:rPr>
-              <a:t>Slot hari ini dengan mulai &lt;= sekarang &lt; selesai. Satu query ber-index.</a:t>
-            </a:r>
-            <a:endParaRPr lang="en-US" sz="1500" dirty="0"/>
-          </a:p>
-        </p:txBody>
-      </p:sp>
-      <p:sp>
-        <p:nvSpPr>
-          <p:cNvPr id="20" name="Shape 16"/>
+            <a:off x="2651760" y="3319272"/>
+            <a:ext cx="8961120" cy="274320"/>
+          </a:xfrm>
+          <a:prstGeom prst="rect">
+            <a:avLst/>
+          </a:prstGeom>
+          <a:noFill/>
+          <a:ln/>
+        </p:spPr>
+        <p:txBody>
+          <a:bodyPr wrap="square" lIns="0" tIns="0" rIns="0" bIns="0" rtlCol="0" anchor="ctr"/>
+          <a:lstStyle/>
+          <a:p>
+            <a:pPr indent="0" marL="0">
+              <a:buNone/>
+            </a:pPr>
+            <a:r>
+              <a:rPr lang="en-US" sz="1300" dirty="0">
+                <a:solidFill>
+                  <a:schemeClr val="accent1"/>
+                </a:solidFill>
+              </a:rPr>
+              <a:t>Ditolak: bentrok dengan "Pagi Jakarta" (06:00 - 10:00)</a:t>
+            </a:r>
+            <a:endParaRPr lang="en-US" sz="1300" dirty="0"/>
+          </a:p>
+        </p:txBody>
+      </p:sp>
+      <p:sp>
+        <p:nvSpPr>
+          <p:cNvPr id="20" name="Text 17"/>
+          <p:cNvSpPr txBox="1"/>
+          <p:nvPr/>
+        </p:nvSpPr>
+        <p:spPr>
+          <a:xfrm>
+            <a:off x="548640" y="3749040"/>
+            <a:ext cx="2011680" cy="457200"/>
+          </a:xfrm>
+          <a:prstGeom prst="rect">
+            <a:avLst/>
+          </a:prstGeom>
+          <a:noFill/>
+          <a:ln/>
+        </p:spPr>
+        <p:txBody>
+          <a:bodyPr wrap="square" lIns="0" tIns="0" rIns="0" bIns="0" rtlCol="0" anchor="ctr"/>
+          <a:lstStyle/>
+          <a:p>
+            <a:pPr indent="0" marL="0">
+              <a:buNone/>
+            </a:pPr>
+            <a:r>
+              <a:rPr lang="en-US" sz="1400" dirty="0">
+                <a:solidFill>
+                  <a:schemeClr val="bg1"/>
+                </a:solidFill>
+              </a:rPr>
+              <a:t>Baru 13:00-14:00</a:t>
+            </a:r>
+            <a:endParaRPr lang="en-US" sz="1400" dirty="0"/>
+          </a:p>
+        </p:txBody>
+      </p:sp>
+      <p:sp>
+        <p:nvSpPr>
+          <p:cNvPr id="21" name="Shape 18"/>
           <p:cNvSpPr/>
           <p:nvPr/>
         </p:nvSpPr>
         <p:spPr>
           <a:xfrm>
-            <a:off x="4297680" y="3657600"/>
-            <a:ext cx="640080" cy="640080"/>
+            <a:off x="2651760" y="3749040"/>
+            <a:ext cx="8961120" cy="457200"/>
+          </a:xfrm>
+          <a:prstGeom prst="roundRect">
+            <a:avLst>
+              <a:gd name="adj" fmla="val 12000"/>
+            </a:avLst>
+          </a:prstGeom>
+          <a:solidFill>
+            <a:schemeClr val="accent4"/>
+          </a:solidFill>
+          <a:ln w="12700">
+            <a:solidFill>
+              <a:schemeClr val="accent4"/>
+            </a:solidFill>
+            <a:prstDash val="solid"/>
+          </a:ln>
+        </p:spPr>
+      </p:sp>
+      <p:sp>
+        <p:nvSpPr>
+          <p:cNvPr id="22" name="Shape 19"/>
+          <p:cNvSpPr/>
+          <p:nvPr/>
+        </p:nvSpPr>
+        <p:spPr>
+          <a:xfrm>
+            <a:off x="7523988" y="3794760"/>
+            <a:ext cx="336804" cy="365760"/>
+          </a:xfrm>
+          <a:prstGeom prst="roundRect">
+            <a:avLst>
+              <a:gd name="adj" fmla="val 13575"/>
+            </a:avLst>
+          </a:prstGeom>
+          <a:solidFill>
+            <a:schemeClr val="accent3"/>
+          </a:solidFill>
+          <a:ln w="12700">
+            <a:solidFill>
+              <a:schemeClr val="accent3"/>
+            </a:solidFill>
+            <a:prstDash val="solid"/>
+          </a:ln>
+        </p:spPr>
+      </p:sp>
+      <p:sp>
+        <p:nvSpPr>
+          <p:cNvPr id="23" name="Text 20"/>
+          <p:cNvSpPr txBox="1"/>
+          <p:nvPr/>
+        </p:nvSpPr>
+        <p:spPr>
+          <a:xfrm>
+            <a:off x="7560564" y="3749040"/>
+            <a:ext cx="281940" cy="457200"/>
+          </a:xfrm>
+          <a:prstGeom prst="rect">
+            <a:avLst/>
+          </a:prstGeom>
+          <a:noFill/>
+          <a:ln/>
+        </p:spPr>
+        <p:txBody>
+          <a:bodyPr wrap="square" lIns="0" tIns="0" rIns="0" bIns="0" rtlCol="0" anchor="ctr"/>
+          <a:lstStyle/>
+          <a:p>
+            <a:pPr indent="0" marL="0">
+              <a:buNone/>
+            </a:pPr>
+            <a:r>
+              <a:rPr lang="en-US" sz="1000" dirty="0">
+                <a:solidFill>
+                  <a:schemeClr val="bg1"/>
+                </a:solidFill>
+              </a:rPr>
+              <a:t>OK</a:t>
+            </a:r>
+            <a:endParaRPr lang="en-US" sz="1000" dirty="0"/>
+          </a:p>
+        </p:txBody>
+      </p:sp>
+      <p:sp>
+        <p:nvSpPr>
+          <p:cNvPr id="24" name="Text 21"/>
+          <p:cNvSpPr txBox="1"/>
+          <p:nvPr/>
+        </p:nvSpPr>
+        <p:spPr>
+          <a:xfrm>
+            <a:off x="2651760" y="4279392"/>
+            <a:ext cx="8961120" cy="274320"/>
+          </a:xfrm>
+          <a:prstGeom prst="rect">
+            <a:avLst/>
+          </a:prstGeom>
+          <a:noFill/>
+          <a:ln/>
+        </p:spPr>
+        <p:txBody>
+          <a:bodyPr wrap="square" lIns="0" tIns="0" rIns="0" bIns="0" rtlCol="0" anchor="ctr"/>
+          <a:lstStyle/>
+          <a:p>
+            <a:pPr indent="0" marL="0">
+              <a:buNone/>
+            </a:pPr>
+            <a:r>
+              <a:rPr lang="en-US" sz="1300" dirty="0">
+                <a:solidFill>
+                  <a:schemeClr val="accent3"/>
+                </a:solidFill>
+              </a:rPr>
+              <a:t>Boleh: mulai tepat saat program sebelumnya selesai</a:t>
+            </a:r>
+            <a:endParaRPr lang="en-US" sz="1300" dirty="0"/>
+          </a:p>
+        </p:txBody>
+      </p:sp>
+      <p:sp>
+        <p:nvSpPr>
+          <p:cNvPr id="25" name="panel"/>
+          <p:cNvSpPr/>
+          <p:nvPr/>
+        </p:nvSpPr>
+        <p:spPr>
+          <a:xfrm>
+            <a:off x="548640" y="4754880"/>
+            <a:ext cx="3520440" cy="1325880"/>
+          </a:xfrm>
+          <a:prstGeom prst="roundRect">
+            <a:avLst>
+              <a:gd name="adj" fmla="val 5517"/>
+            </a:avLst>
+          </a:prstGeom>
+          <a:solidFill>
+            <a:schemeClr val="tx2"/>
+          </a:solidFill>
+          <a:ln w="12700">
+            <a:solidFill>
+              <a:schemeClr val="tx2"/>
+            </a:solidFill>
+            <a:prstDash val="solid"/>
+          </a:ln>
+        </p:spPr>
+      </p:sp>
+      <p:sp>
+        <p:nvSpPr>
+          <p:cNvPr id="26" name="Shape 23"/>
+          <p:cNvSpPr/>
+          <p:nvPr/>
+        </p:nvSpPr>
+        <p:spPr>
+          <a:xfrm>
+            <a:off x="777240" y="4983480"/>
+            <a:ext cx="502920" cy="502920"/>
           </a:xfrm>
           <a:prstGeom prst="ellipse">
             <a:avLst/>
@@ -12991,22 +11926,22 @@
       </p:sp>
       <p:pic>
         <p:nvPicPr>
-          <p:cNvPr id="21" name="Image 1" descr="preencoded.png">    </p:cNvPr>
+          <p:cNvPr id="27" name="Image 0" descr="preencoded.png">    </p:cNvPr>
           <p:cNvPicPr>
             <a:picLocks noChangeAspect="1"/>
           </p:cNvPicPr>
           <p:nvPr/>
         </p:nvPicPr>
         <p:blipFill>
-          <a:blip r:embed="rId2"/>
+          <a:blip r:embed="rId1"/>
           <a:stretch>
             <a:fillRect/>
           </a:stretch>
         </p:blipFill>
         <p:spPr>
           <a:xfrm>
-            <a:off x="4451299" y="3811219"/>
-            <a:ext cx="332842" cy="332842"/>
+            <a:off x="897941" y="5104181"/>
+            <a:ext cx="261518" cy="261518"/>
           </a:xfrm>
           <a:prstGeom prst="rect">
             <a:avLst/>
@@ -13015,14 +11950,14 @@
       </p:pic>
       <p:sp>
         <p:nvSpPr>
-          <p:cNvPr id="22" name="Text 17"/>
+          <p:cNvPr id="28" name="Text 24"/>
           <p:cNvSpPr txBox="1"/>
           <p:nvPr/>
         </p:nvSpPr>
         <p:spPr>
           <a:xfrm>
-            <a:off x="4297680" y="4526280"/>
-            <a:ext cx="3474720" cy="411480"/>
+            <a:off x="1463040" y="4937760"/>
+            <a:ext cx="2468880" cy="365760"/>
           </a:xfrm>
           <a:prstGeom prst="rect">
             <a:avLst/>
@@ -13038,27 +11973,27 @@
               <a:buNone/>
             </a:pPr>
             <a:r>
-              <a:rPr lang="en-US" sz="1800" b="1" dirty="0">
+              <a:rPr lang="en-US" sz="1500" b="1" dirty="0">
                 <a:solidFill>
                   <a:schemeClr val="bg1"/>
                 </a:solidFill>
               </a:rPr>
-              <a:t>Berikutnya</a:t>
-            </a:r>
-            <a:endParaRPr lang="en-US" sz="1800" dirty="0"/>
-          </a:p>
-        </p:txBody>
-      </p:sp>
-      <p:sp>
-        <p:nvSpPr>
-          <p:cNvPr id="23" name="Text 18"/>
+              <a:t>Pesan yang jelas</a:t>
+            </a:r>
+            <a:endParaRPr lang="en-US" sz="1500" dirty="0"/>
+          </a:p>
+        </p:txBody>
+      </p:sp>
+      <p:sp>
+        <p:nvSpPr>
+          <p:cNvPr id="29" name="Text 25"/>
           <p:cNvSpPr txBox="1"/>
           <p:nvPr/>
         </p:nvSpPr>
         <p:spPr>
           <a:xfrm>
-            <a:off x="4297680" y="4983480"/>
-            <a:ext cx="3474720" cy="1097280"/>
+            <a:off x="1463040" y="5321808"/>
+            <a:ext cx="2468880" cy="640080"/>
           </a:xfrm>
           <a:prstGeom prst="rect">
             <a:avLst/>
@@ -13074,27 +12009,54 @@
               <a:buNone/>
             </a:pPr>
             <a:r>
-              <a:rPr lang="en-US" sz="1500" dirty="0">
+              <a:rPr lang="en-US" sz="1300" dirty="0">
                 <a:solidFill>
                   <a:schemeClr val="bg2"/>
                 </a:solidFill>
               </a:rPr>
-              <a:t>Slot pertama setelah sekarang, lanjut ke hari berikutnya sampai seminggu.</a:t>
-            </a:r>
-            <a:endParaRPr lang="en-US" sz="1500" dirty="0"/>
-          </a:p>
-        </p:txBody>
-      </p:sp>
-      <p:sp>
-        <p:nvSpPr>
-          <p:cNvPr id="24" name="Shape 19"/>
+              <a:t>Hari, jam, dan program yang menghalangi.</a:t>
+            </a:r>
+            <a:endParaRPr lang="en-US" sz="1300" dirty="0"/>
+          </a:p>
+        </p:txBody>
+      </p:sp>
+      <p:sp>
+        <p:nvSpPr>
+          <p:cNvPr id="30" name="panel"/>
           <p:cNvSpPr/>
           <p:nvPr/>
         </p:nvSpPr>
         <p:spPr>
           <a:xfrm>
-            <a:off x="8046720" y="3657600"/>
-            <a:ext cx="640080" cy="640080"/>
+            <a:off x="4297680" y="4754880"/>
+            <a:ext cx="3520440" cy="1325880"/>
+          </a:xfrm>
+          <a:prstGeom prst="roundRect">
+            <a:avLst>
+              <a:gd name="adj" fmla="val 5517"/>
+            </a:avLst>
+          </a:prstGeom>
+          <a:solidFill>
+            <a:schemeClr val="tx2"/>
+          </a:solidFill>
+          <a:ln w="12700">
+            <a:solidFill>
+              <a:schemeClr val="tx2"/>
+            </a:solidFill>
+            <a:prstDash val="solid"/>
+          </a:ln>
+        </p:spPr>
+      </p:sp>
+      <p:sp>
+        <p:nvSpPr>
+          <p:cNvPr id="31" name="Shape 27"/>
+          <p:cNvSpPr/>
+          <p:nvPr/>
+        </p:nvSpPr>
+        <p:spPr>
+          <a:xfrm>
+            <a:off x="4526280" y="4983480"/>
+            <a:ext cx="502920" cy="502920"/>
           </a:xfrm>
           <a:prstGeom prst="ellipse">
             <a:avLst/>
@@ -13112,7 +12074,155 @@
       </p:sp>
       <p:pic>
         <p:nvPicPr>
-          <p:cNvPr id="25" name="Image 2" descr="preencoded.png">    </p:cNvPr>
+          <p:cNvPr id="32" name="Image 1" descr="preencoded.png">    </p:cNvPr>
+          <p:cNvPicPr>
+            <a:picLocks noChangeAspect="1"/>
+          </p:cNvPicPr>
+          <p:nvPr/>
+        </p:nvPicPr>
+        <p:blipFill>
+          <a:blip r:embed="rId2"/>
+          <a:stretch>
+            <a:fillRect/>
+          </a:stretch>
+        </p:blipFill>
+        <p:spPr>
+          <a:xfrm>
+            <a:off x="4646981" y="5104181"/>
+            <a:ext cx="261518" cy="261518"/>
+          </a:xfrm>
+          <a:prstGeom prst="rect">
+            <a:avLst/>
+          </a:prstGeom>
+        </p:spPr>
+      </p:pic>
+      <p:sp>
+        <p:nvSpPr>
+          <p:cNvPr id="33" name="Text 28"/>
+          <p:cNvSpPr txBox="1"/>
+          <p:nvPr/>
+        </p:nvSpPr>
+        <p:spPr>
+          <a:xfrm>
+            <a:off x="5212080" y="4937760"/>
+            <a:ext cx="2468880" cy="365760"/>
+          </a:xfrm>
+          <a:prstGeom prst="rect">
+            <a:avLst/>
+          </a:prstGeom>
+          <a:noFill/>
+          <a:ln/>
+        </p:spPr>
+        <p:txBody>
+          <a:bodyPr wrap="square" lIns="0" tIns="0" rIns="0" bIns="0" rtlCol="0" anchor="ctr"/>
+          <a:lstStyle/>
+          <a:p>
+            <a:pPr indent="0" marL="0">
+              <a:buNone/>
+            </a:pPr>
+            <a:r>
+              <a:rPr lang="en-US" sz="1500" b="1" dirty="0">
+                <a:solidFill>
+                  <a:schemeClr val="bg1"/>
+                </a:solidFill>
+              </a:rPr>
+              <a:t>Semua hari atau tidak</a:t>
+            </a:r>
+            <a:endParaRPr lang="en-US" sz="1500" dirty="0"/>
+          </a:p>
+        </p:txBody>
+      </p:sp>
+      <p:sp>
+        <p:nvSpPr>
+          <p:cNvPr id="34" name="Text 29"/>
+          <p:cNvSpPr txBox="1"/>
+          <p:nvPr/>
+        </p:nvSpPr>
+        <p:spPr>
+          <a:xfrm>
+            <a:off x="5212080" y="5321808"/>
+            <a:ext cx="2468880" cy="640080"/>
+          </a:xfrm>
+          <a:prstGeom prst="rect">
+            <a:avLst/>
+          </a:prstGeom>
+          <a:noFill/>
+          <a:ln/>
+        </p:spPr>
+        <p:txBody>
+          <a:bodyPr wrap="square" lIns="0" tIns="0" rIns="0" bIns="0" rtlCol="0" anchor="t"/>
+          <a:lstStyle/>
+          <a:p>
+            <a:pPr indent="0" marL="0">
+              <a:buNone/>
+            </a:pPr>
+            <a:r>
+              <a:rPr lang="en-US" sz="1300" dirty="0">
+                <a:solidFill>
+                  <a:schemeClr val="bg2"/>
+                </a:solidFill>
+              </a:rPr>
+              <a:t>Senin-Jumat dalam satu transaksi.</a:t>
+            </a:r>
+            <a:endParaRPr lang="en-US" sz="1300" dirty="0"/>
+          </a:p>
+        </p:txBody>
+      </p:sp>
+      <p:sp>
+        <p:nvSpPr>
+          <p:cNvPr id="35" name="panel"/>
+          <p:cNvSpPr/>
+          <p:nvPr/>
+        </p:nvSpPr>
+        <p:spPr>
+          <a:xfrm>
+            <a:off x="8046720" y="4754880"/>
+            <a:ext cx="3520440" cy="1325880"/>
+          </a:xfrm>
+          <a:prstGeom prst="roundRect">
+            <a:avLst>
+              <a:gd name="adj" fmla="val 5517"/>
+            </a:avLst>
+          </a:prstGeom>
+          <a:solidFill>
+            <a:schemeClr val="tx2"/>
+          </a:solidFill>
+          <a:ln w="12700">
+            <a:solidFill>
+              <a:schemeClr val="tx2"/>
+            </a:solidFill>
+            <a:prstDash val="solid"/>
+          </a:ln>
+        </p:spPr>
+      </p:sp>
+      <p:sp>
+        <p:nvSpPr>
+          <p:cNvPr id="36" name="Shape 31"/>
+          <p:cNvSpPr/>
+          <p:nvPr/>
+        </p:nvSpPr>
+        <p:spPr>
+          <a:xfrm>
+            <a:off x="8275320" y="4983480"/>
+            <a:ext cx="502920" cy="502920"/>
+          </a:xfrm>
+          <a:prstGeom prst="ellipse">
+            <a:avLst/>
+          </a:prstGeom>
+          <a:solidFill>
+            <a:schemeClr val="accent1"/>
+          </a:solidFill>
+          <a:ln w="12700">
+            <a:solidFill>
+              <a:schemeClr val="accent1"/>
+            </a:solidFill>
+            <a:prstDash val="solid"/>
+          </a:ln>
+        </p:spPr>
+      </p:sp>
+      <p:pic>
+        <p:nvPicPr>
+          <p:cNvPr id="37" name="Image 2" descr="preencoded.png">    </p:cNvPr>
           <p:cNvPicPr>
             <a:picLocks noChangeAspect="1"/>
           </p:cNvPicPr>
@@ -13126,8 +12236,8 @@
         </p:blipFill>
         <p:spPr>
           <a:xfrm>
-            <a:off x="8200339" y="3811219"/>
-            <a:ext cx="332842" cy="332842"/>
+            <a:off x="8396021" y="5104181"/>
+            <a:ext cx="261518" cy="261518"/>
           </a:xfrm>
           <a:prstGeom prst="rect">
             <a:avLst/>
@@ -13136,14 +12246,14 @@
       </p:pic>
       <p:sp>
         <p:nvSpPr>
-          <p:cNvPr id="26" name="Text 20"/>
+          <p:cNvPr id="38" name="Text 32"/>
           <p:cNvSpPr txBox="1"/>
           <p:nvPr/>
         </p:nvSpPr>
         <p:spPr>
           <a:xfrm>
-            <a:off x="8046720" y="4526280"/>
-            <a:ext cx="3474720" cy="411480"/>
+            <a:off x="8961120" y="4937760"/>
+            <a:ext cx="2468880" cy="365760"/>
           </a:xfrm>
           <a:prstGeom prst="rect">
             <a:avLst/>
@@ -13159,27 +12269,27 @@
               <a:buNone/>
             </a:pPr>
             <a:r>
-              <a:rPr lang="en-US" sz="1800" b="1" dirty="0">
+              <a:rPr lang="en-US" sz="1500" b="1" dirty="0">
                 <a:solidFill>
                   <a:schemeClr val="bg1"/>
                 </a:solidFill>
               </a:rPr>
-              <a:t>Jam kosong</a:t>
-            </a:r>
-            <a:endParaRPr lang="en-US" sz="1800" dirty="0"/>
-          </a:p>
-        </p:txBody>
-      </p:sp>
-      <p:sp>
-        <p:nvSpPr>
-          <p:cNvPr id="27" name="Text 21"/>
+              <a:t>Lewat tengah malam</a:t>
+            </a:r>
+            <a:endParaRPr lang="en-US" sz="1500" dirty="0"/>
+          </a:p>
+        </p:txBody>
+      </p:sp>
+      <p:sp>
+        <p:nvSpPr>
+          <p:cNvPr id="39" name="Text 33"/>
           <p:cNvSpPr txBox="1"/>
           <p:nvPr/>
         </p:nvSpPr>
         <p:spPr>
           <a:xfrm>
-            <a:off x="8046720" y="4983480"/>
-            <a:ext cx="3474720" cy="1097280"/>
+            <a:off x="8961120" y="5321808"/>
+            <a:ext cx="2468880" cy="640080"/>
           </a:xfrm>
           <a:prstGeom prst="rect">
             <a:avLst/>
@@ -13195,14 +12305,14 @@
               <a:buNone/>
             </a:pPr>
             <a:r>
-              <a:rPr lang="en-US" sz="1500" dirty="0">
+              <a:rPr lang="en-US" sz="1300" dirty="0">
                 <a:solidFill>
                   <a:schemeClr val="bg2"/>
                 </a:solidFill>
               </a:rPr>
-              <a:t>Dihitung dari jadwal, tidak disimpan. Jam siaran per stasiun dari 168 jam.</a:t>
-            </a:r>
-            <a:endParaRPr lang="en-US" sz="1500" dirty="0"/>
+              <a:t>Dua slot: sampai 24:00, lalu dari 00:00.</a:t>
+            </a:r>
+            <a:endParaRPr lang="en-US" sz="1300" dirty="0"/>
           </a:p>
         </p:txBody>
       </p:sp>

--- a/docs/XChannel-presentasi.pptx
+++ b/docs/XChannel-presentasi.pptx
@@ -19,10 +19,9 @@
     <p:sldId id="267" r:id="rId13"/>
     <p:sldId id="268" r:id="rId14"/>
     <p:sldId id="269" r:id="rId15"/>
-    <p:sldId id="270" r:id="rId16"/>
   </p:sldIdLst>
   <p:notesMasterIdLst>
-    <p:notesMasterId r:id="rId17"/>
+    <p:notesMasterId r:id="rId16"/>
   </p:notesMasterIdLst>
   <p:sldSz cx="12192000" cy="6858000"/>
   <p:notesSz cx="6858000" cy="12192000"/>
@@ -121,18 +120,18 @@
   <p:extLst>
     <p:ext uri="{521415D9-36F7-43E2-AB2F-B90AF26B5E84}">
       <p14:sectionLst xmlns:p14="http://schemas.microsoft.com/office/powerpoint/2010/main">
-        <p14:section name="Pembuka" id="{6cafd7c0-2ae9-c666-3e63-7ac703ff02eb}">
+        <p14:section name="Pembuka" id="{57f15e5b-4e25-1780-ca25-f04dde00cc71}">
           <p14:sldIdLst>
             <p14:sldId id="256"/>
           </p14:sldIdLst>
         </p14:section>
-        <p14:section name="Produk" id="{1ff58dc5-413c-bcf6-ea6d-b9cd3a5715a1}">
+        <p14:section name="Produk" id="{20ff58c5-5f3f-6c42-99aa-6822d8457d33}">
           <p14:sldIdLst>
             <p14:sldId id="257"/>
             <p14:sldId id="258"/>
           </p14:sldIdLst>
         </p14:section>
-        <p14:section name="Desain sistem" id="{71e5f6f1-df7e-4e66-337a-7ce6b7d9f201}">
+        <p14:section name="Desain sistem" id="{dc0b9696-427c-282b-39d0-2f1a9f985f0e}">
           <p14:sldIdLst>
             <p14:sldId id="259"/>
             <p14:sldId id="260"/>
@@ -140,24 +139,23 @@
             <p14:sldId id="262"/>
           </p14:sldIdLst>
         </p14:section>
-        <p14:section name="Aturan jadwal" id="{bab7dc17-79fd-9c47-153f-1e7cc8369ef3}">
+        <p14:section name="Aturan jadwal" id="{df5e34f7-03a1-80fa-3a70-ca445a3ea74b}">
           <p14:sldIdLst>
             <p14:sldId id="263"/>
             <p14:sldId id="264"/>
             <p14:sldId id="265"/>
           </p14:sldIdLst>
         </p14:section>
-        <p14:section name="Kode" id="{e222315c-0483-3914-ed18-24b8d6bfd231}">
+        <p14:section name="Kode" id="{3f5af054-1308-b693-7522-1dfdef726cb2}">
           <p14:sldIdLst>
             <p14:sldId id="266"/>
             <p14:sldId id="267"/>
             <p14:sldId id="268"/>
           </p14:sldIdLst>
         </p14:section>
-        <p14:section name="Penutup" id="{c4f380d6-e3b0-5679-668e-c46f138db6ba}">
+        <p14:section name="Penutup" id="{5213f0a3-4312-7575-17dd-f2767758e922}">
           <p14:sldIdLst>
             <p14:sldId id="269"/>
-            <p14:sldId id="270"/>
           </p14:sldIdLst>
         </p14:section>
       </p14:sectionLst>
@@ -1004,7 +1002,7 @@
           <a:p>
             <a:r>
               <a:rPr lang="en-US" dirty="0"/>
-              <a:t>Menyebutkan yang belum selesai sendiri menunjukkan saya tahu di mana sistemnya tipis. Pilih satu untuk dibahas.</a:t>
+              <a:t>Tutup dengan link. Tawarkan untuk membuka demo atau kode di layar.</a:t>
             </a:r>
             <a:endParaRPr lang="en-US" dirty="0"/>
           </a:p>
@@ -1028,94 +1026,6 @@
             <a:fld id="{F7021451-1387-4CA6-816F-3879F97B5CBC}" type="slidenum">
               <a:rPr lang="en-US"/>
               <a:t>14</a:t>
-            </a:fld>
-            <a:endParaRPr lang="en-US"/>
-          </a:p>
-        </p:txBody>
-      </p:sp>
-    </p:spTree>
-    <p:extLst>
-      <p:ext uri="{BB962C8B-B14F-4D97-AF65-F5344CB8AC3E}">
-        <p14:creationId xmlns:p14="http://schemas.microsoft.com/office/powerpoint/2010/main" val="1024086991"/>
-      </p:ext>
-    </p:extLst>
-  </p:cSld>
-  <p:clrMapOvr>
-    <a:masterClrMapping/>
-  </p:clrMapOvr>
-</p:notes>
-</file>
-
-<file path=ppt/notesSlides/notesSlide15.xml><?xml version="1.0" encoding="utf-8"?>
-<p:notes xmlns:a="http://schemas.openxmlformats.org/drawingml/2006/main" xmlns:r="http://schemas.openxmlformats.org/officeDocument/2006/relationships" xmlns:p="http://schemas.openxmlformats.org/presentationml/2006/main">
-  <p:cSld>
-    <p:spTree>
-      <p:nvGrpSpPr>
-        <p:cNvPr id="1" name=""/>
-        <p:cNvGrpSpPr/>
-        <p:nvPr/>
-      </p:nvGrpSpPr>
-      <p:grpSpPr>
-        <a:xfrm>
-          <a:off x="0" y="0"/>
-          <a:ext cx="0" cy="0"/>
-          <a:chOff x="0" y="0"/>
-          <a:chExt cx="0" cy="0"/>
-        </a:xfrm>
-      </p:grpSpPr>
-      <p:sp>
-        <p:nvSpPr>
-          <p:cNvPr id="2" name="Slide Image Placeholder 1"/>
-          <p:cNvSpPr>
-            <a:spLocks noGrp="1" noRot="1" noChangeAspect="1"/>
-          </p:cNvSpPr>
-          <p:nvPr>
-            <p:ph type="sldImg"/>
-          </p:nvPr>
-        </p:nvSpPr>
-        <p:spPr/>
-      </p:sp>
-      <p:sp>
-        <p:nvSpPr>
-          <p:cNvPr id="3" name="Notes Placeholder 2"/>
-          <p:cNvSpPr>
-            <a:spLocks noGrp="1"/>
-          </p:cNvSpPr>
-          <p:nvPr>
-            <p:ph type="body" idx="1"/>
-          </p:nvPr>
-        </p:nvSpPr>
-        <p:spPr/>
-        <p:txBody>
-          <a:bodyPr/>
-          <a:lstStyle/>
-          <a:p>
-            <a:r>
-              <a:rPr lang="en-US" dirty="0"/>
-              <a:t>Tutup dengan link. Tawarkan untuk membuka demo atau kode di layar.</a:t>
-            </a:r>
-            <a:endParaRPr lang="en-US" dirty="0"/>
-          </a:p>
-        </p:txBody>
-      </p:sp>
-      <p:sp>
-        <p:nvSpPr>
-          <p:cNvPr id="4" name="Slide Number Placeholder 3"/>
-          <p:cNvSpPr>
-            <a:spLocks noGrp="1"/>
-          </p:cNvSpPr>
-          <p:nvPr>
-            <p:ph type="sldNum" sz="quarter" idx="10"/>
-          </p:nvPr>
-        </p:nvSpPr>
-        <p:spPr/>
-        <p:txBody>
-          <a:bodyPr/>
-          <a:lstStyle/>
-          <a:p>
-            <a:fld id="{F7021451-1387-4CA6-816F-3879F97B5CBC}" type="slidenum">
-              <a:rPr lang="en-US"/>
-              <a:t>15</a:t>
             </a:fld>
             <a:endParaRPr lang="en-US"/>
           </a:p>
@@ -5172,740 +5082,6 @@
                   <a:schemeClr val="bg1"/>
                 </a:solidFill>
               </a:rPr>
-              <a:t>Yang belum selesai</a:t>
-            </a:r>
-            <a:endParaRPr lang="en-US" sz="3200" dirty="0"/>
-          </a:p>
-        </p:txBody>
-      </p:sp>
-      <p:graphicFrame>
-        <p:nvGraphicFramePr>
-          <p:cNvPr id="15" name="Table 0"/>
-          <p:cNvGraphicFramePr>
-            <a:graphicFrameLocks noGrp="1"/>
-          </p:cNvGraphicFramePr>
-          <p:nvPr>
-            <p:extLst>
-              <p:ext uri="{D42A27DB-BD31-4B8C-83A1-F6EECF244321}">
-                <p14:modId xmlns:p14="http://schemas.microsoft.com/office/powerpoint/2010/main" val="1579011935"/>
-              </p:ext>
-            </p:extLst>
-          </p:nvPr>
-        </p:nvGraphicFramePr>
-        <p:xfrm>
-          <a:off x="548640" y="1463040"/>
-          <a:ext cx="11064240" cy="914400"/>
-        </p:xfrm>
-        <a:graphic>
-          <a:graphicData uri="http://schemas.openxmlformats.org/drawingml/2006/table">
-            <a:tbl>
-              <a:tblPr/>
-              <a:tblGrid>
-                <a:gridCol w="4023360"/>
-                <a:gridCol w="7040880"/>
-              </a:tblGrid>
-              <a:tr h="0">
-                <a:tc>
-                  <a:txBody>
-                    <a:bodyPr/>
-                    <a:lstStyle/>
-                    <a:p>
-                      <a:pPr indent="0" marL="0">
-                        <a:buNone/>
-                      </a:pPr>
-                      <a:r>
-                        <a:rPr lang="en-US" sz="1500" b="1" dirty="0">
-                          <a:solidFill>
-                            <a:srgbClr val="E0313E"/>
-                          </a:solidFill>
-                        </a:rPr>
-                        <a:t>Yang belum</a:t>
-                      </a:r>
-                      <a:endParaRPr lang="en-US" sz="1500" dirty="0"/>
-                    </a:p>
-                  </a:txBody>
-                  <a:tcPr marL="164592" marR="164592" marT="182880" marB="182880" anchor="t">
-                    <a:lnL w="9525" cap="flat" cmpd="sng" algn="ctr">
-                      <a:solidFill>
-                        <a:srgbClr val="3A3D46"/>
-                      </a:solidFill>
-                      <a:prstDash val="solid"/>
-                      <a:round/>
-                      <a:headEnd type="none" w="med" len="med"/>
-                      <a:tailEnd type="none" w="med" len="med"/>
-                    </a:lnL>
-                    <a:lnR w="9525" cap="flat" cmpd="sng" algn="ctr">
-                      <a:solidFill>
-                        <a:srgbClr val="3A3D46"/>
-                      </a:solidFill>
-                      <a:prstDash val="solid"/>
-                      <a:round/>
-                      <a:headEnd type="none" w="med" len="med"/>
-                      <a:tailEnd type="none" w="med" len="med"/>
-                    </a:lnR>
-                    <a:lnT w="9525" cap="flat" cmpd="sng" algn="ctr">
-                      <a:solidFill>
-                        <a:srgbClr val="3A3D46"/>
-                      </a:solidFill>
-                      <a:prstDash val="solid"/>
-                      <a:round/>
-                      <a:headEnd type="none" w="med" len="med"/>
-                      <a:tailEnd type="none" w="med" len="med"/>
-                    </a:lnT>
-                    <a:lnB w="9525" cap="flat" cmpd="sng" algn="ctr">
-                      <a:solidFill>
-                        <a:srgbClr val="3A3D46"/>
-                      </a:solidFill>
-                      <a:prstDash val="solid"/>
-                      <a:round/>
-                      <a:headEnd type="none" w="med" len="med"/>
-                      <a:tailEnd type="none" w="med" len="med"/>
-                    </a:lnB>
-                    <a:solidFill>
-                      <a:srgbClr val="25272E"/>
-                    </a:solidFill>
-                  </a:tcPr>
-                </a:tc>
-                <a:tc>
-                  <a:txBody>
-                    <a:bodyPr/>
-                    <a:lstStyle/>
-                    <a:p>
-                      <a:pPr indent="0" marL="0">
-                        <a:buNone/>
-                      </a:pPr>
-                      <a:r>
-                        <a:rPr lang="en-US" sz="1500" b="1" dirty="0">
-                          <a:solidFill>
-                            <a:srgbClr val="E0313E"/>
-                          </a:solidFill>
-                        </a:rPr>
-                        <a:t>Langkah pertama</a:t>
-                      </a:r>
-                      <a:endParaRPr lang="en-US" sz="1500" dirty="0"/>
-                    </a:p>
-                  </a:txBody>
-                  <a:tcPr marL="164592" marR="164592" marT="182880" marB="182880" anchor="t">
-                    <a:lnL w="9525" cap="flat" cmpd="sng" algn="ctr">
-                      <a:solidFill>
-                        <a:srgbClr val="3A3D46"/>
-                      </a:solidFill>
-                      <a:prstDash val="solid"/>
-                      <a:round/>
-                      <a:headEnd type="none" w="med" len="med"/>
-                      <a:tailEnd type="none" w="med" len="med"/>
-                    </a:lnL>
-                    <a:lnR w="9525" cap="flat" cmpd="sng" algn="ctr">
-                      <a:solidFill>
-                        <a:srgbClr val="3A3D46"/>
-                      </a:solidFill>
-                      <a:prstDash val="solid"/>
-                      <a:round/>
-                      <a:headEnd type="none" w="med" len="med"/>
-                      <a:tailEnd type="none" w="med" len="med"/>
-                    </a:lnR>
-                    <a:lnT w="9525" cap="flat" cmpd="sng" algn="ctr">
-                      <a:solidFill>
-                        <a:srgbClr val="3A3D46"/>
-                      </a:solidFill>
-                      <a:prstDash val="solid"/>
-                      <a:round/>
-                      <a:headEnd type="none" w="med" len="med"/>
-                      <a:tailEnd type="none" w="med" len="med"/>
-                    </a:lnT>
-                    <a:lnB w="9525" cap="flat" cmpd="sng" algn="ctr">
-                      <a:solidFill>
-                        <a:srgbClr val="3A3D46"/>
-                      </a:solidFill>
-                      <a:prstDash val="solid"/>
-                      <a:round/>
-                      <a:headEnd type="none" w="med" len="med"/>
-                      <a:tailEnd type="none" w="med" len="med"/>
-                    </a:lnB>
-                    <a:solidFill>
-                      <a:srgbClr val="25272E"/>
-                    </a:solidFill>
-                  </a:tcPr>
-                </a:tc>
-              </a:tr>
-              <a:tr h="0">
-                <a:tc>
-                  <a:txBody>
-                    <a:bodyPr/>
-                    <a:lstStyle/>
-                    <a:p>
-                      <a:pPr indent="0" marL="0">
-                        <a:buNone/>
-                      </a:pPr>
-                      <a:r>
-                        <a:rPr lang="en-US" sz="1700" b="1" dirty="0">
-                          <a:solidFill>
-                            <a:srgbClr val="FFFFFF"/>
-                          </a:solidFill>
-                        </a:rPr>
-                        <a:t>Produksi masih satu tabel per kota</a:t>
-                      </a:r>
-                      <a:endParaRPr lang="en-US" sz="1700" dirty="0"/>
-                    </a:p>
-                  </a:txBody>
-                  <a:tcPr marL="164592" marR="164592" marT="182880" marB="182880" anchor="t">
-                    <a:lnL w="9525" cap="flat" cmpd="sng" algn="ctr">
-                      <a:solidFill>
-                        <a:srgbClr val="3A3D46"/>
-                      </a:solidFill>
-                      <a:prstDash val="solid"/>
-                      <a:round/>
-                      <a:headEnd type="none" w="med" len="med"/>
-                      <a:tailEnd type="none" w="med" len="med"/>
-                    </a:lnL>
-                    <a:lnR w="9525" cap="flat" cmpd="sng" algn="ctr">
-                      <a:solidFill>
-                        <a:srgbClr val="3A3D46"/>
-                      </a:solidFill>
-                      <a:prstDash val="solid"/>
-                      <a:round/>
-                      <a:headEnd type="none" w="med" len="med"/>
-                      <a:tailEnd type="none" w="med" len="med"/>
-                    </a:lnR>
-                    <a:lnT w="9525" cap="flat" cmpd="sng" algn="ctr">
-                      <a:solidFill>
-                        <a:srgbClr val="3A3D46"/>
-                      </a:solidFill>
-                      <a:prstDash val="solid"/>
-                      <a:round/>
-                      <a:headEnd type="none" w="med" len="med"/>
-                      <a:tailEnd type="none" w="med" len="med"/>
-                    </a:lnT>
-                    <a:lnB w="9525" cap="flat" cmpd="sng" algn="ctr">
-                      <a:solidFill>
-                        <a:srgbClr val="3A3D46"/>
-                      </a:solidFill>
-                      <a:prstDash val="solid"/>
-                      <a:round/>
-                      <a:headEnd type="none" w="med" len="med"/>
-                      <a:tailEnd type="none" w="med" len="med"/>
-                    </a:lnB>
-                  </a:tcPr>
-                </a:tc>
-                <a:tc>
-                  <a:txBody>
-                    <a:bodyPr/>
-                    <a:lstStyle/>
-                    <a:p>
-                      <a:pPr indent="0" marL="0">
-                        <a:buNone/>
-                      </a:pPr>
-                      <a:r>
-                        <a:rPr lang="en-US" sz="1700" dirty="0">
-                          <a:solidFill>
-                            <a:srgbClr val="AEB2BC"/>
-                          </a:solidFill>
-                        </a:rPr>
-                        <a:t>Isi schedule_slots dari tabel lama, buat view per kota untuk API lama, lalu pindahkan pembaca bertahap</a:t>
-                      </a:r>
-                      <a:endParaRPr lang="en-US" sz="1700" dirty="0"/>
-                    </a:p>
-                  </a:txBody>
-                  <a:tcPr marL="164592" marR="164592" marT="182880" marB="182880" anchor="t">
-                    <a:lnL w="9525" cap="flat" cmpd="sng" algn="ctr">
-                      <a:solidFill>
-                        <a:srgbClr val="3A3D46"/>
-                      </a:solidFill>
-                      <a:prstDash val="solid"/>
-                      <a:round/>
-                      <a:headEnd type="none" w="med" len="med"/>
-                      <a:tailEnd type="none" w="med" len="med"/>
-                    </a:lnL>
-                    <a:lnR w="9525" cap="flat" cmpd="sng" algn="ctr">
-                      <a:solidFill>
-                        <a:srgbClr val="3A3D46"/>
-                      </a:solidFill>
-                      <a:prstDash val="solid"/>
-                      <a:round/>
-                      <a:headEnd type="none" w="med" len="med"/>
-                      <a:tailEnd type="none" w="med" len="med"/>
-                    </a:lnR>
-                    <a:lnT w="9525" cap="flat" cmpd="sng" algn="ctr">
-                      <a:solidFill>
-                        <a:srgbClr val="3A3D46"/>
-                      </a:solidFill>
-                      <a:prstDash val="solid"/>
-                      <a:round/>
-                      <a:headEnd type="none" w="med" len="med"/>
-                      <a:tailEnd type="none" w="med" len="med"/>
-                    </a:lnT>
-                    <a:lnB w="9525" cap="flat" cmpd="sng" algn="ctr">
-                      <a:solidFill>
-                        <a:srgbClr val="3A3D46"/>
-                      </a:solidFill>
-                      <a:prstDash val="solid"/>
-                      <a:round/>
-                      <a:headEnd type="none" w="med" len="med"/>
-                      <a:tailEnd type="none" w="med" len="med"/>
-                    </a:lnB>
-                  </a:tcPr>
-                </a:tc>
-              </a:tr>
-              <a:tr h="0">
-                <a:tc>
-                  <a:txBody>
-                    <a:bodyPr/>
-                    <a:lstStyle/>
-                    <a:p>
-                      <a:pPr indent="0" marL="0">
-                        <a:buNone/>
-                      </a:pPr>
-                      <a:r>
-                        <a:rPr lang="en-US" sz="1700" b="1" dirty="0">
-                          <a:solidFill>
-                            <a:srgbClr val="FFFFFF"/>
-                          </a:solidFill>
-                        </a:rPr>
-                        <a:t>Semua jam dianggap WIB</a:t>
-                      </a:r>
-                      <a:endParaRPr lang="en-US" sz="1700" dirty="0"/>
-                    </a:p>
-                  </a:txBody>
-                  <a:tcPr marL="164592" marR="164592" marT="182880" marB="182880" anchor="t">
-                    <a:lnL w="9525" cap="flat" cmpd="sng" algn="ctr">
-                      <a:solidFill>
-                        <a:srgbClr val="3A3D46"/>
-                      </a:solidFill>
-                      <a:prstDash val="solid"/>
-                      <a:round/>
-                      <a:headEnd type="none" w="med" len="med"/>
-                      <a:tailEnd type="none" w="med" len="med"/>
-                    </a:lnL>
-                    <a:lnR w="9525" cap="flat" cmpd="sng" algn="ctr">
-                      <a:solidFill>
-                        <a:srgbClr val="3A3D46"/>
-                      </a:solidFill>
-                      <a:prstDash val="solid"/>
-                      <a:round/>
-                      <a:headEnd type="none" w="med" len="med"/>
-                      <a:tailEnd type="none" w="med" len="med"/>
-                    </a:lnR>
-                    <a:lnT w="9525" cap="flat" cmpd="sng" algn="ctr">
-                      <a:solidFill>
-                        <a:srgbClr val="3A3D46"/>
-                      </a:solidFill>
-                      <a:prstDash val="solid"/>
-                      <a:round/>
-                      <a:headEnd type="none" w="med" len="med"/>
-                      <a:tailEnd type="none" w="med" len="med"/>
-                    </a:lnT>
-                    <a:lnB w="9525" cap="flat" cmpd="sng" algn="ctr">
-                      <a:solidFill>
-                        <a:srgbClr val="3A3D46"/>
-                      </a:solidFill>
-                      <a:prstDash val="solid"/>
-                      <a:round/>
-                      <a:headEnd type="none" w="med" len="med"/>
-                      <a:tailEnd type="none" w="med" len="med"/>
-                    </a:lnB>
-                  </a:tcPr>
-                </a:tc>
-                <a:tc>
-                  <a:txBody>
-                    <a:bodyPr/>
-                    <a:lstStyle/>
-                    <a:p>
-                      <a:pPr indent="0" marL="0">
-                        <a:buNone/>
-                      </a:pPr>
-                      <a:r>
-                        <a:rPr lang="en-US" sz="1700" dirty="0">
-                          <a:solidFill>
-                            <a:srgbClr val="AEB2BC"/>
-                          </a:solidFill>
-                        </a:rPr>
-                        <a:t>Kolom zona waktu di stations, untuk stasiun di WITA atau WIT</a:t>
-                      </a:r>
-                      <a:endParaRPr lang="en-US" sz="1700" dirty="0"/>
-                    </a:p>
-                  </a:txBody>
-                  <a:tcPr marL="164592" marR="164592" marT="182880" marB="182880" anchor="t">
-                    <a:lnL w="9525" cap="flat" cmpd="sng" algn="ctr">
-                      <a:solidFill>
-                        <a:srgbClr val="3A3D46"/>
-                      </a:solidFill>
-                      <a:prstDash val="solid"/>
-                      <a:round/>
-                      <a:headEnd type="none" w="med" len="med"/>
-                      <a:tailEnd type="none" w="med" len="med"/>
-                    </a:lnL>
-                    <a:lnR w="9525" cap="flat" cmpd="sng" algn="ctr">
-                      <a:solidFill>
-                        <a:srgbClr val="3A3D46"/>
-                      </a:solidFill>
-                      <a:prstDash val="solid"/>
-                      <a:round/>
-                      <a:headEnd type="none" w="med" len="med"/>
-                      <a:tailEnd type="none" w="med" len="med"/>
-                    </a:lnR>
-                    <a:lnT w="9525" cap="flat" cmpd="sng" algn="ctr">
-                      <a:solidFill>
-                        <a:srgbClr val="3A3D46"/>
-                      </a:solidFill>
-                      <a:prstDash val="solid"/>
-                      <a:round/>
-                      <a:headEnd type="none" w="med" len="med"/>
-                      <a:tailEnd type="none" w="med" len="med"/>
-                    </a:lnT>
-                    <a:lnB w="9525" cap="flat" cmpd="sng" algn="ctr">
-                      <a:solidFill>
-                        <a:srgbClr val="3A3D46"/>
-                      </a:solidFill>
-                      <a:prstDash val="solid"/>
-                      <a:round/>
-                      <a:headEnd type="none" w="med" len="med"/>
-                      <a:tailEnd type="none" w="med" len="med"/>
-                    </a:lnB>
-                  </a:tcPr>
-                </a:tc>
-              </a:tr>
-              <a:tr h="0">
-                <a:tc>
-                  <a:txBody>
-                    <a:bodyPr/>
-                    <a:lstStyle/>
-                    <a:p>
-                      <a:pPr indent="0" marL="0">
-                        <a:buNone/>
-                      </a:pPr>
-                      <a:r>
-                        <a:rPr lang="en-US" sz="1700" b="1" dirty="0">
-                          <a:solidFill>
-                            <a:srgbClr val="FFFFFF"/>
-                          </a:solidFill>
-                        </a:rPr>
-                        <a:t>Belum ada jadwal khusus</a:t>
-                      </a:r>
-                      <a:endParaRPr lang="en-US" sz="1700" dirty="0"/>
-                    </a:p>
-                  </a:txBody>
-                  <a:tcPr marL="164592" marR="164592" marT="182880" marB="182880" anchor="t">
-                    <a:lnL w="9525" cap="flat" cmpd="sng" algn="ctr">
-                      <a:solidFill>
-                        <a:srgbClr val="3A3D46"/>
-                      </a:solidFill>
-                      <a:prstDash val="solid"/>
-                      <a:round/>
-                      <a:headEnd type="none" w="med" len="med"/>
-                      <a:tailEnd type="none" w="med" len="med"/>
-                    </a:lnL>
-                    <a:lnR w="9525" cap="flat" cmpd="sng" algn="ctr">
-                      <a:solidFill>
-                        <a:srgbClr val="3A3D46"/>
-                      </a:solidFill>
-                      <a:prstDash val="solid"/>
-                      <a:round/>
-                      <a:headEnd type="none" w="med" len="med"/>
-                      <a:tailEnd type="none" w="med" len="med"/>
-                    </a:lnR>
-                    <a:lnT w="9525" cap="flat" cmpd="sng" algn="ctr">
-                      <a:solidFill>
-                        <a:srgbClr val="3A3D46"/>
-                      </a:solidFill>
-                      <a:prstDash val="solid"/>
-                      <a:round/>
-                      <a:headEnd type="none" w="med" len="med"/>
-                      <a:tailEnd type="none" w="med" len="med"/>
-                    </a:lnT>
-                    <a:lnB w="9525" cap="flat" cmpd="sng" algn="ctr">
-                      <a:solidFill>
-                        <a:srgbClr val="3A3D46"/>
-                      </a:solidFill>
-                      <a:prstDash val="solid"/>
-                      <a:round/>
-                      <a:headEnd type="none" w="med" len="med"/>
-                      <a:tailEnd type="none" w="med" len="med"/>
-                    </a:lnB>
-                  </a:tcPr>
-                </a:tc>
-                <a:tc>
-                  <a:txBody>
-                    <a:bodyPr/>
-                    <a:lstStyle/>
-                    <a:p>
-                      <a:pPr indent="0" marL="0">
-                        <a:buNone/>
-                      </a:pPr>
-                      <a:r>
-                        <a:rPr lang="en-US" sz="1700" dirty="0">
-                          <a:solidFill>
-                            <a:srgbClr val="AEB2BC"/>
-                          </a:solidFill>
-                        </a:rPr>
-                        <a:t>Tabel pengganti per tanggal (libur, siaran khusus) di atas pola mingguan</a:t>
-                      </a:r>
-                      <a:endParaRPr lang="en-US" sz="1700" dirty="0"/>
-                    </a:p>
-                  </a:txBody>
-                  <a:tcPr marL="164592" marR="164592" marT="182880" marB="182880" anchor="t">
-                    <a:lnL w="9525" cap="flat" cmpd="sng" algn="ctr">
-                      <a:solidFill>
-                        <a:srgbClr val="3A3D46"/>
-                      </a:solidFill>
-                      <a:prstDash val="solid"/>
-                      <a:round/>
-                      <a:headEnd type="none" w="med" len="med"/>
-                      <a:tailEnd type="none" w="med" len="med"/>
-                    </a:lnL>
-                    <a:lnR w="9525" cap="flat" cmpd="sng" algn="ctr">
-                      <a:solidFill>
-                        <a:srgbClr val="3A3D46"/>
-                      </a:solidFill>
-                      <a:prstDash val="solid"/>
-                      <a:round/>
-                      <a:headEnd type="none" w="med" len="med"/>
-                      <a:tailEnd type="none" w="med" len="med"/>
-                    </a:lnR>
-                    <a:lnT w="9525" cap="flat" cmpd="sng" algn="ctr">
-                      <a:solidFill>
-                        <a:srgbClr val="3A3D46"/>
-                      </a:solidFill>
-                      <a:prstDash val="solid"/>
-                      <a:round/>
-                      <a:headEnd type="none" w="med" len="med"/>
-                      <a:tailEnd type="none" w="med" len="med"/>
-                    </a:lnT>
-                    <a:lnB w="9525" cap="flat" cmpd="sng" algn="ctr">
-                      <a:solidFill>
-                        <a:srgbClr val="3A3D46"/>
-                      </a:solidFill>
-                      <a:prstDash val="solid"/>
-                      <a:round/>
-                      <a:headEnd type="none" w="med" len="med"/>
-                      <a:tailEnd type="none" w="med" len="med"/>
-                    </a:lnB>
-                  </a:tcPr>
-                </a:tc>
-              </a:tr>
-              <a:tr h="0">
-                <a:tc>
-                  <a:txBody>
-                    <a:bodyPr/>
-                    <a:lstStyle/>
-                    <a:p>
-                      <a:pPr indent="0" marL="0">
-                        <a:buNone/>
-                      </a:pPr>
-                      <a:r>
-                        <a:rPr lang="en-US" sz="1700" b="1" dirty="0">
-                          <a:solidFill>
-                            <a:srgbClr val="FFFFFF"/>
-                          </a:solidFill>
-                        </a:rPr>
-                        <a:t>Status stream diisi manual</a:t>
-                      </a:r>
-                      <a:endParaRPr lang="en-US" sz="1700" dirty="0"/>
-                    </a:p>
-                  </a:txBody>
-                  <a:tcPr marL="164592" marR="164592" marT="182880" marB="182880" anchor="t">
-                    <a:lnL w="9525" cap="flat" cmpd="sng" algn="ctr">
-                      <a:solidFill>
-                        <a:srgbClr val="3A3D46"/>
-                      </a:solidFill>
-                      <a:prstDash val="solid"/>
-                      <a:round/>
-                      <a:headEnd type="none" w="med" len="med"/>
-                      <a:tailEnd type="none" w="med" len="med"/>
-                    </a:lnL>
-                    <a:lnR w="9525" cap="flat" cmpd="sng" algn="ctr">
-                      <a:solidFill>
-                        <a:srgbClr val="3A3D46"/>
-                      </a:solidFill>
-                      <a:prstDash val="solid"/>
-                      <a:round/>
-                      <a:headEnd type="none" w="med" len="med"/>
-                      <a:tailEnd type="none" w="med" len="med"/>
-                    </a:lnR>
-                    <a:lnT w="9525" cap="flat" cmpd="sng" algn="ctr">
-                      <a:solidFill>
-                        <a:srgbClr val="3A3D46"/>
-                      </a:solidFill>
-                      <a:prstDash val="solid"/>
-                      <a:round/>
-                      <a:headEnd type="none" w="med" len="med"/>
-                      <a:tailEnd type="none" w="med" len="med"/>
-                    </a:lnT>
-                    <a:lnB w="9525" cap="flat" cmpd="sng" algn="ctr">
-                      <a:solidFill>
-                        <a:srgbClr val="3A3D46"/>
-                      </a:solidFill>
-                      <a:prstDash val="solid"/>
-                      <a:round/>
-                      <a:headEnd type="none" w="med" len="med"/>
-                      <a:tailEnd type="none" w="med" len="med"/>
-                    </a:lnB>
-                  </a:tcPr>
-                </a:tc>
-                <a:tc>
-                  <a:txBody>
-                    <a:bodyPr/>
-                    <a:lstStyle/>
-                    <a:p>
-                      <a:pPr indent="0" marL="0">
-                        <a:buNone/>
-                      </a:pPr>
-                      <a:r>
-                        <a:rPr lang="en-US" sz="1700" dirty="0">
-                          <a:solidFill>
-                            <a:srgbClr val="AEB2BC"/>
-                          </a:solidFill>
-                        </a:rPr>
-                        <a:t>Health check stream yang mengisi live / idle / offline</a:t>
-                      </a:r>
-                      <a:endParaRPr lang="en-US" sz="1700" dirty="0"/>
-                    </a:p>
-                  </a:txBody>
-                  <a:tcPr marL="164592" marR="164592" marT="182880" marB="182880" anchor="t">
-                    <a:lnL w="9525" cap="flat" cmpd="sng" algn="ctr">
-                      <a:solidFill>
-                        <a:srgbClr val="3A3D46"/>
-                      </a:solidFill>
-                      <a:prstDash val="solid"/>
-                      <a:round/>
-                      <a:headEnd type="none" w="med" len="med"/>
-                      <a:tailEnd type="none" w="med" len="med"/>
-                    </a:lnL>
-                    <a:lnR w="9525" cap="flat" cmpd="sng" algn="ctr">
-                      <a:solidFill>
-                        <a:srgbClr val="3A3D46"/>
-                      </a:solidFill>
-                      <a:prstDash val="solid"/>
-                      <a:round/>
-                      <a:headEnd type="none" w="med" len="med"/>
-                      <a:tailEnd type="none" w="med" len="med"/>
-                    </a:lnR>
-                    <a:lnT w="9525" cap="flat" cmpd="sng" algn="ctr">
-                      <a:solidFill>
-                        <a:srgbClr val="3A3D46"/>
-                      </a:solidFill>
-                      <a:prstDash val="solid"/>
-                      <a:round/>
-                      <a:headEnd type="none" w="med" len="med"/>
-                      <a:tailEnd type="none" w="med" len="med"/>
-                    </a:lnT>
-                    <a:lnB w="9525" cap="flat" cmpd="sng" algn="ctr">
-                      <a:solidFill>
-                        <a:srgbClr val="3A3D46"/>
-                      </a:solidFill>
-                      <a:prstDash val="solid"/>
-                      <a:round/>
-                      <a:headEnd type="none" w="med" len="med"/>
-                      <a:tailEnd type="none" w="med" len="med"/>
-                    </a:lnB>
-                  </a:tcPr>
-                </a:tc>
-              </a:tr>
-            </a:tbl>
-          </a:graphicData>
-        </a:graphic>
-      </p:graphicFrame>
-      <p:sp>
-        <p:nvSpPr>
-          <p:cNvPr id="25" name="Slide Number Placeholder 0"/>
-          <p:cNvSpPr>
-            <a:spLocks noGrp="1"/>
-          </p:cNvSpPr>
-          <p:nvPr>
-            <p:ph type="sldNum" sz="quarter" idx="4294967295"/>
-          </p:nvPr>
-        </p:nvSpPr>
-        <p:spPr>
-          <a:xfrm>
-            <a:off x="11155680" y="6355080"/>
-            <a:ext cx="457200" cy="274320"/>
-          </a:xfrm>
-          <a:prstGeom prst="rect">
-            <a:avLst/>
-          </a:prstGeom>
-          <a:extLst>
-            <a:ext uri="{C572A759-6A51-4108-AA02-DFA0A04FC94B}">
-              <ma14:wrappingTextBoxFlag xmlns:ma14="http://schemas.microsoft.com/office/mac/drawingml/2011/main" val="0"/>
-            </a:ext>
-          </a:extLst>
-        </p:spPr>
-        <p:txBody>
-          <a:bodyPr/>
-          <a:lstStyle>
-            <a:lvl1pPr>
-              <a:defRPr sz="1000">
-                <a:solidFill>
-                  <a:schemeClr val="accent5"/>
-                </a:solidFill>
-              </a:defRPr>
-            </a:lvl1pPr>
-          </a:lstStyle>
-          <a:p>
-            <a:pPr algn="r"/>
-            <a:fld id="{F7021451-1387-4CA6-816F-3879F97B5CBC}" type="slidenum">
-              <a:rPr b="0" lang="en-US"/>
-              <a:t>14</a:t>
-            </a:fld>
-            <a:endParaRPr lang="en-US"/>
-          </a:p>
-        </p:txBody>
-      </p:sp>
-    </p:spTree>
-  </p:cSld>
-  <p:clrMapOvr>
-    <a:masterClrMapping/>
-  </p:clrMapOvr>
-</p:sld>
-</file>
-
-<file path=ppt/slides/slide15.xml><?xml version="1.0" encoding="utf-8"?>
-<p:sld xmlns:a="http://schemas.openxmlformats.org/drawingml/2006/main" xmlns:r="http://schemas.openxmlformats.org/officeDocument/2006/relationships" xmlns:p="http://schemas.openxmlformats.org/presentationml/2006/main">
-  <p:cSld name="Slide 15">
-    <p:spTree>
-      <p:nvGrpSpPr>
-        <p:cNvPr id="1" name=""/>
-        <p:cNvGrpSpPr/>
-        <p:nvPr/>
-      </p:nvGrpSpPr>
-      <p:grpSpPr>
-        <a:xfrm>
-          <a:off x="0" y="0"/>
-          <a:ext cx="0" cy="0"/>
-          <a:chOff x="0" y="0"/>
-          <a:chExt cx="0" cy="0"/>
-        </a:xfrm>
-      </p:grpSpPr>
-      <p:sp>
-        <p:nvSpPr>
-          <p:cNvPr id="2" name="Text 0"/>
-          <p:cNvSpPr/>
-          <p:nvPr>
-            <p:ph idx="100" type="title" hasCustomPrompt="1"/>
-          </p:nvPr>
-        </p:nvSpPr>
-        <p:spPr>
-          <a:xfrm>
-            <a:off x="548640" y="457200"/>
-            <a:ext cx="11064240" cy="777240"/>
-          </a:xfrm>
-          <a:prstGeom prst="rect">
-            <a:avLst/>
-          </a:prstGeom>
-          <a:noFill/>
-          <a:ln/>
-        </p:spPr>
-        <p:txBody>
-          <a:bodyPr wrap="square" lIns="0" tIns="0" rIns="0" bIns="0" rtlCol="0" anchor="t"/>
-          <a:lstStyle/>
-          <a:p>
-            <a:pPr algn="l" indent="0" marL="0">
-              <a:buNone/>
-            </a:pPr>
-            <a:r>
-              <a:rPr lang="en-US" sz="3200" b="1" dirty="0">
-                <a:solidFill>
-                  <a:schemeClr val="bg1"/>
-                </a:solidFill>
-              </a:rPr>
               <a:t>Link demo, slide, dan produk asli</a:t>
             </a:r>
             <a:endParaRPr lang="en-US" sz="3200" dirty="0"/>
@@ -6411,7 +5587,7 @@
             <a:pPr algn="r"/>
             <a:fld id="{F7021451-1387-4CA6-816F-3879F97B5CBC}" type="slidenum">
               <a:rPr b="0" lang="en-US"/>
-              <a:t>15</a:t>
+              <a:t>14</a:t>
             </a:fld>
             <a:endParaRPr lang="en-US"/>
           </a:p>
@@ -9128,8 +8304,8 @@
         </p:blipFill>
         <p:spPr>
           <a:xfrm>
-            <a:off x="548640" y="1417320"/>
-            <a:ext cx="4835236" cy="4800600"/>
+            <a:off x="548640" y="1280160"/>
+            <a:ext cx="5157585" cy="5120640"/>
           </a:xfrm>
           <a:prstGeom prst="rect">
             <a:avLst/>
@@ -9144,8 +8320,8 @@
         </p:nvSpPr>
         <p:spPr>
           <a:xfrm>
-            <a:off x="5795356" y="1417320"/>
-            <a:ext cx="5817524" cy="365760"/>
+            <a:off x="6117705" y="1417320"/>
+            <a:ext cx="5495175" cy="365760"/>
           </a:xfrm>
           <a:prstGeom prst="rect">
             <a:avLst/>
@@ -9183,8 +8359,8 @@
         </p:nvSpPr>
         <p:spPr>
           <a:xfrm>
-            <a:off x="5795356" y="1801368"/>
-            <a:ext cx="5817524" cy="731520"/>
+            <a:off x="6117705" y="1801368"/>
+            <a:ext cx="5495175" cy="731520"/>
           </a:xfrm>
           <a:prstGeom prst="rect">
             <a:avLst/>
@@ -9219,8 +8395,8 @@
         </p:nvSpPr>
         <p:spPr>
           <a:xfrm>
-            <a:off x="5795356" y="2606040"/>
-            <a:ext cx="5817524" cy="365760"/>
+            <a:off x="6117705" y="2606040"/>
+            <a:ext cx="5495175" cy="365760"/>
           </a:xfrm>
           <a:prstGeom prst="rect">
             <a:avLst/>
@@ -9258,8 +8434,8 @@
         </p:nvSpPr>
         <p:spPr>
           <a:xfrm>
-            <a:off x="5795356" y="2990088"/>
-            <a:ext cx="5817524" cy="731520"/>
+            <a:off x="6117705" y="2990088"/>
+            <a:ext cx="5495175" cy="731520"/>
           </a:xfrm>
           <a:prstGeom prst="rect">
             <a:avLst/>
@@ -9294,8 +8470,8 @@
         </p:nvSpPr>
         <p:spPr>
           <a:xfrm>
-            <a:off x="5795356" y="3794760"/>
-            <a:ext cx="5817524" cy="365760"/>
+            <a:off x="6117705" y="3794760"/>
+            <a:ext cx="5495175" cy="365760"/>
           </a:xfrm>
           <a:prstGeom prst="rect">
             <a:avLst/>
@@ -9333,8 +8509,8 @@
         </p:nvSpPr>
         <p:spPr>
           <a:xfrm>
-            <a:off x="5795356" y="4178808"/>
-            <a:ext cx="5817524" cy="731520"/>
+            <a:off x="6117705" y="4178808"/>
+            <a:ext cx="5495175" cy="731520"/>
           </a:xfrm>
           <a:prstGeom prst="rect">
             <a:avLst/>
@@ -9369,8 +8545,8 @@
         </p:nvSpPr>
         <p:spPr>
           <a:xfrm>
-            <a:off x="5795356" y="4983480"/>
-            <a:ext cx="5817524" cy="365760"/>
+            <a:off x="6117705" y="4983480"/>
+            <a:ext cx="5495175" cy="365760"/>
           </a:xfrm>
           <a:prstGeom prst="rect">
             <a:avLst/>
@@ -9408,8 +8584,8 @@
         </p:nvSpPr>
         <p:spPr>
           <a:xfrm>
-            <a:off x="5795356" y="5367528"/>
-            <a:ext cx="5817524" cy="731520"/>
+            <a:off x="6117705" y="5367528"/>
+            <a:ext cx="5495175" cy="731520"/>
           </a:xfrm>
           <a:prstGeom prst="rect">
             <a:avLst/>

--- a/docs/XChannel-presentasi.pptx
+++ b/docs/XChannel-presentasi.pptx
@@ -122,12 +122,12 @@
   <p:extLst>
     <p:ext uri="{521415D9-36F7-43E2-AB2F-B90AF26B5E84}">
       <p14:sectionLst xmlns:p14="http://schemas.microsoft.com/office/powerpoint/2010/main">
-        <p14:section name="Pembuka" id="{f0513fd7-bd0e-b3c9-3f7e-7ef30745506b}">
+        <p14:section name="Pembuka" id="{ae676fd0-a462-b163-feb5-0ed6fac52ed4}">
           <p14:sldIdLst>
             <p14:sldId id="256"/>
           </p14:sldIdLst>
         </p14:section>
-        <p14:section name="Produk" id="{845bce06-fd1f-6aa8-b49f-dd850e4b97ed}">
+        <p14:section name="Produk" id="{c128aabf-66e0-d994-d9b2-8d0629bf7e0e}">
           <p14:sldIdLst>
             <p14:sldId id="257"/>
             <p14:sldId id="258"/>
@@ -135,7 +135,7 @@
             <p14:sldId id="260"/>
           </p14:sldIdLst>
         </p14:section>
-        <p14:section name="Desain sistem" id="{8ad42a70-fd95-26c3-2020-fca7c875fa28}">
+        <p14:section name="Desain sistem" id="{2dfa7e94-866e-feae-08fc-ece133f6357e}">
           <p14:sldIdLst>
             <p14:sldId id="261"/>
             <p14:sldId id="262"/>
@@ -143,21 +143,21 @@
             <p14:sldId id="264"/>
           </p14:sldIdLst>
         </p14:section>
-        <p14:section name="Aturan jadwal" id="{9c440d57-9f92-62f8-ca79-54fd94cd27c2}">
+        <p14:section name="Aturan jadwal" id="{9a3a2775-b460-1adb-981d-56a7c7f9aca2}">
           <p14:sldIdLst>
             <p14:sldId id="265"/>
             <p14:sldId id="266"/>
             <p14:sldId id="267"/>
           </p14:sldIdLst>
         </p14:section>
-        <p14:section name="Kode" id="{9b195bf7-8dae-0ae1-22c6-3c26bb3a4b0a}">
+        <p14:section name="Kode" id="{af2f2d7e-e46a-c2dc-4565-56060b943835}">
           <p14:sldIdLst>
             <p14:sldId id="268"/>
             <p14:sldId id="269"/>
             <p14:sldId id="270"/>
           </p14:sldIdLst>
         </p14:section>
-        <p14:section name="Penutup" id="{75f37fe0-bca3-a67a-a49d-1c17fe62b300}">
+        <p14:section name="Penutup" id="{85dc9f67-c012-6948-b288-32b49daa0d13}">
           <p14:sldIdLst>
             <p14:sldId id="271"/>
           </p14:sldIdLst>
